--- a/Vanguard_ABTest_Presentation.pptx
+++ b/Vanguard_ABTest_Presentation.pptx
@@ -7461,7 +7461,7 @@
                 <a:ea typeface="Georgia" pitchFamily="34" charset="-122"/>
                 <a:cs typeface="Georgia" pitchFamily="34" charset="-120"/>
               </a:rPr>
-              <a:t>Customer Profile</a:t>
+              <a:t>Who Are Vanguard's Clients?</a:t>
             </a:r>
             <a:endParaRPr lang="en-US" sz="2600" dirty="0"/>
           </a:p>
@@ -7534,33 +7534,8 @@
         </p:nvSpPr>
         <p:spPr>
           <a:xfrm>
-            <a:off x="320040" y="1353312"/>
-            <a:ext cx="2697480" cy="3547872"/>
-          </a:xfrm>
-          <a:prstGeom prst="rect">
-            <a:avLst/>
-          </a:prstGeom>
-          <a:solidFill>
-            <a:srgbClr val="FFFFFF"/>
-          </a:solidFill>
-          <a:ln w="6350">
-            <a:solidFill>
-              <a:srgbClr val="E8E5DE"/>
-            </a:solidFill>
-            <a:prstDash val="solid"/>
-          </a:ln>
-        </p:spPr>
-      </p:sp>
-      <p:sp>
-        <p:nvSpPr>
-          <p:cNvPr id="9" name="Shape 7"/>
-          <p:cNvSpPr/>
-          <p:nvPr/>
-        </p:nvSpPr>
-        <p:spPr>
-          <a:xfrm>
-            <a:off x="320040" y="1353312"/>
-            <a:ext cx="2697480" cy="411480"/>
+            <a:off x="365760" y="1353312"/>
+            <a:ext cx="4114800" cy="320040"/>
           </a:xfrm>
           <a:prstGeom prst="rect">
             <a:avLst/>
@@ -7578,26 +7553,26 @@
       </p:sp>
       <p:sp>
         <p:nvSpPr>
-          <p:cNvPr id="10" name="Text 8"/>
-          <p:cNvSpPr/>
-          <p:nvPr/>
-        </p:nvSpPr>
-        <p:spPr>
-          <a:xfrm>
-            <a:off x="457200" y="1389888"/>
-            <a:ext cx="2514600" cy="320040"/>
-          </a:xfrm>
-          <a:prstGeom prst="rect">
-            <a:avLst/>
-          </a:prstGeom>
-          <a:noFill/>
-          <a:ln/>
-        </p:spPr>
-        <p:txBody>
-          <a:bodyPr wrap="square" lIns="0" tIns="0" rIns="0" bIns="0" rtlCol="0" anchor="ctr"/>
-          <a:lstStyle/>
-          <a:p>
-            <a:pPr indent="0" marL="0">
+          <p:cNvPr id="9" name="Text 7"/>
+          <p:cNvSpPr/>
+          <p:nvPr/>
+        </p:nvSpPr>
+        <p:spPr>
+          <a:xfrm>
+            <a:off x="365760" y="1353312"/>
+            <a:ext cx="4114800" cy="320040"/>
+          </a:xfrm>
+          <a:prstGeom prst="rect">
+            <a:avLst/>
+          </a:prstGeom>
+          <a:noFill/>
+          <a:ln/>
+        </p:spPr>
+        <p:txBody>
+          <a:bodyPr wrap="square" lIns="0" tIns="0" rIns="0" bIns="0" rtlCol="0" anchor="ctr"/>
+          <a:lstStyle/>
+          <a:p>
+            <a:pPr algn="ctr" indent="0" marL="0">
               <a:buNone/>
             </a:pPr>
             <a:r>
@@ -7606,120 +7581,168 @@
                   <a:srgbClr val="FFFFFF"/>
                 </a:solidFill>
               </a:rPr>
-              <a:t>01  Who Are Vanguard's Clients?</a:t>
+              <a:t>Gender Distribution</a:t>
             </a:r>
             <a:endParaRPr lang="en-US" sz="1000" dirty="0"/>
           </a:p>
         </p:txBody>
       </p:sp>
-      <p:sp>
-        <p:nvSpPr>
-          <p:cNvPr id="11" name="Text 9"/>
-          <p:cNvSpPr/>
-          <p:nvPr/>
-        </p:nvSpPr>
-        <p:spPr>
-          <a:xfrm>
-            <a:off x="457200" y="1874520"/>
-            <a:ext cx="2468880" cy="2834640"/>
-          </a:xfrm>
-          <a:prstGeom prst="rect">
-            <a:avLst/>
-          </a:prstGeom>
-          <a:noFill/>
-          <a:ln/>
-        </p:spPr>
-        <p:txBody>
-          <a:bodyPr wrap="square" rtlCol="0" anchor="t"/>
-          <a:lstStyle/>
-          <a:p>
-            <a:pPr indent="0" marL="0">
-              <a:buNone/>
-            </a:pPr>
-            <a:r>
-              <a:rPr lang="en-US" sz="1000" i="1" dirty="0">
-                <a:solidFill>
-                  <a:srgbClr val="888780"/>
-                </a:solidFill>
-              </a:rPr>
-              <a:t>[Insert: Age distribution chart · Gender split · Tenure histogram]</a:t>
+      <p:pic>
+        <p:nvPicPr>
+          <p:cNvPr id="10" name="Image 0" descr="/home/claude/Gender.png">    </p:cNvPr>
+          <p:cNvPicPr>
+            <a:picLocks noChangeAspect="1"/>
+          </p:cNvPicPr>
+          <p:nvPr/>
+        </p:nvPicPr>
+        <p:blipFill>
+          <a:blip r:embed="rId1"/>
+          <a:stretch>
+            <a:fillRect/>
+          </a:stretch>
+        </p:blipFill>
+        <p:spPr>
+          <a:xfrm>
+            <a:off x="365760" y="1673352"/>
+            <a:ext cx="4114800" cy="1737360"/>
+          </a:xfrm>
+          <a:prstGeom prst="rect">
+            <a:avLst/>
+          </a:prstGeom>
+        </p:spPr>
+      </p:pic>
+      <p:sp>
+        <p:nvSpPr>
+          <p:cNvPr id="11" name="Shape 8"/>
+          <p:cNvSpPr/>
+          <p:nvPr/>
+        </p:nvSpPr>
+        <p:spPr>
+          <a:xfrm>
+            <a:off x="4663440" y="1353312"/>
+            <a:ext cx="4114800" cy="320040"/>
+          </a:xfrm>
+          <a:prstGeom prst="rect">
+            <a:avLst/>
+          </a:prstGeom>
+          <a:solidFill>
+            <a:srgbClr val="1A1A2E"/>
+          </a:solidFill>
+          <a:ln w="12700">
+            <a:solidFill>
+              <a:srgbClr val="1A1A2E"/>
+            </a:solidFill>
+            <a:prstDash val="solid"/>
+          </a:ln>
+        </p:spPr>
+      </p:sp>
+      <p:sp>
+        <p:nvSpPr>
+          <p:cNvPr id="12" name="Text 9"/>
+          <p:cNvSpPr/>
+          <p:nvPr/>
+        </p:nvSpPr>
+        <p:spPr>
+          <a:xfrm>
+            <a:off x="4663440" y="1353312"/>
+            <a:ext cx="4114800" cy="320040"/>
+          </a:xfrm>
+          <a:prstGeom prst="rect">
+            <a:avLst/>
+          </a:prstGeom>
+          <a:noFill/>
+          <a:ln/>
+        </p:spPr>
+        <p:txBody>
+          <a:bodyPr wrap="square" lIns="0" tIns="0" rIns="0" bIns="0" rtlCol="0" anchor="ctr"/>
+          <a:lstStyle/>
+          <a:p>
+            <a:pPr algn="ctr" indent="0" marL="0">
+              <a:buNone/>
+            </a:pPr>
+            <a:r>
+              <a:rPr lang="en-US" sz="1000" b="1" dirty="0">
+                <a:solidFill>
+                  <a:srgbClr val="FFFFFF"/>
+                </a:solidFill>
+              </a:rPr>
+              <a:t>Age Groups</a:t>
             </a:r>
             <a:endParaRPr lang="en-US" sz="1000" dirty="0"/>
           </a:p>
         </p:txBody>
       </p:sp>
-      <p:sp>
-        <p:nvSpPr>
-          <p:cNvPr id="12" name="Shape 10"/>
-          <p:cNvSpPr/>
-          <p:nvPr/>
-        </p:nvSpPr>
-        <p:spPr>
-          <a:xfrm>
-            <a:off x="3218688" y="1353312"/>
-            <a:ext cx="2697480" cy="3547872"/>
-          </a:xfrm>
-          <a:prstGeom prst="rect">
-            <a:avLst/>
-          </a:prstGeom>
-          <a:solidFill>
-            <a:srgbClr val="FFFFFF"/>
-          </a:solidFill>
-          <a:ln w="6350">
-            <a:solidFill>
-              <a:srgbClr val="E8E5DE"/>
-            </a:solidFill>
-            <a:prstDash val="solid"/>
-          </a:ln>
-        </p:spPr>
-      </p:sp>
-      <p:sp>
-        <p:nvSpPr>
-          <p:cNvPr id="13" name="Shape 11"/>
-          <p:cNvSpPr/>
-          <p:nvPr/>
-        </p:nvSpPr>
-        <p:spPr>
-          <a:xfrm>
-            <a:off x="3218688" y="1353312"/>
-            <a:ext cx="2697480" cy="411480"/>
-          </a:xfrm>
-          <a:prstGeom prst="rect">
-            <a:avLst/>
-          </a:prstGeom>
-          <a:solidFill>
-            <a:srgbClr val="1A1A2E"/>
+      <p:pic>
+        <p:nvPicPr>
+          <p:cNvPr id="13" name="Image 1" descr="/home/claude/Age.png">    </p:cNvPr>
+          <p:cNvPicPr>
+            <a:picLocks noChangeAspect="1"/>
+          </p:cNvPicPr>
+          <p:nvPr/>
+        </p:nvPicPr>
+        <p:blipFill>
+          <a:blip r:embed="rId2"/>
+          <a:stretch>
+            <a:fillRect/>
+          </a:stretch>
+        </p:blipFill>
+        <p:spPr>
+          <a:xfrm>
+            <a:off x="4663440" y="1673352"/>
+            <a:ext cx="4114800" cy="1737360"/>
+          </a:xfrm>
+          <a:prstGeom prst="rect">
+            <a:avLst/>
+          </a:prstGeom>
+        </p:spPr>
+      </p:pic>
+      <p:sp>
+        <p:nvSpPr>
+          <p:cNvPr id="14" name="Shape 10"/>
+          <p:cNvSpPr/>
+          <p:nvPr/>
+        </p:nvSpPr>
+        <p:spPr>
+          <a:xfrm>
+            <a:off x="365760" y="3566160"/>
+            <a:ext cx="8412480" cy="320040"/>
+          </a:xfrm>
+          <a:prstGeom prst="rect">
+            <a:avLst/>
+          </a:prstGeom>
+          <a:solidFill>
+            <a:srgbClr val="888780"/>
           </a:solidFill>
           <a:ln w="12700">
             <a:solidFill>
-              <a:srgbClr val="1A1A2E"/>
-            </a:solidFill>
-            <a:prstDash val="solid"/>
-          </a:ln>
-        </p:spPr>
-      </p:sp>
-      <p:sp>
-        <p:nvSpPr>
-          <p:cNvPr id="14" name="Text 12"/>
-          <p:cNvSpPr/>
-          <p:nvPr/>
-        </p:nvSpPr>
-        <p:spPr>
-          <a:xfrm>
-            <a:off x="3355848" y="1389888"/>
-            <a:ext cx="2514600" cy="320040"/>
-          </a:xfrm>
-          <a:prstGeom prst="rect">
-            <a:avLst/>
-          </a:prstGeom>
-          <a:noFill/>
-          <a:ln/>
-        </p:spPr>
-        <p:txBody>
-          <a:bodyPr wrap="square" lIns="0" tIns="0" rIns="0" bIns="0" rtlCol="0" anchor="ctr"/>
-          <a:lstStyle/>
-          <a:p>
-            <a:pPr indent="0" marL="0">
+              <a:srgbClr val="888780"/>
+            </a:solidFill>
+            <a:prstDash val="solid"/>
+          </a:ln>
+        </p:spPr>
+      </p:sp>
+      <p:sp>
+        <p:nvSpPr>
+          <p:cNvPr id="15" name="Text 11"/>
+          <p:cNvSpPr/>
+          <p:nvPr/>
+        </p:nvSpPr>
+        <p:spPr>
+          <a:xfrm>
+            <a:off x="365760" y="3566160"/>
+            <a:ext cx="8412480" cy="320040"/>
+          </a:xfrm>
+          <a:prstGeom prst="rect">
+            <a:avLst/>
+          </a:prstGeom>
+          <a:noFill/>
+          <a:ln/>
+        </p:spPr>
+        <p:txBody>
+          <a:bodyPr wrap="square" lIns="0" tIns="0" rIns="0" bIns="0" rtlCol="0" anchor="ctr"/>
+          <a:lstStyle/>
+          <a:p>
+            <a:pPr algn="ctr" indent="0" marL="0">
               <a:buNone/>
             </a:pPr>
             <a:r>
@@ -7728,170 +7751,36 @@
                   <a:srgbClr val="FFFFFF"/>
                 </a:solidFill>
               </a:rPr>
-              <a:t>02  Behaviour Patterns</a:t>
+              <a:t>Age vs Balance</a:t>
             </a:r>
             <a:endParaRPr lang="en-US" sz="1000" dirty="0"/>
           </a:p>
         </p:txBody>
       </p:sp>
-      <p:sp>
-        <p:nvSpPr>
-          <p:cNvPr id="15" name="Text 13"/>
-          <p:cNvSpPr/>
-          <p:nvPr/>
-        </p:nvSpPr>
-        <p:spPr>
-          <a:xfrm>
-            <a:off x="3355848" y="1874520"/>
-            <a:ext cx="2468880" cy="2834640"/>
-          </a:xfrm>
-          <a:prstGeom prst="rect">
-            <a:avLst/>
-          </a:prstGeom>
-          <a:noFill/>
-          <a:ln/>
-        </p:spPr>
-        <p:txBody>
-          <a:bodyPr wrap="square" rtlCol="0" anchor="t"/>
-          <a:lstStyle/>
-          <a:p>
-            <a:pPr indent="0" marL="0">
-              <a:buNone/>
-            </a:pPr>
-            <a:r>
-              <a:rPr lang="en-US" sz="1000" i="1" dirty="0">
-                <a:solidFill>
-                  <a:srgbClr val="888780"/>
-                </a:solidFill>
-              </a:rPr>
-              <a:t>[Insert: Step visit counts · Session distribution · Group size comparison]</a:t>
-            </a:r>
-            <a:endParaRPr lang="en-US" sz="1000" dirty="0"/>
-          </a:p>
-        </p:txBody>
-      </p:sp>
-      <p:sp>
-        <p:nvSpPr>
-          <p:cNvPr id="16" name="Shape 14"/>
-          <p:cNvSpPr/>
-          <p:nvPr/>
-        </p:nvSpPr>
-        <p:spPr>
-          <a:xfrm>
-            <a:off x="6117336" y="1353312"/>
-            <a:ext cx="2697480" cy="3547872"/>
-          </a:xfrm>
-          <a:prstGeom prst="rect">
-            <a:avLst/>
-          </a:prstGeom>
-          <a:solidFill>
-            <a:srgbClr val="FFFFFF"/>
-          </a:solidFill>
-          <a:ln w="6350">
-            <a:solidFill>
-              <a:srgbClr val="E8E5DE"/>
-            </a:solidFill>
-            <a:prstDash val="solid"/>
-          </a:ln>
-        </p:spPr>
-      </p:sp>
-      <p:sp>
-        <p:nvSpPr>
-          <p:cNvPr id="17" name="Shape 15"/>
-          <p:cNvSpPr/>
-          <p:nvPr/>
-        </p:nvSpPr>
-        <p:spPr>
-          <a:xfrm>
-            <a:off x="6117336" y="1353312"/>
-            <a:ext cx="2697480" cy="411480"/>
-          </a:xfrm>
-          <a:prstGeom prst="rect">
-            <a:avLst/>
-          </a:prstGeom>
-          <a:solidFill>
-            <a:srgbClr val="888780"/>
-          </a:solidFill>
-          <a:ln w="12700">
-            <a:solidFill>
-              <a:srgbClr val="888780"/>
-            </a:solidFill>
-            <a:prstDash val="solid"/>
-          </a:ln>
-        </p:spPr>
-      </p:sp>
-      <p:sp>
-        <p:nvSpPr>
-          <p:cNvPr id="18" name="Text 16"/>
-          <p:cNvSpPr/>
-          <p:nvPr/>
-        </p:nvSpPr>
-        <p:spPr>
-          <a:xfrm>
-            <a:off x="6254496" y="1389888"/>
-            <a:ext cx="2514600" cy="320040"/>
-          </a:xfrm>
-          <a:prstGeom prst="rect">
-            <a:avLst/>
-          </a:prstGeom>
-          <a:noFill/>
-          <a:ln/>
-        </p:spPr>
-        <p:txBody>
-          <a:bodyPr wrap="square" lIns="0" tIns="0" rIns="0" bIns="0" rtlCol="0" anchor="ctr"/>
-          <a:lstStyle/>
-          <a:p>
-            <a:pPr indent="0" marL="0">
-              <a:buNone/>
-            </a:pPr>
-            <a:r>
-              <a:rPr lang="en-US" sz="1000" b="1" dirty="0">
-                <a:solidFill>
-                  <a:srgbClr val="FFFFFF"/>
-                </a:solidFill>
-              </a:rPr>
-              <a:t>03  Key Observations</a:t>
-            </a:r>
-            <a:endParaRPr lang="en-US" sz="1000" dirty="0"/>
-          </a:p>
-        </p:txBody>
-      </p:sp>
-      <p:sp>
-        <p:nvSpPr>
-          <p:cNvPr id="19" name="Text 17"/>
-          <p:cNvSpPr/>
-          <p:nvPr/>
-        </p:nvSpPr>
-        <p:spPr>
-          <a:xfrm>
-            <a:off x="6254496" y="1874520"/>
-            <a:ext cx="2468880" cy="2834640"/>
-          </a:xfrm>
-          <a:prstGeom prst="rect">
-            <a:avLst/>
-          </a:prstGeom>
-          <a:noFill/>
-          <a:ln/>
-        </p:spPr>
-        <p:txBody>
-          <a:bodyPr wrap="square" rtlCol="0" anchor="t"/>
-          <a:lstStyle/>
-          <a:p>
-            <a:pPr indent="0" marL="0">
-              <a:buNone/>
-            </a:pPr>
-            <a:r>
-              <a:rPr lang="en-US" sz="1000" i="1" dirty="0">
-                <a:solidFill>
-                  <a:srgbClr val="888780"/>
-                </a:solidFill>
-              </a:rPr>
-              <a:t>[Insert: Key observations from EDA before A/B results]</a:t>
-            </a:r>
-            <a:endParaRPr lang="en-US" sz="1000" dirty="0"/>
-          </a:p>
-        </p:txBody>
-      </p:sp>
+      <p:pic>
+        <p:nvPicPr>
+          <p:cNvPr id="16" name="Image 2" descr="/home/claude/age_vs_balance.png">    </p:cNvPr>
+          <p:cNvPicPr>
+            <a:picLocks noChangeAspect="1"/>
+          </p:cNvPicPr>
+          <p:nvPr/>
+        </p:nvPicPr>
+        <p:blipFill>
+          <a:blip r:embed="rId3"/>
+          <a:stretch>
+            <a:fillRect/>
+          </a:stretch>
+        </p:blipFill>
+        <p:spPr>
+          <a:xfrm>
+            <a:off x="365760" y="3886200"/>
+            <a:ext cx="8412480" cy="1188720"/>
+          </a:xfrm>
+          <a:prstGeom prst="rect">
+            <a:avLst/>
+          </a:prstGeom>
+        </p:spPr>
+      </p:pic>
     </p:spTree>
   </p:cSld>
   <p:clrMapOvr>

--- a/Vanguard_ABTest_Presentation.pptx
+++ b/Vanguard_ABTest_Presentation.pptx
@@ -4,6 +4,9 @@
   <p:sldMasterIdLst>
     <p:sldMasterId id="2147483648" r:id="rId1"/>
   </p:sldMasterIdLst>
+  <p:notesMasterIdLst>
+    <p:notesMasterId r:id="rId16"/>
+  </p:notesMasterIdLst>
   <p:sldIdLst>
     <p:sldId id="256" r:id="rId2"/>
     <p:sldId id="257" r:id="rId3"/>
@@ -20,10 +23,7 @@
     <p:sldId id="268" r:id="rId14"/>
     <p:sldId id="269" r:id="rId15"/>
   </p:sldIdLst>
-  <p:notesMasterIdLst>
-    <p:notesMasterId r:id="rId16"/>
-  </p:notesMasterIdLst>
-  <p:sldSz cx="9144000" cy="5143500"/>
+  <p:sldSz cx="9144000" cy="5143500" type="screen16x9"/>
   <p:notesSz cx="5143500" cy="9144000"/>
   <p:defaultTextStyle>
     <a:lvl1pPr marL="0" algn="l" defTabSz="914400" rtl="0" eaLnBrk="1" latinLnBrk="0" hangingPunct="1">
@@ -117,6 +117,11 @@
       </a:defRPr>
     </a:lvl9pPr>
   </p:defaultTextStyle>
+  <p:extLst>
+    <p:ext uri="{EFAFB233-063F-42B5-8137-9DF3F51BA10A}">
+      <p15:sldGuideLst xmlns:p15="http://schemas.microsoft.com/office/powerpoint/2012/main"/>
+    </p:ext>
+  </p:extLst>
 </p:presentation>
 </file>
 
@@ -142,234 +147,10 @@
           <a:chExt cx="0" cy="0"/>
         </a:xfrm>
       </p:grpSpPr>
-      <p:sp>
-        <p:nvSpPr>
-          <p:cNvPr id="2" name="Header Placeholder 1"/>
-          <p:cNvSpPr>
-            <a:spLocks noGrp="1"/>
-          </p:cNvSpPr>
-          <p:nvPr>
-            <p:ph type="hdr" sz="quarter"/>
-          </p:nvPr>
-        </p:nvSpPr>
-        <p:spPr>
-          <a:xfrm>
-            <a:off x="0" y="0"/>
-            <a:ext cx="2971800" cy="458788"/>
-          </a:xfrm>
-          <a:prstGeom prst="rect">
-            <a:avLst/>
-          </a:prstGeom>
-        </p:spPr>
-        <p:txBody>
-          <a:bodyPr vert="horz" lIns="91440" tIns="45720" rIns="91440" bIns="45720" rtlCol="0"/>
-          <a:lstStyle>
-            <a:lvl1pPr algn="l">
-              <a:defRPr sz="1200"/>
-            </a:lvl1pPr>
-          </a:lstStyle>
-          <a:p>
-            <a:endParaRPr lang="en-US"/>
-          </a:p>
-        </p:txBody>
-      </p:sp>
-      <p:sp>
-        <p:nvSpPr>
-          <p:cNvPr id="3" name="Date Placeholder 2"/>
-          <p:cNvSpPr>
-            <a:spLocks noGrp="1"/>
-          </p:cNvSpPr>
-          <p:nvPr>
-            <p:ph type="dt" idx="1"/>
-          </p:nvPr>
-        </p:nvSpPr>
-        <p:spPr>
-          <a:xfrm>
-            <a:off x="3884613" y="0"/>
-            <a:ext cx="2971800" cy="458788"/>
-          </a:xfrm>
-          <a:prstGeom prst="rect">
-            <a:avLst/>
-          </a:prstGeom>
-        </p:spPr>
-        <p:txBody>
-          <a:bodyPr vert="horz" lIns="91440" tIns="45720" rIns="91440" bIns="45720" rtlCol="0"/>
-          <a:lstStyle>
-            <a:lvl1pPr algn="r">
-              <a:defRPr sz="1200"/>
-            </a:lvl1pPr>
-          </a:lstStyle>
-          <a:p>
-            <a:fld id="{5282F153-3F37-0F45-9E97-73ACFA13230C}" type="datetimeFigureOut">
-              <a:rPr lang="en-US"/>
-              <a:t>7/23/19</a:t>
-            </a:fld>
-            <a:endParaRPr lang="en-US"/>
-          </a:p>
-        </p:txBody>
-      </p:sp>
-      <p:sp>
-        <p:nvSpPr>
-          <p:cNvPr id="4" name="Slide Image Placeholder 3"/>
-          <p:cNvSpPr>
-            <a:spLocks noGrp="1" noRot="1" noChangeAspect="1"/>
-          </p:cNvSpPr>
-          <p:nvPr>
-            <p:ph type="sldImg" idx="2"/>
-          </p:nvPr>
-        </p:nvSpPr>
-        <p:spPr>
-          <a:xfrm>
-            <a:off x="685800" y="1143000"/>
-            <a:ext cx="5486400" cy="3086100"/>
-          </a:xfrm>
-          <a:prstGeom prst="rect">
-            <a:avLst/>
-          </a:prstGeom>
-          <a:noFill/>
-          <a:ln w="12700">
-            <a:solidFill>
-              <a:prstClr val="black"/>
-            </a:solidFill>
-          </a:ln>
-        </p:spPr>
-        <p:txBody>
-          <a:bodyPr vert="horz" lIns="91440" tIns="45720" rIns="91440" bIns="45720" rtlCol="0" anchor="ctr"/>
-          <a:lstStyle/>
-          <a:p>
-            <a:endParaRPr lang="en-US"/>
-          </a:p>
-        </p:txBody>
-      </p:sp>
-      <p:sp>
-        <p:nvSpPr>
-          <p:cNvPr id="5" name="Notes Placeholder 4"/>
-          <p:cNvSpPr>
-            <a:spLocks noGrp="1"/>
-          </p:cNvSpPr>
-          <p:nvPr>
-            <p:ph type="body" sz="quarter" idx="3"/>
-          </p:nvPr>
-        </p:nvSpPr>
-        <p:spPr>
-          <a:xfrm>
-            <a:off x="685800" y="4400550"/>
-            <a:ext cx="5486400" cy="3600450"/>
-          </a:xfrm>
-          <a:prstGeom prst="rect">
-            <a:avLst/>
-          </a:prstGeom>
-        </p:spPr>
-        <p:txBody>
-          <a:bodyPr vert="horz" lIns="91440" tIns="45720" rIns="91440" bIns="45720" rtlCol="0"/>
-          <a:lstStyle/>
-          <a:p>
-            <a:pPr lvl="0"/>
-            <a:r>
-              <a:rPr lang="en-US"/>
-              <a:t>Click to edit Master text styles</a:t>
-            </a:r>
-          </a:p>
-          <a:p>
-            <a:pPr lvl="1"/>
-            <a:r>
-              <a:rPr lang="en-US"/>
-              <a:t>Second level</a:t>
-            </a:r>
-          </a:p>
-          <a:p>
-            <a:pPr lvl="2"/>
-            <a:r>
-              <a:rPr lang="en-US"/>
-              <a:t>Third level</a:t>
-            </a:r>
-          </a:p>
-          <a:p>
-            <a:pPr lvl="3"/>
-            <a:r>
-              <a:rPr lang="en-US"/>
-              <a:t>Fourth level</a:t>
-            </a:r>
-          </a:p>
-          <a:p>
-            <a:pPr lvl="4"/>
-            <a:r>
-              <a:rPr lang="en-US"/>
-              <a:t>Fifth level</a:t>
-            </a:r>
-          </a:p>
-        </p:txBody>
-      </p:sp>
-      <p:sp>
-        <p:nvSpPr>
-          <p:cNvPr id="6" name="Footer Placeholder 5"/>
-          <p:cNvSpPr>
-            <a:spLocks noGrp="1"/>
-          </p:cNvSpPr>
-          <p:nvPr>
-            <p:ph type="ftr" sz="quarter" idx="4"/>
-          </p:nvPr>
-        </p:nvSpPr>
-        <p:spPr>
-          <a:xfrm>
-            <a:off x="0" y="8685213"/>
-            <a:ext cx="2971800" cy="458787"/>
-          </a:xfrm>
-          <a:prstGeom prst="rect">
-            <a:avLst/>
-          </a:prstGeom>
-        </p:spPr>
-        <p:txBody>
-          <a:bodyPr vert="horz" lIns="91440" tIns="45720" rIns="91440" bIns="45720" rtlCol="0" anchor="b"/>
-          <a:lstStyle>
-            <a:lvl1pPr algn="l">
-              <a:defRPr sz="1200"/>
-            </a:lvl1pPr>
-          </a:lstStyle>
-          <a:p>
-            <a:endParaRPr lang="en-US"/>
-          </a:p>
-        </p:txBody>
-      </p:sp>
-      <p:sp>
-        <p:nvSpPr>
-          <p:cNvPr id="7" name="Slide Number Placeholder 6"/>
-          <p:cNvSpPr>
-            <a:spLocks noGrp="1"/>
-          </p:cNvSpPr>
-          <p:nvPr>
-            <p:ph type="sldNum" sz="quarter" idx="5"/>
-          </p:nvPr>
-        </p:nvSpPr>
-        <p:spPr>
-          <a:xfrm>
-            <a:off x="3884613" y="8685213"/>
-            <a:ext cx="2971800" cy="458787"/>
-          </a:xfrm>
-          <a:prstGeom prst="rect">
-            <a:avLst/>
-          </a:prstGeom>
-        </p:spPr>
-        <p:txBody>
-          <a:bodyPr vert="horz" lIns="91440" tIns="45720" rIns="91440" bIns="45720" rtlCol="0" anchor="b"/>
-          <a:lstStyle>
-            <a:lvl1pPr algn="r">
-              <a:defRPr sz="1200"/>
-            </a:lvl1pPr>
-          </a:lstStyle>
-          <a:p>
-            <a:fld id="{CE5E9CC1-C706-0F49-92D6-E571CC5EEA8F}" type="slidenum">
-              <a:rPr lang="en-US"/>
-              <a:t>‹#›</a:t>
-            </a:fld>
-            <a:endParaRPr lang="en-US"/>
-          </a:p>
-        </p:txBody>
-      </p:sp>
     </p:spTree>
     <p:extLst>
       <p:ext uri="{BB962C8B-B14F-4D97-AF65-F5344CB8AC3E}">
-        <p14:creationId xmlns:p14="http://schemas.microsoft.com/office/powerpoint/2010/main" val="1024086991"/>
+        <p14:creationId xmlns:p14="http://schemas.microsoft.com/office/powerpoint/2010/main" val="3945636028"/>
       </p:ext>
     </p:extLst>
   </p:cSld>
@@ -513,10 +294,6 @@
           <a:bodyPr/>
           <a:lstStyle/>
           <a:p>
-            <a:r>
-              <a:rPr lang="en-US" dirty="0"/>
-              <a:t/>
-            </a:r>
             <a:endParaRPr lang="en-US" dirty="0"/>
           </a:p>
         </p:txBody>
@@ -601,10 +378,6 @@
           <a:bodyPr/>
           <a:lstStyle/>
           <a:p>
-            <a:r>
-              <a:rPr lang="en-US" dirty="0"/>
-              <a:t/>
-            </a:r>
             <a:endParaRPr lang="en-US" dirty="0"/>
           </a:p>
         </p:txBody>
@@ -689,10 +462,6 @@
           <a:bodyPr/>
           <a:lstStyle/>
           <a:p>
-            <a:r>
-              <a:rPr lang="en-US" dirty="0"/>
-              <a:t/>
-            </a:r>
             <a:endParaRPr lang="en-US" dirty="0"/>
           </a:p>
         </p:txBody>
@@ -777,10 +546,6 @@
           <a:bodyPr/>
           <a:lstStyle/>
           <a:p>
-            <a:r>
-              <a:rPr lang="en-US" dirty="0"/>
-              <a:t/>
-            </a:r>
             <a:endParaRPr lang="en-US" dirty="0"/>
           </a:p>
         </p:txBody>
@@ -865,10 +630,6 @@
           <a:bodyPr/>
           <a:lstStyle/>
           <a:p>
-            <a:r>
-              <a:rPr lang="en-US" dirty="0"/>
-              <a:t/>
-            </a:r>
             <a:endParaRPr lang="en-US" dirty="0"/>
           </a:p>
         </p:txBody>
@@ -953,10 +714,6 @@
           <a:bodyPr/>
           <a:lstStyle/>
           <a:p>
-            <a:r>
-              <a:rPr lang="en-US" dirty="0"/>
-              <a:t/>
-            </a:r>
             <a:endParaRPr lang="en-US" dirty="0"/>
           </a:p>
         </p:txBody>
@@ -1041,10 +798,6 @@
           <a:bodyPr/>
           <a:lstStyle/>
           <a:p>
-            <a:r>
-              <a:rPr lang="en-US" dirty="0"/>
-              <a:t/>
-            </a:r>
             <a:endParaRPr lang="en-US" dirty="0"/>
           </a:p>
         </p:txBody>
@@ -1129,10 +882,6 @@
           <a:bodyPr/>
           <a:lstStyle/>
           <a:p>
-            <a:r>
-              <a:rPr lang="en-US" dirty="0"/>
-              <a:t/>
-            </a:r>
             <a:endParaRPr lang="en-US" dirty="0"/>
           </a:p>
         </p:txBody>
@@ -1217,10 +966,6 @@
           <a:bodyPr/>
           <a:lstStyle/>
           <a:p>
-            <a:r>
-              <a:rPr lang="en-US" dirty="0"/>
-              <a:t/>
-            </a:r>
             <a:endParaRPr lang="en-US" dirty="0"/>
           </a:p>
         </p:txBody>
@@ -1305,10 +1050,6 @@
           <a:bodyPr/>
           <a:lstStyle/>
           <a:p>
-            <a:r>
-              <a:rPr lang="en-US" dirty="0"/>
-              <a:t/>
-            </a:r>
             <a:endParaRPr lang="en-US" dirty="0"/>
           </a:p>
         </p:txBody>
@@ -1393,10 +1134,6 @@
           <a:bodyPr/>
           <a:lstStyle/>
           <a:p>
-            <a:r>
-              <a:rPr lang="en-US" dirty="0"/>
-              <a:t/>
-            </a:r>
             <a:endParaRPr lang="en-US" dirty="0"/>
           </a:p>
         </p:txBody>
@@ -1481,10 +1218,6 @@
           <a:bodyPr/>
           <a:lstStyle/>
           <a:p>
-            <a:r>
-              <a:rPr lang="en-US" dirty="0"/>
-              <a:t/>
-            </a:r>
             <a:endParaRPr lang="en-US" dirty="0"/>
           </a:p>
         </p:txBody>
@@ -1569,10 +1302,6 @@
           <a:bodyPr/>
           <a:lstStyle/>
           <a:p>
-            <a:r>
-              <a:rPr lang="en-US" dirty="0"/>
-              <a:t/>
-            </a:r>
             <a:endParaRPr lang="en-US" dirty="0"/>
           </a:p>
         </p:txBody>
@@ -1657,10 +1386,6 @@
           <a:bodyPr/>
           <a:lstStyle/>
           <a:p>
-            <a:r>
-              <a:rPr lang="en-US" dirty="0"/>
-              <a:t/>
-            </a:r>
             <a:endParaRPr lang="en-US" dirty="0"/>
           </a:p>
         </p:txBody>
@@ -1734,6 +1459,11 @@
 <file path=ppt/slideMasters/slideMaster1.xml><?xml version="1.0" encoding="utf-8"?>
 <p:sldMaster xmlns:a="http://schemas.openxmlformats.org/drawingml/2006/main" xmlns:r="http://schemas.openxmlformats.org/officeDocument/2006/relationships" xmlns:p="http://schemas.openxmlformats.org/presentationml/2006/main">
   <p:cSld>
+    <p:bg>
+      <p:bgRef idx="1001">
+        <a:schemeClr val="bg1"/>
+      </p:bgRef>
+    </p:bg>
     <p:spTree>
       <p:nvGrpSpPr>
         <p:cNvPr id="1" name=""/>
@@ -2016,6 +1746,7 @@
         <a:solidFill>
           <a:srgbClr val="1A1A2E"/>
         </a:solidFill>
+        <a:effectLst/>
       </p:bgPr>
     </p:bg>
     <p:spTree>
@@ -2103,7 +1834,7 @@
           <a:bodyPr wrap="square" lIns="0" tIns="0" rIns="0" bIns="0" rtlCol="0" anchor="ctr"/>
           <a:lstStyle/>
           <a:p>
-            <a:pPr algn="ctr" indent="0" marL="0">
+            <a:pPr marL="0" indent="0" algn="ctr">
               <a:buNone/>
             </a:pPr>
             <a:r>
@@ -2142,11 +1873,11 @@
           <a:bodyPr wrap="square" lIns="0" tIns="0" rIns="0" bIns="0" rtlCol="0" anchor="ctr"/>
           <a:lstStyle/>
           <a:p>
-            <a:pPr algn="ctr" indent="0" marL="0">
-              <a:buNone/>
-            </a:pPr>
-            <a:r>
-              <a:rPr lang="en-US" sz="1800" b="1" spc="400" kern="0" dirty="0">
+            <a:pPr marL="0" indent="0" algn="ctr">
+              <a:buNone/>
+            </a:pPr>
+            <a:r>
+              <a:rPr lang="en-US" sz="1800" b="1" kern="0" spc="400" dirty="0">
                 <a:solidFill>
                   <a:srgbClr val="FFFFFF"/>
                 </a:solidFill>
@@ -2204,11 +1935,11 @@
           <a:bodyPr wrap="square" lIns="0" tIns="0" rIns="0" bIns="0" rtlCol="0" anchor="ctr"/>
           <a:lstStyle/>
           <a:p>
-            <a:pPr algn="ctr" indent="0" marL="0">
-              <a:buNone/>
-            </a:pPr>
-            <a:r>
-              <a:rPr lang="en-US" sz="1000" spc="200" kern="0" dirty="0">
+            <a:pPr marL="0" indent="0" algn="ctr">
+              <a:buNone/>
+            </a:pPr>
+            <a:r>
+              <a:rPr lang="en-US" sz="1000" kern="0" spc="200" dirty="0">
                 <a:solidFill>
                   <a:srgbClr val="FFFFFF"/>
                 </a:solidFill>
@@ -2240,11 +1971,11 @@
           <a:bodyPr wrap="square" lIns="0" tIns="0" rIns="0" bIns="0" rtlCol="0" anchor="ctr"/>
           <a:lstStyle/>
           <a:p>
-            <a:pPr algn="ctr" indent="0" marL="0">
-              <a:buNone/>
-            </a:pPr>
-            <a:r>
-              <a:rPr lang="en-US" sz="1000" spc="200" kern="0" dirty="0">
+            <a:pPr marL="0" indent="0" algn="ctr">
+              <a:buNone/>
+            </a:pPr>
+            <a:r>
+              <a:rPr lang="en-US" sz="1000" kern="0" spc="200" dirty="0">
                 <a:solidFill>
                   <a:srgbClr val="FFFFFF"/>
                 </a:solidFill>
@@ -2276,7 +2007,7 @@
           <a:bodyPr wrap="square" rtlCol="0" anchor="ctr"/>
           <a:lstStyle/>
           <a:p>
-            <a:pPr indent="0" marL="0">
+            <a:pPr marL="0" indent="0">
               <a:buNone/>
             </a:pPr>
             <a:r>
@@ -2293,7 +2024,7 @@
             <a:endParaRPr lang="en-US" sz="3600" dirty="0"/>
           </a:p>
           <a:p>
-            <a:pPr indent="0" marL="0">
+            <a:pPr marL="0" indent="0">
               <a:buNone/>
             </a:pPr>
             <a:r>
@@ -2310,7 +2041,7 @@
             <a:endParaRPr lang="en-US" sz="3600" dirty="0"/>
           </a:p>
           <a:p>
-            <a:pPr indent="0" marL="0">
+            <a:pPr marL="0" indent="0">
               <a:buNone/>
             </a:pPr>
             <a:r>
@@ -2349,7 +2080,7 @@
           <a:bodyPr wrap="square" rtlCol="0" anchor="ctr"/>
           <a:lstStyle/>
           <a:p>
-            <a:pPr indent="0" marL="0">
+            <a:pPr marL="0" indent="0">
               <a:buNone/>
             </a:pPr>
             <a:r>
@@ -2385,11 +2116,11 @@
           <a:bodyPr wrap="square" rtlCol="0" anchor="ctr"/>
           <a:lstStyle/>
           <a:p>
-            <a:pPr indent="0" marL="0">
-              <a:buNone/>
-            </a:pPr>
-            <a:r>
-              <a:rPr lang="en-US" sz="1000" spc="50" kern="0" dirty="0">
+            <a:pPr marL="0" indent="0">
+              <a:buNone/>
+            </a:pPr>
+            <a:r>
+              <a:rPr lang="en-US" sz="1000" kern="0" spc="50" dirty="0">
                 <a:solidFill>
                   <a:srgbClr val="888780"/>
                 </a:solidFill>
@@ -2421,7 +2152,7 @@
           <a:bodyPr wrap="square" rtlCol="0" anchor="ctr"/>
           <a:lstStyle/>
           <a:p>
-            <a:pPr indent="0" marL="0">
+            <a:pPr marL="0" indent="0">
               <a:buNone/>
             </a:pPr>
             <a:r>
@@ -2452,6 +2183,7 @@
         <a:solidFill>
           <a:srgbClr val="F8F6F1"/>
         </a:solidFill>
+        <a:effectLst/>
       </p:bgPr>
     </p:bg>
     <p:spTree>
@@ -2539,11 +2271,11 @@
           <a:bodyPr wrap="square" lIns="0" tIns="0" rIns="0" bIns="0" rtlCol="0" anchor="ctr"/>
           <a:lstStyle/>
           <a:p>
-            <a:pPr indent="0" marL="0">
-              <a:buNone/>
-            </a:pPr>
-            <a:r>
-              <a:rPr lang="en-US" sz="1300" b="1" spc="200" kern="0" dirty="0">
+            <a:pPr marL="0" indent="0">
+              <a:buNone/>
+            </a:pPr>
+            <a:r>
+              <a:rPr lang="en-US" sz="1300" b="1" kern="0" spc="200" dirty="0">
                 <a:solidFill>
                   <a:srgbClr val="9A0718"/>
                 </a:solidFill>
@@ -2578,7 +2310,7 @@
           <a:bodyPr wrap="square" lIns="0" tIns="0" rIns="0" bIns="0" rtlCol="0" anchor="ctr"/>
           <a:lstStyle/>
           <a:p>
-            <a:pPr indent="0" marL="0">
+            <a:pPr marL="0" indent="0">
               <a:buNone/>
             </a:pPr>
             <a:r>
@@ -2640,7 +2372,7 @@
           <a:bodyPr wrap="square" lIns="0" tIns="0" rIns="0" bIns="0" rtlCol="0" anchor="ctr"/>
           <a:lstStyle/>
           <a:p>
-            <a:pPr algn="r" indent="0" marL="0">
+            <a:pPr marL="0" indent="0" algn="r">
               <a:buNone/>
             </a:pPr>
             <a:r>
@@ -2649,7 +2381,7 @@
                   <a:srgbClr val="888780"/>
                 </a:solidFill>
               </a:rPr>
-              <a:t>10 / 13</a:t>
+              <a:t>10</a:t>
             </a:r>
             <a:endParaRPr lang="en-US" sz="900" dirty="0"/>
           </a:p>
@@ -2701,7 +2433,7 @@
           <a:bodyPr wrap="square" lIns="0" tIns="0" rIns="0" bIns="0" rtlCol="0" anchor="ctr"/>
           <a:lstStyle/>
           <a:p>
-            <a:pPr algn="ctr" indent="0" marL="0">
+            <a:pPr marL="0" indent="0" algn="ctr">
               <a:buNone/>
             </a:pPr>
             <a:r>
@@ -2740,7 +2472,7 @@
           <a:bodyPr wrap="square" lIns="0" tIns="0" rIns="0" bIns="0" rtlCol="0" anchor="ctr"/>
           <a:lstStyle/>
           <a:p>
-            <a:pPr algn="ctr" indent="0" marL="0">
+            <a:pPr marL="0" indent="0" algn="ctr">
               <a:buNone/>
             </a:pPr>
             <a:r>
@@ -2771,6 +2503,7 @@
         <a:solidFill>
           <a:srgbClr val="F8F6F1"/>
         </a:solidFill>
+        <a:effectLst/>
       </p:bgPr>
     </p:bg>
     <p:spTree>
@@ -2858,11 +2591,11 @@
           <a:bodyPr wrap="square" lIns="0" tIns="0" rIns="0" bIns="0" rtlCol="0" anchor="ctr"/>
           <a:lstStyle/>
           <a:p>
-            <a:pPr indent="0" marL="0">
-              <a:buNone/>
-            </a:pPr>
-            <a:r>
-              <a:rPr lang="en-US" sz="1300" b="1" spc="200" kern="0" dirty="0">
+            <a:pPr marL="0" indent="0">
+              <a:buNone/>
+            </a:pPr>
+            <a:r>
+              <a:rPr lang="en-US" sz="1300" b="1" kern="0" spc="200" dirty="0">
                 <a:solidFill>
                   <a:srgbClr val="9A0718"/>
                 </a:solidFill>
@@ -2897,7 +2630,7 @@
           <a:bodyPr wrap="square" lIns="0" tIns="0" rIns="0" bIns="0" rtlCol="0" anchor="ctr"/>
           <a:lstStyle/>
           <a:p>
-            <a:pPr indent="0" marL="0">
+            <a:pPr marL="0" indent="0">
               <a:buNone/>
             </a:pPr>
             <a:r>
@@ -2959,7 +2692,7 @@
           <a:bodyPr wrap="square" lIns="0" tIns="0" rIns="0" bIns="0" rtlCol="0" anchor="ctr"/>
           <a:lstStyle/>
           <a:p>
-            <a:pPr algn="r" indent="0" marL="0">
+            <a:pPr marL="0" indent="0" algn="r">
               <a:buNone/>
             </a:pPr>
             <a:r>
@@ -2968,7 +2701,7 @@
                   <a:srgbClr val="888780"/>
                 </a:solidFill>
               </a:rPr>
-              <a:t>11 / 13</a:t>
+              <a:t>11</a:t>
             </a:r>
             <a:endParaRPr lang="en-US" sz="900" dirty="0"/>
           </a:p>
@@ -3045,7 +2778,7 @@
           <a:bodyPr wrap="square" lIns="0" tIns="0" rIns="0" bIns="0" rtlCol="0" anchor="ctr"/>
           <a:lstStyle/>
           <a:p>
-            <a:pPr indent="0" marL="0">
+            <a:pPr marL="0" indent="0">
               <a:buNone/>
             </a:pPr>
             <a:r>
@@ -3084,7 +2817,7 @@
           <a:bodyPr wrap="square" lIns="0" tIns="0" rIns="0" bIns="0" rtlCol="0" anchor="ctr"/>
           <a:lstStyle/>
           <a:p>
-            <a:pPr indent="0" marL="0">
+            <a:pPr marL="0" indent="0">
               <a:buNone/>
             </a:pPr>
             <a:r>
@@ -3120,7 +2853,7 @@
           <a:bodyPr wrap="square" rtlCol="0" anchor="t"/>
           <a:lstStyle/>
           <a:p>
-            <a:pPr indent="0" marL="0">
+            <a:pPr marL="0" indent="0">
               <a:buNone/>
             </a:pPr>
             <a:r>
@@ -3134,13 +2867,13 @@
             <a:endParaRPr lang="en-US" sz="1200" dirty="0"/>
           </a:p>
           <a:p>
-            <a:pPr indent="0" marL="0">
+            <a:pPr marL="0" indent="0">
               <a:buNone/>
             </a:pPr>
             <a:endParaRPr lang="en-US" sz="1200" dirty="0"/>
           </a:p>
           <a:p>
-            <a:pPr indent="0" marL="0">
+            <a:pPr marL="0" indent="0">
               <a:buNone/>
             </a:pPr>
             <a:r>
@@ -3154,13 +2887,13 @@
             <a:endParaRPr lang="en-US" sz="1200" dirty="0"/>
           </a:p>
           <a:p>
-            <a:pPr indent="0" marL="0">
+            <a:pPr marL="0" indent="0">
               <a:buNone/>
             </a:pPr>
             <a:endParaRPr lang="en-US" sz="1200" dirty="0"/>
           </a:p>
           <a:p>
-            <a:pPr indent="0" marL="0">
+            <a:pPr marL="0" indent="0">
               <a:buNone/>
             </a:pPr>
             <a:r>
@@ -3174,13 +2907,13 @@
             <a:endParaRPr lang="en-US" sz="1200" dirty="0"/>
           </a:p>
           <a:p>
-            <a:pPr indent="0" marL="0">
+            <a:pPr marL="0" indent="0">
               <a:buNone/>
             </a:pPr>
             <a:endParaRPr lang="en-US" sz="1200" dirty="0"/>
           </a:p>
           <a:p>
-            <a:pPr indent="0" marL="0">
+            <a:pPr marL="0" indent="0">
               <a:buNone/>
             </a:pPr>
             <a:r>
@@ -3266,7 +2999,7 @@
           <a:bodyPr wrap="square" lIns="0" tIns="0" rIns="0" bIns="0" rtlCol="0" anchor="ctr"/>
           <a:lstStyle/>
           <a:p>
-            <a:pPr indent="0" marL="0">
+            <a:pPr marL="0" indent="0">
               <a:buNone/>
             </a:pPr>
             <a:r>
@@ -3305,7 +3038,7 @@
           <a:bodyPr wrap="square" lIns="0" tIns="0" rIns="0" bIns="0" rtlCol="0" anchor="ctr"/>
           <a:lstStyle/>
           <a:p>
-            <a:pPr indent="0" marL="0">
+            <a:pPr marL="0" indent="0">
               <a:buNone/>
             </a:pPr>
             <a:r>
@@ -3341,7 +3074,7 @@
           <a:bodyPr wrap="square" rtlCol="0" anchor="t"/>
           <a:lstStyle/>
           <a:p>
-            <a:pPr indent="0" marL="0">
+            <a:pPr marL="0" indent="0">
               <a:buNone/>
             </a:pPr>
             <a:r>
@@ -3355,13 +3088,13 @@
             <a:endParaRPr lang="en-US" sz="1200" dirty="0"/>
           </a:p>
           <a:p>
-            <a:pPr indent="0" marL="0">
+            <a:pPr marL="0" indent="0">
               <a:buNone/>
             </a:pPr>
             <a:endParaRPr lang="en-US" sz="1200" dirty="0"/>
           </a:p>
           <a:p>
-            <a:pPr indent="0" marL="0">
+            <a:pPr marL="0" indent="0">
               <a:buNone/>
             </a:pPr>
             <a:r>
@@ -3392,6 +3125,7 @@
         <a:solidFill>
           <a:srgbClr val="F8F6F1"/>
         </a:solidFill>
+        <a:effectLst/>
       </p:bgPr>
     </p:bg>
     <p:spTree>
@@ -3479,11 +3213,11 @@
           <a:bodyPr wrap="square" lIns="0" tIns="0" rIns="0" bIns="0" rtlCol="0" anchor="ctr"/>
           <a:lstStyle/>
           <a:p>
-            <a:pPr indent="0" marL="0">
-              <a:buNone/>
-            </a:pPr>
-            <a:r>
-              <a:rPr lang="en-US" sz="1300" b="1" spc="200" kern="0" dirty="0">
+            <a:pPr marL="0" indent="0">
+              <a:buNone/>
+            </a:pPr>
+            <a:r>
+              <a:rPr lang="en-US" sz="1300" b="1" kern="0" spc="200" dirty="0">
                 <a:solidFill>
                   <a:srgbClr val="9A0718"/>
                 </a:solidFill>
@@ -3518,7 +3252,7 @@
           <a:bodyPr wrap="square" lIns="0" tIns="0" rIns="0" bIns="0" rtlCol="0" anchor="ctr"/>
           <a:lstStyle/>
           <a:p>
-            <a:pPr indent="0" marL="0">
+            <a:pPr marL="0" indent="0">
               <a:buNone/>
             </a:pPr>
             <a:r>
@@ -3580,7 +3314,7 @@
           <a:bodyPr wrap="square" lIns="0" tIns="0" rIns="0" bIns="0" rtlCol="0" anchor="ctr"/>
           <a:lstStyle/>
           <a:p>
-            <a:pPr algn="r" indent="0" marL="0">
+            <a:pPr marL="0" indent="0" algn="r">
               <a:buNone/>
             </a:pPr>
             <a:r>
@@ -3589,7 +3323,7 @@
                   <a:srgbClr val="888780"/>
                 </a:solidFill>
               </a:rPr>
-              <a:t>12 / 13</a:t>
+              <a:t>12</a:t>
             </a:r>
             <a:endParaRPr lang="en-US" sz="900" dirty="0"/>
           </a:p>
@@ -3666,7 +3400,7 @@
           <a:bodyPr wrap="square" lIns="0" tIns="0" rIns="0" bIns="0" rtlCol="0" anchor="ctr"/>
           <a:lstStyle/>
           <a:p>
-            <a:pPr indent="0" marL="0">
+            <a:pPr marL="0" indent="0">
               <a:buNone/>
             </a:pPr>
             <a:r>
@@ -3705,7 +3439,7 @@
           <a:bodyPr wrap="square" lIns="0" tIns="0" rIns="0" bIns="0" rtlCol="0" anchor="ctr"/>
           <a:lstStyle/>
           <a:p>
-            <a:pPr indent="0" marL="0">
+            <a:pPr marL="0" indent="0">
               <a:buNone/>
             </a:pPr>
             <a:r>
@@ -3729,7 +3463,7 @@
         <p:spPr>
           <a:xfrm>
             <a:off x="429768" y="1874520"/>
-            <a:ext cx="2505456" cy="685800"/>
+            <a:ext cx="2505456" cy="361571"/>
           </a:xfrm>
           <a:prstGeom prst="rect">
             <a:avLst/>
@@ -3741,7 +3475,7 @@
           <a:bodyPr wrap="square" rtlCol="0" anchor="t"/>
           <a:lstStyle/>
           <a:p>
-            <a:pPr indent="0" marL="0">
+            <a:pPr marL="0" indent="0">
               <a:buNone/>
             </a:pPr>
             <a:r>
@@ -3764,8 +3498,8 @@
         </p:nvSpPr>
         <p:spPr>
           <a:xfrm>
-            <a:off x="429768" y="2624328"/>
-            <a:ext cx="2505456" cy="685800"/>
+            <a:off x="411480" y="2515934"/>
+            <a:ext cx="2505456" cy="361571"/>
           </a:xfrm>
           <a:prstGeom prst="rect">
             <a:avLst/>
@@ -3777,7 +3511,7 @@
           <a:bodyPr wrap="square" rtlCol="0" anchor="t"/>
           <a:lstStyle/>
           <a:p>
-            <a:pPr indent="0" marL="0">
+            <a:pPr marL="0" indent="0">
               <a:buNone/>
             </a:pPr>
             <a:r>
@@ -3800,8 +3534,8 @@
         </p:nvSpPr>
         <p:spPr>
           <a:xfrm>
-            <a:off x="429768" y="3374136"/>
-            <a:ext cx="2505456" cy="685800"/>
+            <a:off x="411480" y="3168396"/>
+            <a:ext cx="2505456" cy="672084"/>
           </a:xfrm>
           <a:prstGeom prst="rect">
             <a:avLst/>
@@ -3813,7 +3547,7 @@
           <a:bodyPr wrap="square" rtlCol="0" anchor="t"/>
           <a:lstStyle/>
           <a:p>
-            <a:pPr indent="0" marL="0">
+            <a:pPr marL="0" indent="0">
               <a:buNone/>
             </a:pPr>
             <a:r>
@@ -3837,7 +3571,7 @@
         <p:spPr>
           <a:xfrm>
             <a:off x="429768" y="4123944"/>
-            <a:ext cx="2505456" cy="685800"/>
+            <a:ext cx="2505456" cy="361571"/>
           </a:xfrm>
           <a:prstGeom prst="rect">
             <a:avLst/>
@@ -3849,7 +3583,7 @@
           <a:bodyPr wrap="square" rtlCol="0" anchor="t"/>
           <a:lstStyle/>
           <a:p>
-            <a:pPr indent="0" marL="0">
+            <a:pPr marL="0" indent="0">
               <a:buNone/>
             </a:pPr>
             <a:r>
@@ -3872,7 +3606,7 @@
         </p:nvSpPr>
         <p:spPr>
           <a:xfrm>
-            <a:off x="3172968" y="1353312"/>
+            <a:off x="3172968" y="1344168"/>
             <a:ext cx="2743200" cy="3547872"/>
           </a:xfrm>
           <a:prstGeom prst="rect">
@@ -3935,7 +3669,7 @@
           <a:bodyPr wrap="square" lIns="0" tIns="0" rIns="0" bIns="0" rtlCol="0" anchor="ctr"/>
           <a:lstStyle/>
           <a:p>
-            <a:pPr indent="0" marL="0">
+            <a:pPr marL="0" indent="0">
               <a:buNone/>
             </a:pPr>
             <a:r>
@@ -3974,7 +3708,7 @@
           <a:bodyPr wrap="square" lIns="0" tIns="0" rIns="0" bIns="0" rtlCol="0" anchor="ctr"/>
           <a:lstStyle/>
           <a:p>
-            <a:pPr indent="0" marL="0">
+            <a:pPr marL="0" indent="0">
               <a:buNone/>
             </a:pPr>
             <a:r>
@@ -4010,7 +3744,7 @@
           <a:bodyPr wrap="square" rtlCol="0" anchor="t"/>
           <a:lstStyle/>
           <a:p>
-            <a:pPr indent="0" marL="0">
+            <a:pPr marL="0" indent="0">
               <a:buNone/>
             </a:pPr>
             <a:r>
@@ -4021,6 +3755,11 @@
               </a:rPr>
               <a:t>· 126,662 rows had no group assignment and were excluded</a:t>
             </a:r>
+          </a:p>
+          <a:p>
+            <a:pPr marL="0" indent="0">
+              <a:buNone/>
+            </a:pPr>
             <a:endParaRPr lang="en-US" sz="900" dirty="0"/>
           </a:p>
         </p:txBody>
@@ -4033,8 +3772,8 @@
         </p:nvSpPr>
         <p:spPr>
           <a:xfrm>
-            <a:off x="3282696" y="2624328"/>
-            <a:ext cx="2505456" cy="685800"/>
+            <a:off x="3291840" y="2928411"/>
+            <a:ext cx="2505456" cy="361571"/>
           </a:xfrm>
           <a:prstGeom prst="rect">
             <a:avLst/>
@@ -4046,7 +3785,7 @@
           <a:bodyPr wrap="square" rtlCol="0" anchor="t"/>
           <a:lstStyle/>
           <a:p>
-            <a:pPr indent="0" marL="0">
+            <a:pPr marL="0" indent="0">
               <a:buNone/>
             </a:pPr>
             <a:r>
@@ -4069,8 +3808,8 @@
         </p:nvSpPr>
         <p:spPr>
           <a:xfrm>
-            <a:off x="3282696" y="3374136"/>
-            <a:ext cx="2505456" cy="685800"/>
+            <a:off x="3300984" y="3519962"/>
+            <a:ext cx="2505456" cy="361571"/>
           </a:xfrm>
           <a:prstGeom prst="rect">
             <a:avLst/>
@@ -4082,7 +3821,7 @@
           <a:bodyPr wrap="square" rtlCol="0" anchor="t"/>
           <a:lstStyle/>
           <a:p>
-            <a:pPr indent="0" marL="0">
+            <a:pPr marL="0" indent="0">
               <a:buNone/>
             </a:pPr>
             <a:r>
@@ -4105,8 +3844,8 @@
         </p:nvSpPr>
         <p:spPr>
           <a:xfrm>
-            <a:off x="3282696" y="4123944"/>
-            <a:ext cx="2505456" cy="685800"/>
+            <a:off x="3300984" y="4111512"/>
+            <a:ext cx="2505456" cy="361571"/>
           </a:xfrm>
           <a:prstGeom prst="rect">
             <a:avLst/>
@@ -4118,7 +3857,7 @@
           <a:bodyPr wrap="square" rtlCol="0" anchor="t"/>
           <a:lstStyle/>
           <a:p>
-            <a:pPr indent="0" marL="0">
+            <a:pPr marL="0" indent="0">
               <a:buNone/>
             </a:pPr>
             <a:r>
@@ -4204,7 +3943,7 @@
           <a:bodyPr wrap="square" lIns="0" tIns="0" rIns="0" bIns="0" rtlCol="0" anchor="ctr"/>
           <a:lstStyle/>
           <a:p>
-            <a:pPr indent="0" marL="0">
+            <a:pPr marL="0" indent="0">
               <a:buNone/>
             </a:pPr>
             <a:r>
@@ -4243,7 +3982,7 @@
           <a:bodyPr wrap="square" lIns="0" tIns="0" rIns="0" bIns="0" rtlCol="0" anchor="ctr"/>
           <a:lstStyle/>
           <a:p>
-            <a:pPr indent="0" marL="0">
+            <a:pPr marL="0" indent="0">
               <a:buNone/>
             </a:pPr>
             <a:r>
@@ -4267,7 +4006,7 @@
         <p:spPr>
           <a:xfrm>
             <a:off x="6135624" y="1874520"/>
-            <a:ext cx="2505456" cy="685800"/>
+            <a:ext cx="2505456" cy="361571"/>
           </a:xfrm>
           <a:prstGeom prst="rect">
             <a:avLst/>
@@ -4279,7 +4018,7 @@
           <a:bodyPr wrap="square" rtlCol="0" anchor="t"/>
           <a:lstStyle/>
           <a:p>
-            <a:pPr indent="0" marL="0">
+            <a:pPr marL="0" indent="0">
               <a:buNone/>
             </a:pPr>
             <a:r>
@@ -4303,7 +4042,7 @@
         <p:spPr>
           <a:xfrm>
             <a:off x="6135624" y="2624328"/>
-            <a:ext cx="2505456" cy="685800"/>
+            <a:ext cx="2505456" cy="361571"/>
           </a:xfrm>
           <a:prstGeom prst="rect">
             <a:avLst/>
@@ -4315,7 +4054,7 @@
           <a:bodyPr wrap="square" rtlCol="0" anchor="t"/>
           <a:lstStyle/>
           <a:p>
-            <a:pPr indent="0" marL="0">
+            <a:pPr marL="0" indent="0">
               <a:buNone/>
             </a:pPr>
             <a:r>
@@ -4339,7 +4078,7 @@
         <p:spPr>
           <a:xfrm>
             <a:off x="6135624" y="3374136"/>
-            <a:ext cx="2505456" cy="685800"/>
+            <a:ext cx="2505456" cy="361571"/>
           </a:xfrm>
           <a:prstGeom prst="rect">
             <a:avLst/>
@@ -4351,7 +4090,7 @@
           <a:bodyPr wrap="square" rtlCol="0" anchor="t"/>
           <a:lstStyle/>
           <a:p>
-            <a:pPr indent="0" marL="0">
+            <a:pPr marL="0" indent="0">
               <a:buNone/>
             </a:pPr>
             <a:r>
@@ -4361,6 +4100,48 @@
                 </a:solidFill>
               </a:rPr>
               <a:t>· Extend or repeat the test across different seasons to confirm results hold</a:t>
+            </a:r>
+            <a:endParaRPr lang="en-US" sz="900" dirty="0"/>
+          </a:p>
+        </p:txBody>
+      </p:sp>
+      <p:sp>
+        <p:nvSpPr>
+          <p:cNvPr id="31" name="Text 19">
+            <a:extLst>
+              <a:ext uri="{FF2B5EF4-FFF2-40B4-BE49-F238E27FC236}">
+                <a16:creationId xmlns:a16="http://schemas.microsoft.com/office/drawing/2014/main" id="{D4A10902-27FD-F896-BEED-56623180DCA8}"/>
+              </a:ext>
+            </a:extLst>
+          </p:cNvPr>
+          <p:cNvSpPr/>
+          <p:nvPr/>
+        </p:nvSpPr>
+        <p:spPr>
+          <a:xfrm>
+            <a:off x="3291840" y="2445068"/>
+            <a:ext cx="2505456" cy="253364"/>
+          </a:xfrm>
+          <a:prstGeom prst="rect">
+            <a:avLst/>
+          </a:prstGeom>
+          <a:noFill/>
+          <a:ln/>
+        </p:spPr>
+        <p:txBody>
+          <a:bodyPr wrap="square" rtlCol="0" anchor="t"/>
+          <a:lstStyle/>
+          <a:p>
+            <a:pPr marL="0" indent="0">
+              <a:buNone/>
+            </a:pPr>
+            <a:r>
+              <a:rPr lang="en-US" sz="900" dirty="0">
+                <a:solidFill>
+                  <a:srgbClr val="444441"/>
+                </a:solidFill>
+              </a:rPr>
+              <a:t>· Possible incomplete demographics data</a:t>
             </a:r>
             <a:endParaRPr lang="en-US" sz="900" dirty="0"/>
           </a:p>
@@ -4382,6 +4163,7 @@
         <a:solidFill>
           <a:srgbClr val="F8F6F1"/>
         </a:solidFill>
+        <a:effectLst/>
       </p:bgPr>
     </p:bg>
     <p:spTree>
@@ -4469,11 +4251,11 @@
           <a:bodyPr wrap="square" lIns="0" tIns="0" rIns="0" bIns="0" rtlCol="0" anchor="ctr"/>
           <a:lstStyle/>
           <a:p>
-            <a:pPr indent="0" marL="0">
-              <a:buNone/>
-            </a:pPr>
-            <a:r>
-              <a:rPr lang="en-US" sz="1300" b="1" spc="200" kern="0" dirty="0">
+            <a:pPr marL="0" indent="0">
+              <a:buNone/>
+            </a:pPr>
+            <a:r>
+              <a:rPr lang="en-US" sz="1300" b="1" kern="0" spc="200" dirty="0">
                 <a:solidFill>
                   <a:srgbClr val="9A0718"/>
                 </a:solidFill>
@@ -4508,7 +4290,7 @@
           <a:bodyPr wrap="square" lIns="0" tIns="0" rIns="0" bIns="0" rtlCol="0" anchor="ctr"/>
           <a:lstStyle/>
           <a:p>
-            <a:pPr indent="0" marL="0">
+            <a:pPr marL="0" indent="0">
               <a:buNone/>
             </a:pPr>
             <a:r>
@@ -4570,7 +4352,7 @@
           <a:bodyPr wrap="square" lIns="0" tIns="0" rIns="0" bIns="0" rtlCol="0" anchor="ctr"/>
           <a:lstStyle/>
           <a:p>
-            <a:pPr algn="r" indent="0" marL="0">
+            <a:pPr marL="0" indent="0" algn="r">
               <a:buNone/>
             </a:pPr>
             <a:r>
@@ -4579,7 +4361,7 @@
                   <a:srgbClr val="888780"/>
                 </a:solidFill>
               </a:rPr>
-              <a:t>13 / 13</a:t>
+              <a:t>13</a:t>
             </a:r>
             <a:endParaRPr lang="en-US" sz="900" dirty="0"/>
           </a:p>
@@ -4631,7 +4413,7 @@
           <a:bodyPr wrap="square" lIns="0" tIns="0" rIns="0" bIns="0" rtlCol="0" anchor="ctr"/>
           <a:lstStyle/>
           <a:p>
-            <a:pPr indent="0" marL="0">
+            <a:pPr marL="0" indent="0">
               <a:buNone/>
             </a:pPr>
             <a:r>
@@ -4670,7 +4452,7 @@
           <a:bodyPr wrap="square" lIns="0" tIns="0" rIns="0" bIns="0" rtlCol="0" anchor="ctr"/>
           <a:lstStyle/>
           <a:p>
-            <a:pPr indent="0" marL="0">
+            <a:pPr marL="0" indent="0">
               <a:buNone/>
             </a:pPr>
             <a:r>
@@ -4783,6 +4565,7 @@
         <a:solidFill>
           <a:srgbClr val="1A1A2E"/>
         </a:solidFill>
+        <a:effectLst/>
       </p:bgPr>
     </p:bg>
     <p:spTree>
@@ -4870,7 +4653,7 @@
           <a:bodyPr wrap="square" lIns="0" tIns="0" rIns="0" bIns="0" rtlCol="0" anchor="ctr"/>
           <a:lstStyle/>
           <a:p>
-            <a:pPr algn="ctr" indent="0" marL="0">
+            <a:pPr marL="0" indent="0" algn="ctr">
               <a:buNone/>
             </a:pPr>
             <a:r>
@@ -4909,11 +4692,11 @@
           <a:bodyPr wrap="square" lIns="0" tIns="0" rIns="0" bIns="0" rtlCol="0" anchor="ctr"/>
           <a:lstStyle/>
           <a:p>
-            <a:pPr algn="ctr" indent="0" marL="0">
-              <a:buNone/>
-            </a:pPr>
-            <a:r>
-              <a:rPr lang="en-US" sz="1800" b="1" spc="400" kern="0" dirty="0">
+            <a:pPr marL="0" indent="0" algn="ctr">
+              <a:buNone/>
+            </a:pPr>
+            <a:r>
+              <a:rPr lang="en-US" sz="1800" b="1" kern="0" spc="400" dirty="0">
                 <a:solidFill>
                   <a:srgbClr val="FFFFFF"/>
                 </a:solidFill>
@@ -4948,7 +4731,7 @@
           <a:bodyPr wrap="square" rtlCol="0" anchor="ctr"/>
           <a:lstStyle/>
           <a:p>
-            <a:pPr indent="0" marL="0">
+            <a:pPr marL="0" indent="0">
               <a:buNone/>
             </a:pPr>
             <a:r>
@@ -5010,7 +4793,7 @@
           <a:bodyPr wrap="square" rtlCol="0" anchor="ctr"/>
           <a:lstStyle/>
           <a:p>
-            <a:pPr indent="0" marL="0">
+            <a:pPr marL="0" indent="0">
               <a:buNone/>
             </a:pPr>
             <a:r>
@@ -5049,7 +4832,7 @@
           <a:bodyPr wrap="square" rtlCol="0" anchor="ctr"/>
           <a:lstStyle/>
           <a:p>
-            <a:pPr indent="0" marL="0">
+            <a:pPr marL="0" indent="0">
               <a:buNone/>
             </a:pPr>
             <a:r>
@@ -5063,7 +4846,7 @@
             <a:endParaRPr lang="en-US" sz="1200" dirty="0"/>
           </a:p>
           <a:p>
-            <a:pPr indent="0" marL="0">
+            <a:pPr marL="0" indent="0">
               <a:buNone/>
             </a:pPr>
             <a:r>
@@ -5077,7 +4860,7 @@
             <a:endParaRPr lang="en-US" sz="1200" dirty="0"/>
           </a:p>
           <a:p>
-            <a:pPr indent="0" marL="0">
+            <a:pPr marL="0" indent="0">
               <a:buNone/>
             </a:pPr>
             <a:r>
@@ -5113,7 +4896,7 @@
           <a:bodyPr wrap="square" rtlCol="0" anchor="ctr"/>
           <a:lstStyle/>
           <a:p>
-            <a:pPr indent="0" marL="0">
+            <a:pPr marL="0" indent="0">
               <a:buNone/>
             </a:pPr>
             <a:r>
@@ -5144,6 +4927,7 @@
         <a:solidFill>
           <a:srgbClr val="F8F6F1"/>
         </a:solidFill>
+        <a:effectLst/>
       </p:bgPr>
     </p:bg>
     <p:spTree>
@@ -5231,11 +5015,11 @@
           <a:bodyPr wrap="square" lIns="0" tIns="0" rIns="0" bIns="0" rtlCol="0" anchor="ctr"/>
           <a:lstStyle/>
           <a:p>
-            <a:pPr indent="0" marL="0">
-              <a:buNone/>
-            </a:pPr>
-            <a:r>
-              <a:rPr lang="en-US" sz="1300" b="1" spc="200" kern="0" dirty="0">
+            <a:pPr marL="0" indent="0">
+              <a:buNone/>
+            </a:pPr>
+            <a:r>
+              <a:rPr lang="en-US" sz="1300" b="1" kern="0" spc="200" dirty="0">
                 <a:solidFill>
                   <a:srgbClr val="9A0718"/>
                 </a:solidFill>
@@ -5270,7 +5054,7 @@
           <a:bodyPr wrap="square" lIns="0" tIns="0" rIns="0" bIns="0" rtlCol="0" anchor="ctr"/>
           <a:lstStyle/>
           <a:p>
-            <a:pPr indent="0" marL="0">
+            <a:pPr marL="0" indent="0">
               <a:buNone/>
             </a:pPr>
             <a:r>
@@ -5332,7 +5116,7 @@
           <a:bodyPr wrap="square" lIns="0" tIns="0" rIns="0" bIns="0" rtlCol="0" anchor="ctr"/>
           <a:lstStyle/>
           <a:p>
-            <a:pPr algn="r" indent="0" marL="0">
+            <a:pPr marL="0" indent="0" algn="r">
               <a:buNone/>
             </a:pPr>
             <a:r>
@@ -5341,7 +5125,7 @@
                   <a:srgbClr val="888780"/>
                 </a:solidFill>
               </a:rPr>
-              <a:t>2 / 13</a:t>
+              <a:t>2 </a:t>
             </a:r>
             <a:endParaRPr lang="en-US" sz="900" dirty="0"/>
           </a:p>
@@ -5418,7 +5202,7 @@
           <a:bodyPr wrap="square" lIns="0" tIns="0" rIns="0" bIns="0" rtlCol="0" anchor="ctr"/>
           <a:lstStyle/>
           <a:p>
-            <a:pPr indent="0" marL="0">
+            <a:pPr marL="0" indent="0">
               <a:buNone/>
             </a:pPr>
             <a:r>
@@ -5457,7 +5241,7 @@
           <a:bodyPr wrap="square" rtlCol="0" anchor="t"/>
           <a:lstStyle/>
           <a:p>
-            <a:pPr indent="0" marL="0">
+            <a:pPr marL="0" indent="0">
               <a:buNone/>
             </a:pPr>
             <a:r>
@@ -5471,7 +5255,7 @@
             <a:endParaRPr lang="en-US" sz="1200" dirty="0"/>
           </a:p>
           <a:p>
-            <a:pPr indent="0" marL="0">
+            <a:pPr marL="0" indent="0">
               <a:buNone/>
             </a:pPr>
             <a:r>
@@ -5485,7 +5269,7 @@
             <a:endParaRPr lang="en-US" sz="1200" dirty="0"/>
           </a:p>
           <a:p>
-            <a:pPr indent="0" marL="0">
+            <a:pPr marL="0" indent="0">
               <a:buNone/>
             </a:pPr>
             <a:r>
@@ -5494,12 +5278,12 @@
                   <a:srgbClr val="444441"/>
                 </a:solidFill>
               </a:rPr>
-              <a:t>As part of a digital transformation initiative, the UX team designed a new online process with a refreshed interface and in-context prompts to guide clients step by step.</a:t>
+              <a:t>As part of a digital transformation initiative, the UX team designed a new online process with a refreshed interface and in-context prompts to guide client`s step by step.</a:t>
             </a:r>
             <a:endParaRPr lang="en-US" sz="1200" dirty="0"/>
           </a:p>
           <a:p>
-            <a:pPr indent="0" marL="0">
+            <a:pPr marL="0" indent="0">
               <a:buNone/>
             </a:pPr>
             <a:r>
@@ -5513,7 +5297,7 @@
             <a:endParaRPr lang="en-US" sz="1200" dirty="0"/>
           </a:p>
           <a:p>
-            <a:pPr indent="0" marL="0">
+            <a:pPr marL="0" indent="0">
               <a:buNone/>
             </a:pPr>
             <a:r>
@@ -5574,7 +5358,7 @@
           <a:bodyPr wrap="square" lIns="0" tIns="0" rIns="0" bIns="0" rtlCol="0" anchor="ctr"/>
           <a:lstStyle/>
           <a:p>
-            <a:pPr indent="0" marL="0">
+            <a:pPr marL="0" indent="0">
               <a:buNone/>
             </a:pPr>
             <a:r>
@@ -5636,7 +5420,7 @@
           <a:bodyPr wrap="square" rtlCol="0" anchor="ctr"/>
           <a:lstStyle/>
           <a:p>
-            <a:pPr indent="0" marL="0">
+            <a:pPr marL="0" indent="0">
               <a:buNone/>
             </a:pPr>
             <a:r>
@@ -5675,7 +5459,7 @@
           <a:bodyPr wrap="square" rtlCol="0" anchor="t"/>
           <a:lstStyle/>
           <a:p>
-            <a:pPr indent="0" marL="0">
+            <a:pPr marL="0" indent="0">
               <a:buNone/>
             </a:pPr>
             <a:r>
@@ -5686,9 +5470,6 @@
               </a:rPr>
               <a:t>Test period:</a:t>
             </a:r>
-            <a:pPr indent="0" marL="0">
-              <a:buNone/>
-            </a:pPr>
             <a:r>
               <a:rPr lang="en-US" sz="1100" dirty="0">
                 <a:solidFill>
@@ -5700,7 +5481,7 @@
             <a:endParaRPr lang="en-US" sz="1100" dirty="0"/>
           </a:p>
           <a:p>
-            <a:pPr indent="0" marL="0">
+            <a:pPr marL="0" indent="0">
               <a:buNone/>
             </a:pPr>
             <a:r>
@@ -5714,7 +5495,7 @@
             <a:endParaRPr lang="en-US" sz="1100" dirty="0"/>
           </a:p>
           <a:p>
-            <a:pPr indent="0" marL="0">
+            <a:pPr marL="0" indent="0">
               <a:buNone/>
             </a:pPr>
             <a:r>
@@ -5725,9 +5506,6 @@
               </a:rPr>
               <a:t>Groups:</a:t>
             </a:r>
-            <a:pPr indent="0" marL="0">
-              <a:buNone/>
-            </a:pPr>
             <a:r>
               <a:rPr lang="en-US" sz="1100" dirty="0">
                 <a:solidFill>
@@ -5739,7 +5517,7 @@
             <a:endParaRPr lang="en-US" sz="1100" dirty="0"/>
           </a:p>
           <a:p>
-            <a:pPr indent="0" marL="0">
+            <a:pPr marL="0" indent="0">
               <a:buNone/>
             </a:pPr>
             <a:r>
@@ -5753,7 +5531,7 @@
             <a:endParaRPr lang="en-US" sz="1100" dirty="0"/>
           </a:p>
           <a:p>
-            <a:pPr indent="0" marL="0">
+            <a:pPr marL="0" indent="0">
               <a:buNone/>
             </a:pPr>
             <a:r>
@@ -5764,9 +5542,6 @@
               </a:rPr>
               <a:t>Success threshold:</a:t>
             </a:r>
-            <a:pPr indent="0" marL="0">
-              <a:buNone/>
-            </a:pPr>
             <a:r>
               <a:rPr lang="en-US" sz="1100" dirty="0">
                 <a:solidFill>
@@ -5795,6 +5570,7 @@
         <a:solidFill>
           <a:srgbClr val="F8F6F1"/>
         </a:solidFill>
+        <a:effectLst/>
       </p:bgPr>
     </p:bg>
     <p:spTree>
@@ -5882,11 +5658,11 @@
           <a:bodyPr wrap="square" lIns="0" tIns="0" rIns="0" bIns="0" rtlCol="0" anchor="ctr"/>
           <a:lstStyle/>
           <a:p>
-            <a:pPr indent="0" marL="0">
-              <a:buNone/>
-            </a:pPr>
-            <a:r>
-              <a:rPr lang="en-US" sz="1300" b="1" spc="200" kern="0" dirty="0">
+            <a:pPr marL="0" indent="0">
+              <a:buNone/>
+            </a:pPr>
+            <a:r>
+              <a:rPr lang="en-US" sz="1300" b="1" kern="0" spc="200" dirty="0">
                 <a:solidFill>
                   <a:srgbClr val="9A0718"/>
                 </a:solidFill>
@@ -5921,7 +5697,7 @@
           <a:bodyPr wrap="square" lIns="0" tIns="0" rIns="0" bIns="0" rtlCol="0" anchor="ctr"/>
           <a:lstStyle/>
           <a:p>
-            <a:pPr indent="0" marL="0">
+            <a:pPr marL="0" indent="0">
               <a:buNone/>
             </a:pPr>
             <a:r>
@@ -5964,42 +5740,6 @@
       </p:sp>
       <p:sp>
         <p:nvSpPr>
-          <p:cNvPr id="7" name="Text 5"/>
-          <p:cNvSpPr/>
-          <p:nvPr/>
-        </p:nvSpPr>
-        <p:spPr>
-          <a:xfrm>
-            <a:off x="8046720" y="4754880"/>
-            <a:ext cx="914400" cy="228600"/>
-          </a:xfrm>
-          <a:prstGeom prst="rect">
-            <a:avLst/>
-          </a:prstGeom>
-          <a:noFill/>
-          <a:ln/>
-        </p:spPr>
-        <p:txBody>
-          <a:bodyPr wrap="square" lIns="0" tIns="0" rIns="0" bIns="0" rtlCol="0" anchor="ctr"/>
-          <a:lstStyle/>
-          <a:p>
-            <a:pPr algn="r" indent="0" marL="0">
-              <a:buNone/>
-            </a:pPr>
-            <a:r>
-              <a:rPr lang="en-US" sz="900" dirty="0">
-                <a:solidFill>
-                  <a:srgbClr val="888780"/>
-                </a:solidFill>
-              </a:rPr>
-              <a:t>3 / 13</a:t>
-            </a:r>
-            <a:endParaRPr lang="en-US" sz="900" dirty="0"/>
-          </a:p>
-        </p:txBody>
-      </p:sp>
-      <p:sp>
-        <p:nvSpPr>
           <p:cNvPr id="8" name="Shape 6"/>
           <p:cNvSpPr/>
           <p:nvPr/>
@@ -6069,7 +5809,7 @@
           <a:bodyPr wrap="square" lIns="0" tIns="0" rIns="0" bIns="0" rtlCol="0" anchor="ctr"/>
           <a:lstStyle/>
           <a:p>
-            <a:pPr indent="0" marL="0">
+            <a:pPr marL="0" indent="0">
               <a:buNone/>
             </a:pPr>
             <a:r>
@@ -6108,7 +5848,7 @@
           <a:bodyPr wrap="square" lIns="0" tIns="0" rIns="0" bIns="0" rtlCol="0" anchor="ctr"/>
           <a:lstStyle/>
           <a:p>
-            <a:pPr indent="0" marL="0">
+            <a:pPr marL="0" indent="0">
               <a:buNone/>
             </a:pPr>
             <a:r>
@@ -6144,7 +5884,7 @@
           <a:bodyPr wrap="square" lIns="0" tIns="0" rIns="0" bIns="0" rtlCol="0" anchor="ctr"/>
           <a:lstStyle/>
           <a:p>
-            <a:pPr indent="0" marL="0">
+            <a:pPr marL="0" indent="0">
               <a:buNone/>
             </a:pPr>
             <a:r>
@@ -6203,7 +5943,7 @@
           <a:bodyPr wrap="square" rtlCol="0" anchor="t"/>
           <a:lstStyle/>
           <a:p>
-            <a:pPr indent="0" marL="0">
+            <a:pPr marL="0" indent="0">
               <a:buNone/>
             </a:pPr>
             <a:r>
@@ -6289,7 +6029,7 @@
           <a:bodyPr wrap="square" lIns="0" tIns="0" rIns="0" bIns="0" rtlCol="0" anchor="ctr"/>
           <a:lstStyle/>
           <a:p>
-            <a:pPr indent="0" marL="0">
+            <a:pPr marL="0" indent="0">
               <a:buNone/>
             </a:pPr>
             <a:r>
@@ -6328,7 +6068,7 @@
           <a:bodyPr wrap="square" lIns="0" tIns="0" rIns="0" bIns="0" rtlCol="0" anchor="ctr"/>
           <a:lstStyle/>
           <a:p>
-            <a:pPr indent="0" marL="0">
+            <a:pPr marL="0" indent="0">
               <a:buNone/>
             </a:pPr>
             <a:r>
@@ -6364,7 +6104,7 @@
           <a:bodyPr wrap="square" lIns="0" tIns="0" rIns="0" bIns="0" rtlCol="0" anchor="ctr"/>
           <a:lstStyle/>
           <a:p>
-            <a:pPr indent="0" marL="0">
+            <a:pPr marL="0" indent="0">
               <a:buNone/>
             </a:pPr>
             <a:r>
@@ -6423,7 +6163,7 @@
           <a:bodyPr wrap="square" rtlCol="0" anchor="t"/>
           <a:lstStyle/>
           <a:p>
-            <a:pPr indent="0" marL="0">
+            <a:pPr marL="0" indent="0">
               <a:buNone/>
             </a:pPr>
             <a:r>
@@ -6509,7 +6249,7 @@
           <a:bodyPr wrap="square" lIns="0" tIns="0" rIns="0" bIns="0" rtlCol="0" anchor="ctr"/>
           <a:lstStyle/>
           <a:p>
-            <a:pPr indent="0" marL="0">
+            <a:pPr marL="0" indent="0">
               <a:buNone/>
             </a:pPr>
             <a:r>
@@ -6548,7 +6288,7 @@
           <a:bodyPr wrap="square" lIns="0" tIns="0" rIns="0" bIns="0" rtlCol="0" anchor="ctr"/>
           <a:lstStyle/>
           <a:p>
-            <a:pPr indent="0" marL="0">
+            <a:pPr marL="0" indent="0">
               <a:buNone/>
             </a:pPr>
             <a:r>
@@ -6584,7 +6324,7 @@
           <a:bodyPr wrap="square" lIns="0" tIns="0" rIns="0" bIns="0" rtlCol="0" anchor="ctr"/>
           <a:lstStyle/>
           <a:p>
-            <a:pPr indent="0" marL="0">
+            <a:pPr marL="0" indent="0">
               <a:buNone/>
             </a:pPr>
             <a:r>
@@ -6643,7 +6383,7 @@
           <a:bodyPr wrap="square" rtlCol="0" anchor="t"/>
           <a:lstStyle/>
           <a:p>
-            <a:pPr indent="0" marL="0">
+            <a:pPr marL="0" indent="0">
               <a:buNone/>
             </a:pPr>
             <a:r>
@@ -6679,7 +6419,7 @@
           <a:bodyPr wrap="square" lIns="0" tIns="0" rIns="0" bIns="0" rtlCol="0" anchor="ctr"/>
           <a:lstStyle/>
           <a:p>
-            <a:pPr indent="0" marL="0">
+            <a:pPr marL="0" indent="0">
               <a:buNone/>
             </a:pPr>
             <a:r>
@@ -6768,7 +6508,7 @@
           <a:bodyPr wrap="square" lIns="0" tIns="0" rIns="0" bIns="0" rtlCol="0" anchor="ctr"/>
           <a:lstStyle/>
           <a:p>
-            <a:pPr indent="0" marL="0">
+            <a:pPr marL="0" indent="0">
               <a:buNone/>
             </a:pPr>
             <a:r>
@@ -6804,7 +6544,7 @@
           <a:bodyPr wrap="square" rtlCol="0" anchor="t"/>
           <a:lstStyle/>
           <a:p>
-            <a:pPr indent="0" marL="0">
+            <a:pPr marL="0" indent="0">
               <a:buNone/>
             </a:pPr>
             <a:r>
@@ -6890,7 +6630,7 @@
           <a:bodyPr wrap="square" lIns="0" tIns="0" rIns="0" bIns="0" rtlCol="0" anchor="ctr"/>
           <a:lstStyle/>
           <a:p>
-            <a:pPr indent="0" marL="0">
+            <a:pPr marL="0" indent="0">
               <a:buNone/>
             </a:pPr>
             <a:r>
@@ -6926,7 +6666,7 @@
           <a:bodyPr wrap="square" rtlCol="0" anchor="t"/>
           <a:lstStyle/>
           <a:p>
-            <a:pPr indent="0" marL="0">
+            <a:pPr marL="0" indent="0">
               <a:buNone/>
             </a:pPr>
             <a:r>
@@ -7012,7 +6752,7 @@
           <a:bodyPr wrap="square" lIns="0" tIns="0" rIns="0" bIns="0" rtlCol="0" anchor="ctr"/>
           <a:lstStyle/>
           <a:p>
-            <a:pPr indent="0" marL="0">
+            <a:pPr marL="0" indent="0">
               <a:buNone/>
             </a:pPr>
             <a:r>
@@ -7048,7 +6788,7 @@
           <a:bodyPr wrap="square" rtlCol="0" anchor="t"/>
           <a:lstStyle/>
           <a:p>
-            <a:pPr indent="0" marL="0">
+            <a:pPr marL="0" indent="0">
               <a:buNone/>
             </a:pPr>
             <a:r>
@@ -7134,7 +6874,7 @@
           <a:bodyPr wrap="square" lIns="0" tIns="0" rIns="0" bIns="0" rtlCol="0" anchor="ctr"/>
           <a:lstStyle/>
           <a:p>
-            <a:pPr indent="0" marL="0">
+            <a:pPr marL="0" indent="0">
               <a:buNone/>
             </a:pPr>
             <a:r>
@@ -7170,7 +6910,7 @@
           <a:bodyPr wrap="square" rtlCol="0" anchor="t"/>
           <a:lstStyle/>
           <a:p>
-            <a:pPr indent="0" marL="0">
+            <a:pPr marL="0" indent="0">
               <a:buNone/>
             </a:pPr>
             <a:r>
@@ -7256,7 +6996,7 @@
           <a:bodyPr wrap="square" lIns="0" tIns="0" rIns="0" bIns="0" rtlCol="0" anchor="ctr"/>
           <a:lstStyle/>
           <a:p>
-            <a:pPr indent="0" marL="0">
+            <a:pPr marL="0" indent="0">
               <a:buNone/>
             </a:pPr>
             <a:r>
@@ -7292,7 +7032,7 @@
           <a:bodyPr wrap="square" rtlCol="0" anchor="t"/>
           <a:lstStyle/>
           <a:p>
-            <a:pPr indent="0" marL="0">
+            <a:pPr marL="0" indent="0">
               <a:buNone/>
             </a:pPr>
             <a:r>
@@ -7302,6 +7042,42 @@
                 </a:solidFill>
               </a:rPr>
               <a:t>Added step_num, time_spent, prev_step_num, is_error</a:t>
+            </a:r>
+            <a:endParaRPr lang="en-US" sz="900" dirty="0"/>
+          </a:p>
+        </p:txBody>
+      </p:sp>
+      <p:sp>
+        <p:nvSpPr>
+          <p:cNvPr id="7" name="Text 5"/>
+          <p:cNvSpPr/>
+          <p:nvPr/>
+        </p:nvSpPr>
+        <p:spPr>
+          <a:xfrm>
+            <a:off x="8046720" y="4754880"/>
+            <a:ext cx="914400" cy="228600"/>
+          </a:xfrm>
+          <a:prstGeom prst="rect">
+            <a:avLst/>
+          </a:prstGeom>
+          <a:noFill/>
+          <a:ln/>
+        </p:spPr>
+        <p:txBody>
+          <a:bodyPr wrap="square" lIns="0" tIns="0" rIns="0" bIns="0" rtlCol="0" anchor="ctr"/>
+          <a:lstStyle/>
+          <a:p>
+            <a:pPr marL="0" indent="0" algn="r">
+              <a:buNone/>
+            </a:pPr>
+            <a:r>
+              <a:rPr lang="en-US" sz="900" dirty="0">
+                <a:solidFill>
+                  <a:srgbClr val="888780"/>
+                </a:solidFill>
+              </a:rPr>
+              <a:t>3</a:t>
             </a:r>
             <a:endParaRPr lang="en-US" sz="900" dirty="0"/>
           </a:p>
@@ -7323,6 +7099,7 @@
         <a:solidFill>
           <a:srgbClr val="F8F6F1"/>
         </a:solidFill>
+        <a:effectLst/>
       </p:bgPr>
     </p:bg>
     <p:spTree>
@@ -7410,11 +7187,11 @@
           <a:bodyPr wrap="square" lIns="0" tIns="0" rIns="0" bIns="0" rtlCol="0" anchor="ctr"/>
           <a:lstStyle/>
           <a:p>
-            <a:pPr indent="0" marL="0">
-              <a:buNone/>
-            </a:pPr>
-            <a:r>
-              <a:rPr lang="en-US" sz="1300" b="1" spc="200" kern="0" dirty="0">
+            <a:pPr marL="0" indent="0">
+              <a:buNone/>
+            </a:pPr>
+            <a:r>
+              <a:rPr lang="en-US" sz="1300" b="1" kern="0" spc="200" dirty="0">
                 <a:solidFill>
                   <a:srgbClr val="9A0718"/>
                 </a:solidFill>
@@ -7449,7 +7226,7 @@
           <a:bodyPr wrap="square" lIns="0" tIns="0" rIns="0" bIns="0" rtlCol="0" anchor="ctr"/>
           <a:lstStyle/>
           <a:p>
-            <a:pPr indent="0" marL="0">
+            <a:pPr marL="0" indent="0">
               <a:buNone/>
             </a:pPr>
             <a:r>
@@ -7511,7 +7288,7 @@
           <a:bodyPr wrap="square" lIns="0" tIns="0" rIns="0" bIns="0" rtlCol="0" anchor="ctr"/>
           <a:lstStyle/>
           <a:p>
-            <a:pPr algn="r" indent="0" marL="0">
+            <a:pPr marL="0" indent="0" algn="r">
               <a:buNone/>
             </a:pPr>
             <a:r>
@@ -7520,7 +7297,7 @@
                   <a:srgbClr val="888780"/>
                 </a:solidFill>
               </a:rPr>
-              <a:t>4 / 13</a:t>
+              <a:t>4 </a:t>
             </a:r>
             <a:endParaRPr lang="en-US" sz="900" dirty="0"/>
           </a:p>
@@ -7535,7 +7312,7 @@
         <p:spPr>
           <a:xfrm>
             <a:off x="365760" y="1353312"/>
-            <a:ext cx="4114800" cy="320040"/>
+            <a:ext cx="1874520" cy="292608"/>
           </a:xfrm>
           <a:prstGeom prst="rect">
             <a:avLst/>
@@ -7560,28 +7337,311 @@
         <p:spPr>
           <a:xfrm>
             <a:off x="365760" y="1353312"/>
-            <a:ext cx="4114800" cy="320040"/>
-          </a:xfrm>
-          <a:prstGeom prst="rect">
-            <a:avLst/>
-          </a:prstGeom>
-          <a:noFill/>
-          <a:ln/>
-        </p:spPr>
-        <p:txBody>
-          <a:bodyPr wrap="square" lIns="0" tIns="0" rIns="0" bIns="0" rtlCol="0" anchor="ctr"/>
-          <a:lstStyle/>
-          <a:p>
-            <a:pPr algn="ctr" indent="0" marL="0">
-              <a:buNone/>
-            </a:pPr>
-            <a:r>
-              <a:rPr lang="en-US" sz="1000" b="1" dirty="0">
+            <a:ext cx="1874520" cy="292608"/>
+          </a:xfrm>
+          <a:prstGeom prst="rect">
+            <a:avLst/>
+          </a:prstGeom>
+          <a:noFill/>
+          <a:ln/>
+        </p:spPr>
+        <p:txBody>
+          <a:bodyPr wrap="square" lIns="0" tIns="0" rIns="0" bIns="0" rtlCol="0" anchor="ctr"/>
+          <a:lstStyle/>
+          <a:p>
+            <a:pPr marL="0" indent="0" algn="ctr">
+              <a:buNone/>
+            </a:pPr>
+            <a:r>
+              <a:rPr lang="en-US" sz="900" b="1" dirty="0">
                 <a:solidFill>
                   <a:srgbClr val="FFFFFF"/>
                 </a:solidFill>
               </a:rPr>
               <a:t>Gender Distribution</a:t>
+            </a:r>
+            <a:endParaRPr lang="en-US" sz="900" dirty="0"/>
+          </a:p>
+        </p:txBody>
+      </p:sp>
+      <p:sp>
+        <p:nvSpPr>
+          <p:cNvPr id="10" name="Shape 8"/>
+          <p:cNvSpPr/>
+          <p:nvPr/>
+        </p:nvSpPr>
+        <p:spPr>
+          <a:xfrm>
+            <a:off x="365760" y="1645920"/>
+            <a:ext cx="1874520" cy="2468880"/>
+          </a:xfrm>
+          <a:prstGeom prst="rect">
+            <a:avLst/>
+          </a:prstGeom>
+          <a:solidFill>
+            <a:srgbClr val="FFFFFF"/>
+          </a:solidFill>
+          <a:ln w="6350">
+            <a:solidFill>
+              <a:srgbClr val="E8E5DE"/>
+            </a:solidFill>
+            <a:prstDash val="solid"/>
+          </a:ln>
+        </p:spPr>
+      </p:sp>
+      <p:sp>
+        <p:nvSpPr>
+          <p:cNvPr id="11" name="Shape 9"/>
+          <p:cNvSpPr/>
+          <p:nvPr/>
+        </p:nvSpPr>
+        <p:spPr>
+          <a:xfrm>
+            <a:off x="2331720" y="1353312"/>
+            <a:ext cx="2011680" cy="292608"/>
+          </a:xfrm>
+          <a:prstGeom prst="rect">
+            <a:avLst/>
+          </a:prstGeom>
+          <a:solidFill>
+            <a:srgbClr val="1A1A2E"/>
+          </a:solidFill>
+          <a:ln w="12700">
+            <a:solidFill>
+              <a:srgbClr val="1A1A2E"/>
+            </a:solidFill>
+            <a:prstDash val="solid"/>
+          </a:ln>
+        </p:spPr>
+      </p:sp>
+      <p:sp>
+        <p:nvSpPr>
+          <p:cNvPr id="12" name="Text 10"/>
+          <p:cNvSpPr/>
+          <p:nvPr/>
+        </p:nvSpPr>
+        <p:spPr>
+          <a:xfrm>
+            <a:off x="2331720" y="1353312"/>
+            <a:ext cx="2011680" cy="292608"/>
+          </a:xfrm>
+          <a:prstGeom prst="rect">
+            <a:avLst/>
+          </a:prstGeom>
+          <a:noFill/>
+          <a:ln/>
+        </p:spPr>
+        <p:txBody>
+          <a:bodyPr wrap="square" lIns="0" tIns="0" rIns="0" bIns="0" rtlCol="0" anchor="ctr"/>
+          <a:lstStyle/>
+          <a:p>
+            <a:pPr marL="0" indent="0" algn="ctr">
+              <a:buNone/>
+            </a:pPr>
+            <a:r>
+              <a:rPr lang="en-US" sz="900" b="1" dirty="0">
+                <a:solidFill>
+                  <a:srgbClr val="FFFFFF"/>
+                </a:solidFill>
+              </a:rPr>
+              <a:t>Age Groups</a:t>
+            </a:r>
+            <a:endParaRPr lang="en-US" sz="900" dirty="0"/>
+          </a:p>
+        </p:txBody>
+      </p:sp>
+      <p:sp>
+        <p:nvSpPr>
+          <p:cNvPr id="13" name="Shape 11"/>
+          <p:cNvSpPr/>
+          <p:nvPr/>
+        </p:nvSpPr>
+        <p:spPr>
+          <a:xfrm>
+            <a:off x="2331720" y="1645920"/>
+            <a:ext cx="2011680" cy="2468880"/>
+          </a:xfrm>
+          <a:prstGeom prst="rect">
+            <a:avLst/>
+          </a:prstGeom>
+          <a:solidFill>
+            <a:srgbClr val="FFFFFF"/>
+          </a:solidFill>
+          <a:ln w="6350">
+            <a:solidFill>
+              <a:srgbClr val="E8E5DE"/>
+            </a:solidFill>
+            <a:prstDash val="solid"/>
+          </a:ln>
+        </p:spPr>
+      </p:sp>
+      <p:sp>
+        <p:nvSpPr>
+          <p:cNvPr id="14" name="Shape 12"/>
+          <p:cNvSpPr/>
+          <p:nvPr/>
+        </p:nvSpPr>
+        <p:spPr>
+          <a:xfrm>
+            <a:off x="4434840" y="1353312"/>
+            <a:ext cx="4343400" cy="292608"/>
+          </a:xfrm>
+          <a:prstGeom prst="rect">
+            <a:avLst/>
+          </a:prstGeom>
+          <a:solidFill>
+            <a:srgbClr val="888780"/>
+          </a:solidFill>
+          <a:ln w="12700">
+            <a:solidFill>
+              <a:srgbClr val="888780"/>
+            </a:solidFill>
+            <a:prstDash val="solid"/>
+          </a:ln>
+        </p:spPr>
+      </p:sp>
+      <p:sp>
+        <p:nvSpPr>
+          <p:cNvPr id="15" name="Text 13"/>
+          <p:cNvSpPr/>
+          <p:nvPr/>
+        </p:nvSpPr>
+        <p:spPr>
+          <a:xfrm>
+            <a:off x="4434840" y="1353312"/>
+            <a:ext cx="4343400" cy="292608"/>
+          </a:xfrm>
+          <a:prstGeom prst="rect">
+            <a:avLst/>
+          </a:prstGeom>
+          <a:noFill/>
+          <a:ln/>
+        </p:spPr>
+        <p:txBody>
+          <a:bodyPr wrap="square" lIns="0" tIns="0" rIns="0" bIns="0" rtlCol="0" anchor="ctr"/>
+          <a:lstStyle/>
+          <a:p>
+            <a:pPr marL="0" indent="0" algn="ctr">
+              <a:buNone/>
+            </a:pPr>
+            <a:r>
+              <a:rPr lang="en-US" sz="900" b="1" dirty="0">
+                <a:solidFill>
+                  <a:srgbClr val="FFFFFF"/>
+                </a:solidFill>
+              </a:rPr>
+              <a:t>Age vs Balance</a:t>
+            </a:r>
+            <a:endParaRPr lang="en-US" sz="900" dirty="0"/>
+          </a:p>
+        </p:txBody>
+      </p:sp>
+      <p:sp>
+        <p:nvSpPr>
+          <p:cNvPr id="16" name="Shape 14"/>
+          <p:cNvSpPr/>
+          <p:nvPr/>
+        </p:nvSpPr>
+        <p:spPr>
+          <a:xfrm>
+            <a:off x="4434840" y="1645920"/>
+            <a:ext cx="4343400" cy="2468880"/>
+          </a:xfrm>
+          <a:prstGeom prst="rect">
+            <a:avLst/>
+          </a:prstGeom>
+          <a:solidFill>
+            <a:srgbClr val="FFFFFF"/>
+          </a:solidFill>
+          <a:ln w="6350">
+            <a:solidFill>
+              <a:srgbClr val="E8E5DE"/>
+            </a:solidFill>
+            <a:prstDash val="solid"/>
+          </a:ln>
+        </p:spPr>
+      </p:sp>
+      <p:sp>
+        <p:nvSpPr>
+          <p:cNvPr id="17" name="Shape 15"/>
+          <p:cNvSpPr/>
+          <p:nvPr/>
+        </p:nvSpPr>
+        <p:spPr>
+          <a:xfrm>
+            <a:off x="365760" y="4315968"/>
+            <a:ext cx="8412480" cy="530352"/>
+          </a:xfrm>
+          <a:prstGeom prst="rect">
+            <a:avLst/>
+          </a:prstGeom>
+          <a:solidFill>
+            <a:srgbClr val="F1EFE8"/>
+          </a:solidFill>
+          <a:ln w="6350">
+            <a:solidFill>
+              <a:srgbClr val="E8E5DE"/>
+            </a:solidFill>
+            <a:prstDash val="solid"/>
+          </a:ln>
+        </p:spPr>
+      </p:sp>
+      <p:sp>
+        <p:nvSpPr>
+          <p:cNvPr id="18" name="Shape 16"/>
+          <p:cNvSpPr/>
+          <p:nvPr/>
+        </p:nvSpPr>
+        <p:spPr>
+          <a:xfrm>
+            <a:off x="365760" y="4315968"/>
+            <a:ext cx="54864" cy="530352"/>
+          </a:xfrm>
+          <a:prstGeom prst="rect">
+            <a:avLst/>
+          </a:prstGeom>
+          <a:solidFill>
+            <a:srgbClr val="9A0718"/>
+          </a:solidFill>
+          <a:ln w="12700">
+            <a:solidFill>
+              <a:srgbClr val="9A0718"/>
+            </a:solidFill>
+            <a:prstDash val="solid"/>
+          </a:ln>
+        </p:spPr>
+      </p:sp>
+      <p:sp>
+        <p:nvSpPr>
+          <p:cNvPr id="19" name="Text 17"/>
+          <p:cNvSpPr/>
+          <p:nvPr/>
+        </p:nvSpPr>
+        <p:spPr>
+          <a:xfrm>
+            <a:off x="548640" y="4343400"/>
+            <a:ext cx="8092440" cy="475488"/>
+          </a:xfrm>
+          <a:prstGeom prst="rect">
+            <a:avLst/>
+          </a:prstGeom>
+          <a:noFill/>
+          <a:ln/>
+        </p:spPr>
+        <p:txBody>
+          <a:bodyPr wrap="square" lIns="0" tIns="0" rIns="0" bIns="0" rtlCol="0" anchor="ctr"/>
+          <a:lstStyle/>
+          <a:p>
+            <a:pPr marL="0" indent="0">
+              <a:buNone/>
+            </a:pPr>
+            <a:r>
+              <a:rPr lang="en-US" sz="1000" i="1" dirty="0">
+                <a:solidFill>
+                  <a:srgbClr val="1A1A2E"/>
+                </a:solidFill>
+              </a:rPr>
+              <a:t>Key insight: most clients are middle-aged (31–59), with balance increasing with age. Gender is evenly split across Male, Female and Unknown — suggesting incomplete demographic data.</a:t>
             </a:r>
             <a:endParaRPr lang="en-US" sz="1000" dirty="0"/>
           </a:p>
@@ -7589,192 +7649,152 @@
       </p:sp>
       <p:pic>
         <p:nvPicPr>
-          <p:cNvPr id="10" name="Image 0" descr="/home/claude/Gender.png">    </p:cNvPr>
+          <p:cNvPr id="25" name="Imagem 24">
+            <a:extLst>
+              <a:ext uri="{FF2B5EF4-FFF2-40B4-BE49-F238E27FC236}">
+                <a16:creationId xmlns:a16="http://schemas.microsoft.com/office/drawing/2014/main" id="{6CBE0DA7-8328-0D67-B8A1-3E9527A7AF63}"/>
+              </a:ext>
+            </a:extLst>
+          </p:cNvPr>
           <p:cNvPicPr>
             <a:picLocks noChangeAspect="1"/>
           </p:cNvPicPr>
           <p:nvPr/>
         </p:nvPicPr>
         <p:blipFill>
-          <a:blip r:embed="rId1"/>
+          <a:blip r:embed="rId3"/>
+          <a:srcRect l="37847" t="24864" r="38872" b="18796"/>
           <a:stretch>
             <a:fillRect/>
           </a:stretch>
         </p:blipFill>
         <p:spPr>
           <a:xfrm>
-            <a:off x="365760" y="1673352"/>
-            <a:ext cx="4114800" cy="1737360"/>
+            <a:off x="420624" y="2006600"/>
+            <a:ext cx="1783539" cy="1738629"/>
           </a:xfrm>
           <a:prstGeom prst="rect">
             <a:avLst/>
           </a:prstGeom>
         </p:spPr>
       </p:pic>
-      <p:sp>
-        <p:nvSpPr>
-          <p:cNvPr id="11" name="Shape 8"/>
-          <p:cNvSpPr/>
-          <p:nvPr/>
-        </p:nvSpPr>
-        <p:spPr>
-          <a:xfrm>
-            <a:off x="4663440" y="1353312"/>
-            <a:ext cx="4114800" cy="320040"/>
-          </a:xfrm>
-          <a:prstGeom prst="rect">
-            <a:avLst/>
-          </a:prstGeom>
-          <a:solidFill>
-            <a:srgbClr val="1A1A2E"/>
-          </a:solidFill>
-          <a:ln w="12700">
-            <a:solidFill>
-              <a:srgbClr val="1A1A2E"/>
-            </a:solidFill>
-            <a:prstDash val="solid"/>
-          </a:ln>
-        </p:spPr>
-      </p:sp>
-      <p:sp>
-        <p:nvSpPr>
-          <p:cNvPr id="12" name="Text 9"/>
-          <p:cNvSpPr/>
-          <p:nvPr/>
-        </p:nvSpPr>
-        <p:spPr>
-          <a:xfrm>
-            <a:off x="4663440" y="1353312"/>
-            <a:ext cx="4114800" cy="320040"/>
-          </a:xfrm>
-          <a:prstGeom prst="rect">
-            <a:avLst/>
-          </a:prstGeom>
-          <a:noFill/>
-          <a:ln/>
-        </p:spPr>
-        <p:txBody>
-          <a:bodyPr wrap="square" lIns="0" tIns="0" rIns="0" bIns="0" rtlCol="0" anchor="ctr"/>
-          <a:lstStyle/>
-          <a:p>
-            <a:pPr algn="ctr" indent="0" marL="0">
-              <a:buNone/>
-            </a:pPr>
-            <a:r>
-              <a:rPr lang="en-US" sz="1000" b="1" dirty="0">
-                <a:solidFill>
-                  <a:srgbClr val="FFFFFF"/>
-                </a:solidFill>
-              </a:rPr>
-              <a:t>Age Groups</a:t>
-            </a:r>
-            <a:endParaRPr lang="en-US" sz="1000" dirty="0"/>
-          </a:p>
-        </p:txBody>
-      </p:sp>
       <p:pic>
         <p:nvPicPr>
-          <p:cNvPr id="13" name="Image 1" descr="/home/claude/Age.png">    </p:cNvPr>
+          <p:cNvPr id="26" name="Imagem 25">
+            <a:extLst>
+              <a:ext uri="{FF2B5EF4-FFF2-40B4-BE49-F238E27FC236}">
+                <a16:creationId xmlns:a16="http://schemas.microsoft.com/office/drawing/2014/main" id="{0BE6A39A-AE91-EEA7-DEC4-8CC0AA012D61}"/>
+              </a:ext>
+            </a:extLst>
+          </p:cNvPr>
           <p:cNvPicPr>
             <a:picLocks noChangeAspect="1"/>
           </p:cNvPicPr>
           <p:nvPr/>
         </p:nvPicPr>
         <p:blipFill>
-          <a:blip r:embed="rId2"/>
+          <a:blip r:embed="rId4"/>
+          <a:srcRect l="1601" r="21786" b="2862"/>
           <a:stretch>
             <a:fillRect/>
           </a:stretch>
         </p:blipFill>
         <p:spPr>
           <a:xfrm>
-            <a:off x="4663440" y="1673352"/>
-            <a:ext cx="4114800" cy="1737360"/>
+            <a:off x="4594862" y="1792223"/>
+            <a:ext cx="4046218" cy="2066545"/>
           </a:xfrm>
           <a:prstGeom prst="rect">
             <a:avLst/>
           </a:prstGeom>
         </p:spPr>
       </p:pic>
-      <p:sp>
-        <p:nvSpPr>
-          <p:cNvPr id="14" name="Shape 10"/>
-          <p:cNvSpPr/>
-          <p:nvPr/>
-        </p:nvSpPr>
-        <p:spPr>
-          <a:xfrm>
-            <a:off x="365760" y="3566160"/>
-            <a:ext cx="8412480" cy="320040"/>
-          </a:xfrm>
-          <a:prstGeom prst="rect">
-            <a:avLst/>
-          </a:prstGeom>
-          <a:solidFill>
-            <a:srgbClr val="888780"/>
-          </a:solidFill>
-          <a:ln w="12700">
-            <a:solidFill>
-              <a:srgbClr val="888780"/>
-            </a:solidFill>
-            <a:prstDash val="solid"/>
-          </a:ln>
-        </p:spPr>
-      </p:sp>
-      <p:sp>
-        <p:nvSpPr>
-          <p:cNvPr id="15" name="Text 11"/>
-          <p:cNvSpPr/>
-          <p:nvPr/>
-        </p:nvSpPr>
-        <p:spPr>
-          <a:xfrm>
-            <a:off x="365760" y="3566160"/>
-            <a:ext cx="8412480" cy="320040"/>
-          </a:xfrm>
-          <a:prstGeom prst="rect">
-            <a:avLst/>
-          </a:prstGeom>
-          <a:noFill/>
-          <a:ln/>
-        </p:spPr>
-        <p:txBody>
-          <a:bodyPr wrap="square" lIns="0" tIns="0" rIns="0" bIns="0" rtlCol="0" anchor="ctr"/>
-          <a:lstStyle/>
-          <a:p>
-            <a:pPr algn="ctr" indent="0" marL="0">
-              <a:buNone/>
-            </a:pPr>
-            <a:r>
-              <a:rPr lang="en-US" sz="1000" b="1" dirty="0">
-                <a:solidFill>
-                  <a:srgbClr val="FFFFFF"/>
-                </a:solidFill>
-              </a:rPr>
-              <a:t>Age vs Balance</a:t>
-            </a:r>
-            <a:endParaRPr lang="en-US" sz="1000" dirty="0"/>
-          </a:p>
-        </p:txBody>
-      </p:sp>
       <p:pic>
         <p:nvPicPr>
-          <p:cNvPr id="16" name="Image 2" descr="/home/claude/age_vs_balance.png">    </p:cNvPr>
+          <p:cNvPr id="27" name="Imagem 26">
+            <a:extLst>
+              <a:ext uri="{FF2B5EF4-FFF2-40B4-BE49-F238E27FC236}">
+                <a16:creationId xmlns:a16="http://schemas.microsoft.com/office/drawing/2014/main" id="{48546881-599A-8D5B-F0E0-7AD8C1280105}"/>
+              </a:ext>
+            </a:extLst>
+          </p:cNvPr>
           <p:cNvPicPr>
             <a:picLocks noChangeAspect="1"/>
           </p:cNvPicPr>
           <p:nvPr/>
         </p:nvPicPr>
         <p:blipFill>
-          <a:blip r:embed="rId3"/>
+          <a:blip r:embed="rId4"/>
+          <a:srcRect l="43765" t="95986" r="42167"/>
           <a:stretch>
             <a:fillRect/>
           </a:stretch>
         </p:blipFill>
         <p:spPr>
           <a:xfrm>
-            <a:off x="365760" y="3886200"/>
-            <a:ext cx="8412480" cy="1188720"/>
+            <a:off x="6187440" y="3849348"/>
+            <a:ext cx="742950" cy="85397"/>
+          </a:xfrm>
+          <a:prstGeom prst="rect">
+            <a:avLst/>
+          </a:prstGeom>
+        </p:spPr>
+      </p:pic>
+      <p:pic>
+        <p:nvPicPr>
+          <p:cNvPr id="28" name="Imagem 27">
+            <a:extLst>
+              <a:ext uri="{FF2B5EF4-FFF2-40B4-BE49-F238E27FC236}">
+                <a16:creationId xmlns:a16="http://schemas.microsoft.com/office/drawing/2014/main" id="{C6F97A9D-1CB8-C4DE-53A0-3B98F6DD1A07}"/>
+              </a:ext>
+            </a:extLst>
+          </p:cNvPr>
+          <p:cNvPicPr>
+            <a:picLocks noChangeAspect="1"/>
+          </p:cNvPicPr>
+          <p:nvPr/>
+        </p:nvPicPr>
+        <p:blipFill>
+          <a:blip r:embed="rId4"/>
+          <a:srcRect t="41625" r="98269" b="49791"/>
+          <a:stretch>
+            <a:fillRect/>
+          </a:stretch>
+        </p:blipFill>
+        <p:spPr>
+          <a:xfrm>
+            <a:off x="4457699" y="2743200"/>
+            <a:ext cx="91440" cy="182628"/>
+          </a:xfrm>
+          <a:prstGeom prst="rect">
+            <a:avLst/>
+          </a:prstGeom>
+        </p:spPr>
+      </p:pic>
+      <p:pic>
+        <p:nvPicPr>
+          <p:cNvPr id="30" name="Imagem 29">
+            <a:extLst>
+              <a:ext uri="{FF2B5EF4-FFF2-40B4-BE49-F238E27FC236}">
+                <a16:creationId xmlns:a16="http://schemas.microsoft.com/office/drawing/2014/main" id="{2F35FC7D-FE61-DC07-0419-721B93F7FE96}"/>
+              </a:ext>
+            </a:extLst>
+          </p:cNvPr>
+          <p:cNvPicPr>
+            <a:picLocks noChangeAspect="1"/>
+          </p:cNvPicPr>
+          <p:nvPr/>
+        </p:nvPicPr>
+        <p:blipFill>
+          <a:blip r:embed="rId5"/>
+          <a:stretch>
+            <a:fillRect/>
+          </a:stretch>
+        </p:blipFill>
+        <p:spPr>
+          <a:xfrm>
+            <a:off x="2657475" y="1714754"/>
+            <a:ext cx="1331673" cy="2331211"/>
           </a:xfrm>
           <a:prstGeom prst="rect">
             <a:avLst/>
@@ -7797,6 +7817,7 @@
         <a:solidFill>
           <a:srgbClr val="F8F6F1"/>
         </a:solidFill>
+        <a:effectLst/>
       </p:bgPr>
     </p:bg>
     <p:spTree>
@@ -7884,11 +7905,11 @@
           <a:bodyPr wrap="square" lIns="0" tIns="0" rIns="0" bIns="0" rtlCol="0" anchor="ctr"/>
           <a:lstStyle/>
           <a:p>
-            <a:pPr indent="0" marL="0">
-              <a:buNone/>
-            </a:pPr>
-            <a:r>
-              <a:rPr lang="en-US" sz="1300" b="1" spc="200" kern="0" dirty="0">
+            <a:pPr marL="0" indent="0">
+              <a:buNone/>
+            </a:pPr>
+            <a:r>
+              <a:rPr lang="en-US" sz="1300" b="1" kern="0" spc="200" dirty="0">
                 <a:solidFill>
                   <a:srgbClr val="9A0718"/>
                 </a:solidFill>
@@ -7923,7 +7944,7 @@
           <a:bodyPr wrap="square" lIns="0" tIns="0" rIns="0" bIns="0" rtlCol="0" anchor="ctr"/>
           <a:lstStyle/>
           <a:p>
-            <a:pPr indent="0" marL="0">
+            <a:pPr marL="0" indent="0">
               <a:buNone/>
             </a:pPr>
             <a:r>
@@ -7985,7 +8006,7 @@
           <a:bodyPr wrap="square" lIns="0" tIns="0" rIns="0" bIns="0" rtlCol="0" anchor="ctr"/>
           <a:lstStyle/>
           <a:p>
-            <a:pPr algn="r" indent="0" marL="0">
+            <a:pPr marL="0" indent="0" algn="r">
               <a:buNone/>
             </a:pPr>
             <a:r>
@@ -7994,7 +8015,7 @@
                   <a:srgbClr val="888780"/>
                 </a:solidFill>
               </a:rPr>
-              <a:t>5 / 13</a:t>
+              <a:t>5</a:t>
             </a:r>
             <a:endParaRPr lang="en-US" sz="900" dirty="0"/>
           </a:p>
@@ -8046,7 +8067,7 @@
           <a:bodyPr wrap="square" lIns="0" tIns="0" rIns="0" bIns="0" rtlCol="0" anchor="ctr"/>
           <a:lstStyle/>
           <a:p>
-            <a:pPr indent="0" marL="0">
+            <a:pPr marL="0" indent="0">
               <a:buNone/>
             </a:pPr>
             <a:r>
@@ -8107,7 +8128,7 @@
           <a:bodyPr wrap="square" lIns="0" tIns="0" rIns="0" bIns="0" rtlCol="0" anchor="ctr"/>
           <a:lstStyle/>
           <a:p>
-            <a:pPr algn="ctr" indent="0" marL="0">
+            <a:pPr marL="0" indent="0" algn="ctr">
               <a:buNone/>
             </a:pPr>
             <a:r>
@@ -8143,7 +8164,7 @@
           <a:bodyPr wrap="square" lIns="0" tIns="0" rIns="0" bIns="0" rtlCol="0" anchor="ctr"/>
           <a:lstStyle/>
           <a:p>
-            <a:pPr algn="ctr" indent="0" marL="0">
+            <a:pPr marL="0" indent="0" algn="ctr">
               <a:buNone/>
             </a:pPr>
             <a:r>
@@ -8182,7 +8203,7 @@
           <a:bodyPr wrap="square" lIns="0" tIns="0" rIns="0" bIns="0" rtlCol="0" anchor="ctr"/>
           <a:lstStyle/>
           <a:p>
-            <a:pPr algn="ctr" indent="0" marL="0">
+            <a:pPr marL="0" indent="0" algn="ctr">
               <a:buNone/>
             </a:pPr>
             <a:r>
@@ -8243,7 +8264,7 @@
           <a:bodyPr wrap="square" lIns="0" tIns="0" rIns="0" bIns="0" rtlCol="0" anchor="ctr"/>
           <a:lstStyle/>
           <a:p>
-            <a:pPr algn="ctr" indent="0" marL="0">
+            <a:pPr marL="0" indent="0" algn="ctr">
               <a:buNone/>
             </a:pPr>
             <a:r>
@@ -8279,7 +8300,7 @@
           <a:bodyPr wrap="square" lIns="0" tIns="0" rIns="0" bIns="0" rtlCol="0" anchor="ctr"/>
           <a:lstStyle/>
           <a:p>
-            <a:pPr algn="ctr" indent="0" marL="0">
+            <a:pPr marL="0" indent="0" algn="ctr">
               <a:buNone/>
             </a:pPr>
             <a:r>
@@ -8318,7 +8339,7 @@
           <a:bodyPr wrap="square" lIns="0" tIns="0" rIns="0" bIns="0" rtlCol="0" anchor="ctr"/>
           <a:lstStyle/>
           <a:p>
-            <a:pPr algn="ctr" indent="0" marL="0">
+            <a:pPr marL="0" indent="0" algn="ctr">
               <a:buNone/>
             </a:pPr>
             <a:r>
@@ -8379,7 +8400,7 @@
           <a:bodyPr wrap="square" lIns="0" tIns="0" rIns="0" bIns="0" rtlCol="0" anchor="ctr"/>
           <a:lstStyle/>
           <a:p>
-            <a:pPr algn="ctr" indent="0" marL="0">
+            <a:pPr marL="0" indent="0" algn="ctr">
               <a:buNone/>
             </a:pPr>
             <a:r>
@@ -8415,7 +8436,7 @@
           <a:bodyPr wrap="square" lIns="0" tIns="0" rIns="0" bIns="0" rtlCol="0" anchor="ctr"/>
           <a:lstStyle/>
           <a:p>
-            <a:pPr algn="ctr" indent="0" marL="0">
+            <a:pPr marL="0" indent="0" algn="ctr">
               <a:buNone/>
             </a:pPr>
             <a:r>
@@ -8454,7 +8475,7 @@
           <a:bodyPr wrap="square" lIns="0" tIns="0" rIns="0" bIns="0" rtlCol="0" anchor="ctr"/>
           <a:lstStyle/>
           <a:p>
-            <a:pPr algn="ctr" indent="0" marL="0">
+            <a:pPr marL="0" indent="0" algn="ctr">
               <a:buNone/>
             </a:pPr>
             <a:r>
@@ -8485,6 +8506,7 @@
         <a:solidFill>
           <a:srgbClr val="F8F6F1"/>
         </a:solidFill>
+        <a:effectLst/>
       </p:bgPr>
     </p:bg>
     <p:spTree>
@@ -8572,11 +8594,11 @@
           <a:bodyPr wrap="square" lIns="0" tIns="0" rIns="0" bIns="0" rtlCol="0" anchor="ctr"/>
           <a:lstStyle/>
           <a:p>
-            <a:pPr indent="0" marL="0">
-              <a:buNone/>
-            </a:pPr>
-            <a:r>
-              <a:rPr lang="en-US" sz="1300" b="1" spc="200" kern="0" dirty="0">
+            <a:pPr marL="0" indent="0">
+              <a:buNone/>
+            </a:pPr>
+            <a:r>
+              <a:rPr lang="en-US" sz="1300" b="1" kern="0" spc="200" dirty="0">
                 <a:solidFill>
                   <a:srgbClr val="9A0718"/>
                 </a:solidFill>
@@ -8611,7 +8633,7 @@
           <a:bodyPr wrap="square" lIns="0" tIns="0" rIns="0" bIns="0" rtlCol="0" anchor="ctr"/>
           <a:lstStyle/>
           <a:p>
-            <a:pPr indent="0" marL="0">
+            <a:pPr marL="0" indent="0">
               <a:buNone/>
             </a:pPr>
             <a:r>
@@ -8673,7 +8695,7 @@
           <a:bodyPr wrap="square" lIns="0" tIns="0" rIns="0" bIns="0" rtlCol="0" anchor="ctr"/>
           <a:lstStyle/>
           <a:p>
-            <a:pPr algn="r" indent="0" marL="0">
+            <a:pPr marL="0" indent="0" algn="r">
               <a:buNone/>
             </a:pPr>
             <a:r>
@@ -8682,7 +8704,7 @@
                   <a:srgbClr val="888780"/>
                 </a:solidFill>
               </a:rPr>
-              <a:t>6 / 13</a:t>
+              <a:t>6</a:t>
             </a:r>
             <a:endParaRPr lang="en-US" sz="900" dirty="0"/>
           </a:p>
@@ -8734,7 +8756,7 @@
           <a:bodyPr wrap="square" lIns="0" tIns="0" rIns="0" bIns="0" rtlCol="0" anchor="ctr"/>
           <a:lstStyle/>
           <a:p>
-            <a:pPr indent="0" marL="0">
+            <a:pPr marL="0" indent="0">
               <a:buNone/>
             </a:pPr>
             <a:r>
@@ -8795,7 +8817,7 @@
           <a:bodyPr wrap="square" lIns="0" tIns="0" rIns="0" bIns="0" rtlCol="0" anchor="ctr"/>
           <a:lstStyle/>
           <a:p>
-            <a:pPr algn="ctr" indent="0" marL="0">
+            <a:pPr marL="0" indent="0" algn="ctr">
               <a:buNone/>
             </a:pPr>
             <a:r>
@@ -8856,7 +8878,7 @@
           <a:bodyPr wrap="square" lIns="0" tIns="0" rIns="0" bIns="0" rtlCol="0" anchor="ctr"/>
           <a:lstStyle/>
           <a:p>
-            <a:pPr algn="ctr" indent="0" marL="0">
+            <a:pPr marL="0" indent="0" algn="ctr">
               <a:buNone/>
             </a:pPr>
             <a:r>
@@ -8917,7 +8939,7 @@
           <a:bodyPr wrap="square" lIns="0" tIns="0" rIns="0" bIns="0" rtlCol="0" anchor="ctr"/>
           <a:lstStyle/>
           <a:p>
-            <a:pPr algn="ctr" indent="0" marL="0">
+            <a:pPr marL="0" indent="0" algn="ctr">
               <a:buNone/>
             </a:pPr>
             <a:r>
@@ -8978,7 +9000,7 @@
           <a:bodyPr wrap="square" lIns="0" tIns="0" rIns="0" bIns="0" rtlCol="0" anchor="ctr"/>
           <a:lstStyle/>
           <a:p>
-            <a:pPr algn="ctr" indent="0" marL="0">
+            <a:pPr marL="0" indent="0" algn="ctr">
               <a:buNone/>
             </a:pPr>
             <a:r>
@@ -9039,7 +9061,7 @@
           <a:bodyPr wrap="square" lIns="0" tIns="0" rIns="0" bIns="0" rtlCol="0" anchor="ctr"/>
           <a:lstStyle/>
           <a:p>
-            <a:pPr algn="ctr" indent="0" marL="0">
+            <a:pPr marL="0" indent="0" algn="ctr">
               <a:buNone/>
             </a:pPr>
             <a:r>
@@ -9100,7 +9122,7 @@
           <a:bodyPr wrap="square" lIns="0" tIns="0" rIns="0" bIns="0" rtlCol="0" anchor="ctr"/>
           <a:lstStyle/>
           <a:p>
-            <a:pPr algn="ctr" indent="0" marL="0">
+            <a:pPr marL="0" indent="0" algn="ctr">
               <a:buNone/>
             </a:pPr>
             <a:r>
@@ -9161,7 +9183,7 @@
           <a:bodyPr wrap="square" lIns="0" tIns="0" rIns="0" bIns="0" rtlCol="0" anchor="ctr"/>
           <a:lstStyle/>
           <a:p>
-            <a:pPr algn="ctr" indent="0" marL="0">
+            <a:pPr marL="0" indent="0" algn="ctr">
               <a:buNone/>
             </a:pPr>
             <a:r>
@@ -9222,7 +9244,7 @@
           <a:bodyPr wrap="square" lIns="0" tIns="0" rIns="0" bIns="0" rtlCol="0" anchor="ctr"/>
           <a:lstStyle/>
           <a:p>
-            <a:pPr algn="ctr" indent="0" marL="0">
+            <a:pPr marL="0" indent="0" algn="ctr">
               <a:buNone/>
             </a:pPr>
             <a:r>
@@ -9283,7 +9305,7 @@
           <a:bodyPr wrap="square" lIns="0" tIns="0" rIns="0" bIns="0" rtlCol="0" anchor="ctr"/>
           <a:lstStyle/>
           <a:p>
-            <a:pPr algn="ctr" indent="0" marL="0">
+            <a:pPr marL="0" indent="0" algn="ctr">
               <a:buNone/>
             </a:pPr>
             <a:r>
@@ -9344,7 +9366,7 @@
           <a:bodyPr wrap="square" lIns="0" tIns="0" rIns="0" bIns="0" rtlCol="0" anchor="ctr"/>
           <a:lstStyle/>
           <a:p>
-            <a:pPr algn="ctr" indent="0" marL="0">
+            <a:pPr marL="0" indent="0" algn="ctr">
               <a:buNone/>
             </a:pPr>
             <a:r>
@@ -9405,7 +9427,7 @@
           <a:bodyPr wrap="square" lIns="0" tIns="0" rIns="0" bIns="0" rtlCol="0" anchor="ctr"/>
           <a:lstStyle/>
           <a:p>
-            <a:pPr algn="ctr" indent="0" marL="0">
+            <a:pPr marL="0" indent="0" algn="ctr">
               <a:buNone/>
             </a:pPr>
             <a:r>
@@ -9466,7 +9488,7 @@
           <a:bodyPr wrap="square" lIns="0" tIns="0" rIns="0" bIns="0" rtlCol="0" anchor="ctr"/>
           <a:lstStyle/>
           <a:p>
-            <a:pPr algn="ctr" indent="0" marL="0">
+            <a:pPr marL="0" indent="0" algn="ctr">
               <a:buNone/>
             </a:pPr>
             <a:r>
@@ -9527,7 +9549,7 @@
           <a:bodyPr wrap="square" lIns="0" tIns="0" rIns="0" bIns="0" rtlCol="0" anchor="ctr"/>
           <a:lstStyle/>
           <a:p>
-            <a:pPr algn="ctr" indent="0" marL="0">
+            <a:pPr marL="0" indent="0" algn="ctr">
               <a:buNone/>
             </a:pPr>
             <a:r>
@@ -9588,7 +9610,7 @@
           <a:bodyPr wrap="square" lIns="0" tIns="0" rIns="0" bIns="0" rtlCol="0" anchor="ctr"/>
           <a:lstStyle/>
           <a:p>
-            <a:pPr algn="ctr" indent="0" marL="0">
+            <a:pPr marL="0" indent="0" algn="ctr">
               <a:buNone/>
             </a:pPr>
             <a:r>
@@ -9649,7 +9671,7 @@
           <a:bodyPr wrap="square" lIns="0" tIns="0" rIns="0" bIns="0" rtlCol="0" anchor="ctr"/>
           <a:lstStyle/>
           <a:p>
-            <a:pPr algn="ctr" indent="0" marL="0">
+            <a:pPr marL="0" indent="0" algn="ctr">
               <a:buNone/>
             </a:pPr>
             <a:r>
@@ -9710,7 +9732,7 @@
           <a:bodyPr wrap="square" lIns="0" tIns="0" rIns="0" bIns="0" rtlCol="0" anchor="ctr"/>
           <a:lstStyle/>
           <a:p>
-            <a:pPr algn="ctr" indent="0" marL="0">
+            <a:pPr marL="0" indent="0" algn="ctr">
               <a:buNone/>
             </a:pPr>
             <a:r>
@@ -9771,7 +9793,7 @@
           <a:bodyPr wrap="square" lIns="0" tIns="0" rIns="0" bIns="0" rtlCol="0" anchor="ctr"/>
           <a:lstStyle/>
           <a:p>
-            <a:pPr algn="ctr" indent="0" marL="0">
+            <a:pPr marL="0" indent="0" algn="ctr">
               <a:buNone/>
             </a:pPr>
             <a:r>
@@ -9832,7 +9854,7 @@
           <a:bodyPr wrap="square" lIns="0" tIns="0" rIns="0" bIns="0" rtlCol="0" anchor="ctr"/>
           <a:lstStyle/>
           <a:p>
-            <a:pPr algn="ctr" indent="0" marL="0">
+            <a:pPr marL="0" indent="0" algn="ctr">
               <a:buNone/>
             </a:pPr>
             <a:r>
@@ -9893,7 +9915,7 @@
           <a:bodyPr wrap="square" lIns="0" tIns="0" rIns="0" bIns="0" rtlCol="0" anchor="ctr"/>
           <a:lstStyle/>
           <a:p>
-            <a:pPr algn="ctr" indent="0" marL="0">
+            <a:pPr marL="0" indent="0" algn="ctr">
               <a:buNone/>
             </a:pPr>
             <a:r>
@@ -9954,7 +9976,7 @@
           <a:bodyPr wrap="square" lIns="0" tIns="0" rIns="0" bIns="0" rtlCol="0" anchor="ctr"/>
           <a:lstStyle/>
           <a:p>
-            <a:pPr algn="ctr" indent="0" marL="0">
+            <a:pPr marL="0" indent="0" algn="ctr">
               <a:buNone/>
             </a:pPr>
             <a:r>
@@ -10015,7 +10037,7 @@
           <a:bodyPr wrap="square" lIns="0" tIns="0" rIns="0" bIns="0" rtlCol="0" anchor="ctr"/>
           <a:lstStyle/>
           <a:p>
-            <a:pPr algn="ctr" indent="0" marL="0">
+            <a:pPr marL="0" indent="0" algn="ctr">
               <a:buNone/>
             </a:pPr>
             <a:r>
@@ -10076,7 +10098,7 @@
           <a:bodyPr wrap="square" lIns="0" tIns="0" rIns="0" bIns="0" rtlCol="0" anchor="ctr"/>
           <a:lstStyle/>
           <a:p>
-            <a:pPr algn="ctr" indent="0" marL="0">
+            <a:pPr marL="0" indent="0" algn="ctr">
               <a:buNone/>
             </a:pPr>
             <a:r>
@@ -10137,7 +10159,7 @@
           <a:bodyPr wrap="square" lIns="0" tIns="0" rIns="0" bIns="0" rtlCol="0" anchor="ctr"/>
           <a:lstStyle/>
           <a:p>
-            <a:pPr algn="ctr" indent="0" marL="0">
+            <a:pPr marL="0" indent="0" algn="ctr">
               <a:buNone/>
             </a:pPr>
             <a:r>
@@ -10198,7 +10220,7 @@
           <a:bodyPr wrap="square" lIns="0" tIns="0" rIns="0" bIns="0" rtlCol="0" anchor="ctr"/>
           <a:lstStyle/>
           <a:p>
-            <a:pPr algn="ctr" indent="0" marL="0">
+            <a:pPr marL="0" indent="0" algn="ctr">
               <a:buNone/>
             </a:pPr>
             <a:r>
@@ -10284,7 +10306,7 @@
           <a:bodyPr wrap="square" lIns="0" tIns="0" rIns="0" bIns="0" rtlCol="0" anchor="ctr"/>
           <a:lstStyle/>
           <a:p>
-            <a:pPr indent="0" marL="0">
+            <a:pPr marL="0" indent="0">
               <a:buNone/>
             </a:pPr>
             <a:r>
@@ -10315,6 +10337,7 @@
         <a:solidFill>
           <a:srgbClr val="F8F6F1"/>
         </a:solidFill>
+        <a:effectLst/>
       </p:bgPr>
     </p:bg>
     <p:spTree>
@@ -10402,11 +10425,11 @@
           <a:bodyPr wrap="square" lIns="0" tIns="0" rIns="0" bIns="0" rtlCol="0" anchor="ctr"/>
           <a:lstStyle/>
           <a:p>
-            <a:pPr indent="0" marL="0">
-              <a:buNone/>
-            </a:pPr>
-            <a:r>
-              <a:rPr lang="en-US" sz="1300" b="1" spc="200" kern="0" dirty="0">
+            <a:pPr marL="0" indent="0">
+              <a:buNone/>
+            </a:pPr>
+            <a:r>
+              <a:rPr lang="en-US" sz="1300" b="1" kern="0" spc="200" dirty="0">
                 <a:solidFill>
                   <a:srgbClr val="9A0718"/>
                 </a:solidFill>
@@ -10441,7 +10464,7 @@
           <a:bodyPr wrap="square" lIns="0" tIns="0" rIns="0" bIns="0" rtlCol="0" anchor="ctr"/>
           <a:lstStyle/>
           <a:p>
-            <a:pPr indent="0" marL="0">
+            <a:pPr marL="0" indent="0">
               <a:buNone/>
             </a:pPr>
             <a:r>
@@ -10503,7 +10526,7 @@
           <a:bodyPr wrap="square" lIns="0" tIns="0" rIns="0" bIns="0" rtlCol="0" anchor="ctr"/>
           <a:lstStyle/>
           <a:p>
-            <a:pPr algn="r" indent="0" marL="0">
+            <a:pPr marL="0" indent="0" algn="r">
               <a:buNone/>
             </a:pPr>
             <a:r>
@@ -10512,7 +10535,7 @@
                   <a:srgbClr val="888780"/>
                 </a:solidFill>
               </a:rPr>
-              <a:t>7 / 13</a:t>
+              <a:t>7</a:t>
             </a:r>
             <a:endParaRPr lang="en-US" sz="900" dirty="0"/>
           </a:p>
@@ -10564,7 +10587,7 @@
           <a:bodyPr wrap="square" lIns="0" tIns="0" rIns="0" bIns="0" rtlCol="0" anchor="ctr"/>
           <a:lstStyle/>
           <a:p>
-            <a:pPr indent="0" marL="0">
+            <a:pPr marL="0" indent="0">
               <a:buNone/>
             </a:pPr>
             <a:r>
@@ -10574,1836 +10597,6 @@
                 </a:solidFill>
               </a:rPr>
               <a:t>Definition: % of visits where users moved backward from a step  ·  Success: Test &lt; Control (less friction)</a:t>
-            </a:r>
-            <a:endParaRPr lang="en-US" sz="1000" dirty="0"/>
-          </a:p>
-        </p:txBody>
-      </p:sp>
-      <p:sp>
-        <p:nvSpPr>
-          <p:cNvPr id="10" name="Shape 8"/>
-          <p:cNvSpPr/>
-          <p:nvPr/>
-        </p:nvSpPr>
-        <p:spPr>
-          <a:xfrm>
-            <a:off x="365760" y="1920240"/>
-            <a:ext cx="2103120" cy="347472"/>
-          </a:xfrm>
-          <a:prstGeom prst="rect">
-            <a:avLst/>
-          </a:prstGeom>
-          <a:solidFill>
-            <a:srgbClr val="1A1A2E"/>
-          </a:solidFill>
-          <a:ln w="12700">
-            <a:solidFill>
-              <a:srgbClr val="1A1A2E"/>
-            </a:solidFill>
-            <a:prstDash val="solid"/>
-          </a:ln>
-        </p:spPr>
-      </p:sp>
-      <p:sp>
-        <p:nvSpPr>
-          <p:cNvPr id="11" name="Text 9"/>
-          <p:cNvSpPr/>
-          <p:nvPr/>
-        </p:nvSpPr>
-        <p:spPr>
-          <a:xfrm>
-            <a:off x="365760" y="1920240"/>
-            <a:ext cx="2103120" cy="347472"/>
-          </a:xfrm>
-          <a:prstGeom prst="rect">
-            <a:avLst/>
-          </a:prstGeom>
-          <a:noFill/>
-          <a:ln/>
-        </p:spPr>
-        <p:txBody>
-          <a:bodyPr wrap="square" lIns="0" tIns="0" rIns="0" bIns="0" rtlCol="0" anchor="ctr"/>
-          <a:lstStyle/>
-          <a:p>
-            <a:pPr algn="ctr" indent="0" marL="0">
-              <a:buNone/>
-            </a:pPr>
-            <a:r>
-              <a:rPr lang="en-US" sz="1000" b="1" dirty="0">
-                <a:solidFill>
-                  <a:srgbClr val="FFFFFF"/>
-                </a:solidFill>
-              </a:rPr>
-              <a:t>Step</a:t>
-            </a:r>
-            <a:endParaRPr lang="en-US" sz="1000" dirty="0"/>
-          </a:p>
-        </p:txBody>
-      </p:sp>
-      <p:sp>
-        <p:nvSpPr>
-          <p:cNvPr id="12" name="Shape 10"/>
-          <p:cNvSpPr/>
-          <p:nvPr/>
-        </p:nvSpPr>
-        <p:spPr>
-          <a:xfrm>
-            <a:off x="2560320" y="1920240"/>
-            <a:ext cx="1920240" cy="347472"/>
-          </a:xfrm>
-          <a:prstGeom prst="rect">
-            <a:avLst/>
-          </a:prstGeom>
-          <a:solidFill>
-            <a:srgbClr val="1A1A2E"/>
-          </a:solidFill>
-          <a:ln w="12700">
-            <a:solidFill>
-              <a:srgbClr val="1A1A2E"/>
-            </a:solidFill>
-            <a:prstDash val="solid"/>
-          </a:ln>
-        </p:spPr>
-      </p:sp>
-      <p:sp>
-        <p:nvSpPr>
-          <p:cNvPr id="13" name="Text 11"/>
-          <p:cNvSpPr/>
-          <p:nvPr/>
-        </p:nvSpPr>
-        <p:spPr>
-          <a:xfrm>
-            <a:off x="2560320" y="1920240"/>
-            <a:ext cx="1920240" cy="347472"/>
-          </a:xfrm>
-          <a:prstGeom prst="rect">
-            <a:avLst/>
-          </a:prstGeom>
-          <a:noFill/>
-          <a:ln/>
-        </p:spPr>
-        <p:txBody>
-          <a:bodyPr wrap="square" lIns="0" tIns="0" rIns="0" bIns="0" rtlCol="0" anchor="ctr"/>
-          <a:lstStyle/>
-          <a:p>
-            <a:pPr algn="ctr" indent="0" marL="0">
-              <a:buNone/>
-            </a:pPr>
-            <a:r>
-              <a:rPr lang="en-US" sz="1000" b="1" dirty="0">
-                <a:solidFill>
-                  <a:srgbClr val="FFFFFF"/>
-                </a:solidFill>
-              </a:rPr>
-              <a:t>Control error %</a:t>
-            </a:r>
-            <a:endParaRPr lang="en-US" sz="1000" dirty="0"/>
-          </a:p>
-        </p:txBody>
-      </p:sp>
-      <p:sp>
-        <p:nvSpPr>
-          <p:cNvPr id="14" name="Shape 12"/>
-          <p:cNvSpPr/>
-          <p:nvPr/>
-        </p:nvSpPr>
-        <p:spPr>
-          <a:xfrm>
-            <a:off x="4572000" y="1920240"/>
-            <a:ext cx="1920240" cy="347472"/>
-          </a:xfrm>
-          <a:prstGeom prst="rect">
-            <a:avLst/>
-          </a:prstGeom>
-          <a:solidFill>
-            <a:srgbClr val="9A0718"/>
-          </a:solidFill>
-          <a:ln w="12700">
-            <a:solidFill>
-              <a:srgbClr val="9A0718"/>
-            </a:solidFill>
-            <a:prstDash val="solid"/>
-          </a:ln>
-        </p:spPr>
-      </p:sp>
-      <p:sp>
-        <p:nvSpPr>
-          <p:cNvPr id="15" name="Text 13"/>
-          <p:cNvSpPr/>
-          <p:nvPr/>
-        </p:nvSpPr>
-        <p:spPr>
-          <a:xfrm>
-            <a:off x="4572000" y="1920240"/>
-            <a:ext cx="1920240" cy="347472"/>
-          </a:xfrm>
-          <a:prstGeom prst="rect">
-            <a:avLst/>
-          </a:prstGeom>
-          <a:noFill/>
-          <a:ln/>
-        </p:spPr>
-        <p:txBody>
-          <a:bodyPr wrap="square" lIns="0" tIns="0" rIns="0" bIns="0" rtlCol="0" anchor="ctr"/>
-          <a:lstStyle/>
-          <a:p>
-            <a:pPr algn="ctr" indent="0" marL="0">
-              <a:buNone/>
-            </a:pPr>
-            <a:r>
-              <a:rPr lang="en-US" sz="1000" b="1" dirty="0">
-                <a:solidFill>
-                  <a:srgbClr val="FFFFFF"/>
-                </a:solidFill>
-              </a:rPr>
-              <a:t>Test error %</a:t>
-            </a:r>
-            <a:endParaRPr lang="en-US" sz="1000" dirty="0"/>
-          </a:p>
-        </p:txBody>
-      </p:sp>
-      <p:sp>
-        <p:nvSpPr>
-          <p:cNvPr id="16" name="Shape 14"/>
-          <p:cNvSpPr/>
-          <p:nvPr/>
-        </p:nvSpPr>
-        <p:spPr>
-          <a:xfrm>
-            <a:off x="6583680" y="1920240"/>
-            <a:ext cx="1097280" cy="347472"/>
-          </a:xfrm>
-          <a:prstGeom prst="rect">
-            <a:avLst/>
-          </a:prstGeom>
-          <a:solidFill>
-            <a:srgbClr val="888780"/>
-          </a:solidFill>
-          <a:ln w="12700">
-            <a:solidFill>
-              <a:srgbClr val="888780"/>
-            </a:solidFill>
-            <a:prstDash val="solid"/>
-          </a:ln>
-        </p:spPr>
-      </p:sp>
-      <p:sp>
-        <p:nvSpPr>
-          <p:cNvPr id="17" name="Text 15"/>
-          <p:cNvSpPr/>
-          <p:nvPr/>
-        </p:nvSpPr>
-        <p:spPr>
-          <a:xfrm>
-            <a:off x="6583680" y="1920240"/>
-            <a:ext cx="1097280" cy="347472"/>
-          </a:xfrm>
-          <a:prstGeom prst="rect">
-            <a:avLst/>
-          </a:prstGeom>
-          <a:noFill/>
-          <a:ln/>
-        </p:spPr>
-        <p:txBody>
-          <a:bodyPr wrap="square" lIns="0" tIns="0" rIns="0" bIns="0" rtlCol="0" anchor="ctr"/>
-          <a:lstStyle/>
-          <a:p>
-            <a:pPr algn="ctr" indent="0" marL="0">
-              <a:buNone/>
-            </a:pPr>
-            <a:r>
-              <a:rPr lang="en-US" sz="1000" b="1" dirty="0">
-                <a:solidFill>
-                  <a:srgbClr val="FFFFFF"/>
-                </a:solidFill>
-              </a:rPr>
-              <a:t>Diff</a:t>
-            </a:r>
-            <a:endParaRPr lang="en-US" sz="1000" dirty="0"/>
-          </a:p>
-        </p:txBody>
-      </p:sp>
-      <p:sp>
-        <p:nvSpPr>
-          <p:cNvPr id="18" name="Shape 16"/>
-          <p:cNvSpPr/>
-          <p:nvPr/>
-        </p:nvSpPr>
-        <p:spPr>
-          <a:xfrm>
-            <a:off x="7772400" y="1920240"/>
-            <a:ext cx="1097280" cy="347472"/>
-          </a:xfrm>
-          <a:prstGeom prst="rect">
-            <a:avLst/>
-          </a:prstGeom>
-          <a:solidFill>
-            <a:srgbClr val="888780"/>
-          </a:solidFill>
-          <a:ln w="12700">
-            <a:solidFill>
-              <a:srgbClr val="888780"/>
-            </a:solidFill>
-            <a:prstDash val="solid"/>
-          </a:ln>
-        </p:spPr>
-      </p:sp>
-      <p:sp>
-        <p:nvSpPr>
-          <p:cNvPr id="19" name="Text 17"/>
-          <p:cNvSpPr/>
-          <p:nvPr/>
-        </p:nvSpPr>
-        <p:spPr>
-          <a:xfrm>
-            <a:off x="7772400" y="1920240"/>
-            <a:ext cx="1097280" cy="347472"/>
-          </a:xfrm>
-          <a:prstGeom prst="rect">
-            <a:avLst/>
-          </a:prstGeom>
-          <a:noFill/>
-          <a:ln/>
-        </p:spPr>
-        <p:txBody>
-          <a:bodyPr wrap="square" lIns="0" tIns="0" rIns="0" bIns="0" rtlCol="0" anchor="ctr"/>
-          <a:lstStyle/>
-          <a:p>
-            <a:pPr algn="ctr" indent="0" marL="0">
-              <a:buNone/>
-            </a:pPr>
-            <a:r>
-              <a:rPr lang="en-US" sz="1000" b="1" dirty="0">
-                <a:solidFill>
-                  <a:srgbClr val="FFFFFF"/>
-                </a:solidFill>
-              </a:rPr>
-              <a:t>Result</a:t>
-            </a:r>
-            <a:endParaRPr lang="en-US" sz="1000" dirty="0"/>
-          </a:p>
-        </p:txBody>
-      </p:sp>
-      <p:sp>
-        <p:nvSpPr>
-          <p:cNvPr id="20" name="Shape 18"/>
-          <p:cNvSpPr/>
-          <p:nvPr/>
-        </p:nvSpPr>
-        <p:spPr>
-          <a:xfrm>
-            <a:off x="365760" y="2304288"/>
-            <a:ext cx="2103120" cy="347472"/>
-          </a:xfrm>
-          <a:prstGeom prst="rect">
-            <a:avLst/>
-          </a:prstGeom>
-          <a:solidFill>
-            <a:srgbClr val="FFFFFF"/>
-          </a:solidFill>
-          <a:ln w="6350">
-            <a:solidFill>
-              <a:srgbClr val="E8E5DE"/>
-            </a:solidFill>
-            <a:prstDash val="solid"/>
-          </a:ln>
-        </p:spPr>
-      </p:sp>
-      <p:sp>
-        <p:nvSpPr>
-          <p:cNvPr id="21" name="Text 19"/>
-          <p:cNvSpPr/>
-          <p:nvPr/>
-        </p:nvSpPr>
-        <p:spPr>
-          <a:xfrm>
-            <a:off x="365760" y="2304288"/>
-            <a:ext cx="2103120" cy="347472"/>
-          </a:xfrm>
-          <a:prstGeom prst="rect">
-            <a:avLst/>
-          </a:prstGeom>
-          <a:noFill/>
-          <a:ln/>
-        </p:spPr>
-        <p:txBody>
-          <a:bodyPr wrap="square" lIns="0" tIns="0" rIns="0" bIns="0" rtlCol="0" anchor="ctr"/>
-          <a:lstStyle/>
-          <a:p>
-            <a:pPr algn="ctr" indent="0" marL="0">
-              <a:buNone/>
-            </a:pPr>
-            <a:r>
-              <a:rPr lang="en-US" sz="1000" b="1" dirty="0">
-                <a:solidFill>
-                  <a:srgbClr val="1A1A2E"/>
-                </a:solidFill>
-              </a:rPr>
-              <a:t>Start</a:t>
-            </a:r>
-            <a:endParaRPr lang="en-US" sz="1000" dirty="0"/>
-          </a:p>
-        </p:txBody>
-      </p:sp>
-      <p:sp>
-        <p:nvSpPr>
-          <p:cNvPr id="22" name="Shape 20"/>
-          <p:cNvSpPr/>
-          <p:nvPr/>
-        </p:nvSpPr>
-        <p:spPr>
-          <a:xfrm>
-            <a:off x="2560320" y="2304288"/>
-            <a:ext cx="1920240" cy="347472"/>
-          </a:xfrm>
-          <a:prstGeom prst="rect">
-            <a:avLst/>
-          </a:prstGeom>
-          <a:solidFill>
-            <a:srgbClr val="FFFFFF"/>
-          </a:solidFill>
-          <a:ln w="6350">
-            <a:solidFill>
-              <a:srgbClr val="E8E5DE"/>
-            </a:solidFill>
-            <a:prstDash val="solid"/>
-          </a:ln>
-        </p:spPr>
-      </p:sp>
-      <p:sp>
-        <p:nvSpPr>
-          <p:cNvPr id="23" name="Text 21"/>
-          <p:cNvSpPr/>
-          <p:nvPr/>
-        </p:nvSpPr>
-        <p:spPr>
-          <a:xfrm>
-            <a:off x="2560320" y="2304288"/>
-            <a:ext cx="1920240" cy="347472"/>
-          </a:xfrm>
-          <a:prstGeom prst="rect">
-            <a:avLst/>
-          </a:prstGeom>
-          <a:noFill/>
-          <a:ln/>
-        </p:spPr>
-        <p:txBody>
-          <a:bodyPr wrap="square" lIns="0" tIns="0" rIns="0" bIns="0" rtlCol="0" anchor="ctr"/>
-          <a:lstStyle/>
-          <a:p>
-            <a:pPr algn="ctr" indent="0" marL="0">
-              <a:buNone/>
-            </a:pPr>
-            <a:r>
-              <a:rPr lang="en-US" sz="1000" dirty="0">
-                <a:solidFill>
-                  <a:srgbClr val="1A1A2E"/>
-                </a:solidFill>
-              </a:rPr>
-              <a:t>0.00%</a:t>
-            </a:r>
-            <a:endParaRPr lang="en-US" sz="1000" dirty="0"/>
-          </a:p>
-        </p:txBody>
-      </p:sp>
-      <p:sp>
-        <p:nvSpPr>
-          <p:cNvPr id="24" name="Shape 22"/>
-          <p:cNvSpPr/>
-          <p:nvPr/>
-        </p:nvSpPr>
-        <p:spPr>
-          <a:xfrm>
-            <a:off x="4572000" y="2304288"/>
-            <a:ext cx="1920240" cy="347472"/>
-          </a:xfrm>
-          <a:prstGeom prst="rect">
-            <a:avLst/>
-          </a:prstGeom>
-          <a:solidFill>
-            <a:srgbClr val="FFFFFF"/>
-          </a:solidFill>
-          <a:ln w="6350">
-            <a:solidFill>
-              <a:srgbClr val="E8E5DE"/>
-            </a:solidFill>
-            <a:prstDash val="solid"/>
-          </a:ln>
-        </p:spPr>
-      </p:sp>
-      <p:sp>
-        <p:nvSpPr>
-          <p:cNvPr id="25" name="Text 23"/>
-          <p:cNvSpPr/>
-          <p:nvPr/>
-        </p:nvSpPr>
-        <p:spPr>
-          <a:xfrm>
-            <a:off x="4572000" y="2304288"/>
-            <a:ext cx="1920240" cy="347472"/>
-          </a:xfrm>
-          <a:prstGeom prst="rect">
-            <a:avLst/>
-          </a:prstGeom>
-          <a:noFill/>
-          <a:ln/>
-        </p:spPr>
-        <p:txBody>
-          <a:bodyPr wrap="square" lIns="0" tIns="0" rIns="0" bIns="0" rtlCol="0" anchor="ctr"/>
-          <a:lstStyle/>
-          <a:p>
-            <a:pPr algn="ctr" indent="0" marL="0">
-              <a:buNone/>
-            </a:pPr>
-            <a:r>
-              <a:rPr lang="en-US" sz="1000" dirty="0">
-                <a:solidFill>
-                  <a:srgbClr val="9A0718"/>
-                </a:solidFill>
-              </a:rPr>
-              <a:t>0.00%</a:t>
-            </a:r>
-            <a:endParaRPr lang="en-US" sz="1000" dirty="0"/>
-          </a:p>
-        </p:txBody>
-      </p:sp>
-      <p:sp>
-        <p:nvSpPr>
-          <p:cNvPr id="26" name="Shape 24"/>
-          <p:cNvSpPr/>
-          <p:nvPr/>
-        </p:nvSpPr>
-        <p:spPr>
-          <a:xfrm>
-            <a:off x="6583680" y="2304288"/>
-            <a:ext cx="1097280" cy="347472"/>
-          </a:xfrm>
-          <a:prstGeom prst="rect">
-            <a:avLst/>
-          </a:prstGeom>
-          <a:solidFill>
-            <a:srgbClr val="FFFFFF"/>
-          </a:solidFill>
-          <a:ln w="6350">
-            <a:solidFill>
-              <a:srgbClr val="E8E5DE"/>
-            </a:solidFill>
-            <a:prstDash val="solid"/>
-          </a:ln>
-        </p:spPr>
-      </p:sp>
-      <p:sp>
-        <p:nvSpPr>
-          <p:cNvPr id="27" name="Text 25"/>
-          <p:cNvSpPr/>
-          <p:nvPr/>
-        </p:nvSpPr>
-        <p:spPr>
-          <a:xfrm>
-            <a:off x="6583680" y="2304288"/>
-            <a:ext cx="1097280" cy="347472"/>
-          </a:xfrm>
-          <a:prstGeom prst="rect">
-            <a:avLst/>
-          </a:prstGeom>
-          <a:noFill/>
-          <a:ln/>
-        </p:spPr>
-        <p:txBody>
-          <a:bodyPr wrap="square" lIns="0" tIns="0" rIns="0" bIns="0" rtlCol="0" anchor="ctr"/>
-          <a:lstStyle/>
-          <a:p>
-            <a:pPr algn="ctr" indent="0" marL="0">
-              <a:buNone/>
-            </a:pPr>
-            <a:r>
-              <a:rPr lang="en-US" sz="1000" dirty="0">
-                <a:solidFill>
-                  <a:srgbClr val="888780"/>
-                </a:solidFill>
-              </a:rPr>
-              <a:t>0.00%</a:t>
-            </a:r>
-            <a:endParaRPr lang="en-US" sz="1000" dirty="0"/>
-          </a:p>
-        </p:txBody>
-      </p:sp>
-      <p:sp>
-        <p:nvSpPr>
-          <p:cNvPr id="28" name="Shape 26"/>
-          <p:cNvSpPr/>
-          <p:nvPr/>
-        </p:nvSpPr>
-        <p:spPr>
-          <a:xfrm>
-            <a:off x="7772400" y="2304288"/>
-            <a:ext cx="1097280" cy="347472"/>
-          </a:xfrm>
-          <a:prstGeom prst="rect">
-            <a:avLst/>
-          </a:prstGeom>
-          <a:solidFill>
-            <a:srgbClr val="FFFFFF"/>
-          </a:solidFill>
-          <a:ln w="6350">
-            <a:solidFill>
-              <a:srgbClr val="E8E5DE"/>
-            </a:solidFill>
-            <a:prstDash val="solid"/>
-          </a:ln>
-        </p:spPr>
-      </p:sp>
-      <p:sp>
-        <p:nvSpPr>
-          <p:cNvPr id="29" name="Text 27"/>
-          <p:cNvSpPr/>
-          <p:nvPr/>
-        </p:nvSpPr>
-        <p:spPr>
-          <a:xfrm>
-            <a:off x="7772400" y="2304288"/>
-            <a:ext cx="1097280" cy="347472"/>
-          </a:xfrm>
-          <a:prstGeom prst="rect">
-            <a:avLst/>
-          </a:prstGeom>
-          <a:noFill/>
-          <a:ln/>
-        </p:spPr>
-        <p:txBody>
-          <a:bodyPr wrap="square" lIns="0" tIns="0" rIns="0" bIns="0" rtlCol="0" anchor="ctr"/>
-          <a:lstStyle/>
-          <a:p>
-            <a:pPr algn="ctr" indent="0" marL="0">
-              <a:buNone/>
-            </a:pPr>
-            <a:r>
-              <a:rPr lang="en-US" sz="1000" dirty="0">
-                <a:solidFill>
-                  <a:srgbClr val="3B6D11"/>
-                </a:solidFill>
-              </a:rPr>
-              <a:t>—</a:t>
-            </a:r>
-            <a:endParaRPr lang="en-US" sz="1000" dirty="0"/>
-          </a:p>
-        </p:txBody>
-      </p:sp>
-      <p:sp>
-        <p:nvSpPr>
-          <p:cNvPr id="30" name="Shape 28"/>
-          <p:cNvSpPr/>
-          <p:nvPr/>
-        </p:nvSpPr>
-        <p:spPr>
-          <a:xfrm>
-            <a:off x="365760" y="2688336"/>
-            <a:ext cx="2103120" cy="347472"/>
-          </a:xfrm>
-          <a:prstGeom prst="rect">
-            <a:avLst/>
-          </a:prstGeom>
-          <a:solidFill>
-            <a:srgbClr val="F1EFE8"/>
-          </a:solidFill>
-          <a:ln w="6350">
-            <a:solidFill>
-              <a:srgbClr val="E8E5DE"/>
-            </a:solidFill>
-            <a:prstDash val="solid"/>
-          </a:ln>
-        </p:spPr>
-      </p:sp>
-      <p:sp>
-        <p:nvSpPr>
-          <p:cNvPr id="31" name="Text 29"/>
-          <p:cNvSpPr/>
-          <p:nvPr/>
-        </p:nvSpPr>
-        <p:spPr>
-          <a:xfrm>
-            <a:off x="365760" y="2688336"/>
-            <a:ext cx="2103120" cy="347472"/>
-          </a:xfrm>
-          <a:prstGeom prst="rect">
-            <a:avLst/>
-          </a:prstGeom>
-          <a:noFill/>
-          <a:ln/>
-        </p:spPr>
-        <p:txBody>
-          <a:bodyPr wrap="square" lIns="0" tIns="0" rIns="0" bIns="0" rtlCol="0" anchor="ctr"/>
-          <a:lstStyle/>
-          <a:p>
-            <a:pPr algn="ctr" indent="0" marL="0">
-              <a:buNone/>
-            </a:pPr>
-            <a:r>
-              <a:rPr lang="en-US" sz="1000" b="1" dirty="0">
-                <a:solidFill>
-                  <a:srgbClr val="1A1A2E"/>
-                </a:solidFill>
-              </a:rPr>
-              <a:t>Step 1</a:t>
-            </a:r>
-            <a:endParaRPr lang="en-US" sz="1000" dirty="0"/>
-          </a:p>
-        </p:txBody>
-      </p:sp>
-      <p:sp>
-        <p:nvSpPr>
-          <p:cNvPr id="32" name="Shape 30"/>
-          <p:cNvSpPr/>
-          <p:nvPr/>
-        </p:nvSpPr>
-        <p:spPr>
-          <a:xfrm>
-            <a:off x="2560320" y="2688336"/>
-            <a:ext cx="1920240" cy="347472"/>
-          </a:xfrm>
-          <a:prstGeom prst="rect">
-            <a:avLst/>
-          </a:prstGeom>
-          <a:solidFill>
-            <a:srgbClr val="F1EFE8"/>
-          </a:solidFill>
-          <a:ln w="6350">
-            <a:solidFill>
-              <a:srgbClr val="E8E5DE"/>
-            </a:solidFill>
-            <a:prstDash val="solid"/>
-          </a:ln>
-        </p:spPr>
-      </p:sp>
-      <p:sp>
-        <p:nvSpPr>
-          <p:cNvPr id="33" name="Text 31"/>
-          <p:cNvSpPr/>
-          <p:nvPr/>
-        </p:nvSpPr>
-        <p:spPr>
-          <a:xfrm>
-            <a:off x="2560320" y="2688336"/>
-            <a:ext cx="1920240" cy="347472"/>
-          </a:xfrm>
-          <a:prstGeom prst="rect">
-            <a:avLst/>
-          </a:prstGeom>
-          <a:noFill/>
-          <a:ln/>
-        </p:spPr>
-        <p:txBody>
-          <a:bodyPr wrap="square" lIns="0" tIns="0" rIns="0" bIns="0" rtlCol="0" anchor="ctr"/>
-          <a:lstStyle/>
-          <a:p>
-            <a:pPr algn="ctr" indent="0" marL="0">
-              <a:buNone/>
-            </a:pPr>
-            <a:r>
-              <a:rPr lang="en-US" sz="1000" dirty="0">
-                <a:solidFill>
-                  <a:srgbClr val="1A1A2E"/>
-                </a:solidFill>
-              </a:rPr>
-              <a:t>9.57%</a:t>
-            </a:r>
-            <a:endParaRPr lang="en-US" sz="1000" dirty="0"/>
-          </a:p>
-        </p:txBody>
-      </p:sp>
-      <p:sp>
-        <p:nvSpPr>
-          <p:cNvPr id="34" name="Shape 32"/>
-          <p:cNvSpPr/>
-          <p:nvPr/>
-        </p:nvSpPr>
-        <p:spPr>
-          <a:xfrm>
-            <a:off x="4572000" y="2688336"/>
-            <a:ext cx="1920240" cy="347472"/>
-          </a:xfrm>
-          <a:prstGeom prst="rect">
-            <a:avLst/>
-          </a:prstGeom>
-          <a:solidFill>
-            <a:srgbClr val="F1EFE8"/>
-          </a:solidFill>
-          <a:ln w="6350">
-            <a:solidFill>
-              <a:srgbClr val="E8E5DE"/>
-            </a:solidFill>
-            <a:prstDash val="solid"/>
-          </a:ln>
-        </p:spPr>
-      </p:sp>
-      <p:sp>
-        <p:nvSpPr>
-          <p:cNvPr id="35" name="Text 33"/>
-          <p:cNvSpPr/>
-          <p:nvPr/>
-        </p:nvSpPr>
-        <p:spPr>
-          <a:xfrm>
-            <a:off x="4572000" y="2688336"/>
-            <a:ext cx="1920240" cy="347472"/>
-          </a:xfrm>
-          <a:prstGeom prst="rect">
-            <a:avLst/>
-          </a:prstGeom>
-          <a:noFill/>
-          <a:ln/>
-        </p:spPr>
-        <p:txBody>
-          <a:bodyPr wrap="square" lIns="0" tIns="0" rIns="0" bIns="0" rtlCol="0" anchor="ctr"/>
-          <a:lstStyle/>
-          <a:p>
-            <a:pPr algn="ctr" indent="0" marL="0">
-              <a:buNone/>
-            </a:pPr>
-            <a:r>
-              <a:rPr lang="en-US" sz="1000" dirty="0">
-                <a:solidFill>
-                  <a:srgbClr val="9A0718"/>
-                </a:solidFill>
-              </a:rPr>
-              <a:t>18.04%</a:t>
-            </a:r>
-            <a:endParaRPr lang="en-US" sz="1000" dirty="0"/>
-          </a:p>
-        </p:txBody>
-      </p:sp>
-      <p:sp>
-        <p:nvSpPr>
-          <p:cNvPr id="36" name="Shape 34"/>
-          <p:cNvSpPr/>
-          <p:nvPr/>
-        </p:nvSpPr>
-        <p:spPr>
-          <a:xfrm>
-            <a:off x="6583680" y="2688336"/>
-            <a:ext cx="1097280" cy="347472"/>
-          </a:xfrm>
-          <a:prstGeom prst="rect">
-            <a:avLst/>
-          </a:prstGeom>
-          <a:solidFill>
-            <a:srgbClr val="F1EFE8"/>
-          </a:solidFill>
-          <a:ln w="6350">
-            <a:solidFill>
-              <a:srgbClr val="E8E5DE"/>
-            </a:solidFill>
-            <a:prstDash val="solid"/>
-          </a:ln>
-        </p:spPr>
-      </p:sp>
-      <p:sp>
-        <p:nvSpPr>
-          <p:cNvPr id="37" name="Text 35"/>
-          <p:cNvSpPr/>
-          <p:nvPr/>
-        </p:nvSpPr>
-        <p:spPr>
-          <a:xfrm>
-            <a:off x="6583680" y="2688336"/>
-            <a:ext cx="1097280" cy="347472"/>
-          </a:xfrm>
-          <a:prstGeom prst="rect">
-            <a:avLst/>
-          </a:prstGeom>
-          <a:noFill/>
-          <a:ln/>
-        </p:spPr>
-        <p:txBody>
-          <a:bodyPr wrap="square" lIns="0" tIns="0" rIns="0" bIns="0" rtlCol="0" anchor="ctr"/>
-          <a:lstStyle/>
-          <a:p>
-            <a:pPr algn="ctr" indent="0" marL="0">
-              <a:buNone/>
-            </a:pPr>
-            <a:r>
-              <a:rPr lang="en-US" sz="1000" dirty="0">
-                <a:solidFill>
-                  <a:srgbClr val="A32D2D"/>
-                </a:solidFill>
-              </a:rPr>
-              <a:t>+8.47%</a:t>
-            </a:r>
-            <a:endParaRPr lang="en-US" sz="1000" dirty="0"/>
-          </a:p>
-        </p:txBody>
-      </p:sp>
-      <p:sp>
-        <p:nvSpPr>
-          <p:cNvPr id="38" name="Shape 36"/>
-          <p:cNvSpPr/>
-          <p:nvPr/>
-        </p:nvSpPr>
-        <p:spPr>
-          <a:xfrm>
-            <a:off x="7772400" y="2688336"/>
-            <a:ext cx="1097280" cy="347472"/>
-          </a:xfrm>
-          <a:prstGeom prst="rect">
-            <a:avLst/>
-          </a:prstGeom>
-          <a:solidFill>
-            <a:srgbClr val="F1EFE8"/>
-          </a:solidFill>
-          <a:ln w="6350">
-            <a:solidFill>
-              <a:srgbClr val="E8E5DE"/>
-            </a:solidFill>
-            <a:prstDash val="solid"/>
-          </a:ln>
-        </p:spPr>
-      </p:sp>
-      <p:sp>
-        <p:nvSpPr>
-          <p:cNvPr id="39" name="Text 37"/>
-          <p:cNvSpPr/>
-          <p:nvPr/>
-        </p:nvSpPr>
-        <p:spPr>
-          <a:xfrm>
-            <a:off x="7772400" y="2688336"/>
-            <a:ext cx="1097280" cy="347472"/>
-          </a:xfrm>
-          <a:prstGeom prst="rect">
-            <a:avLst/>
-          </a:prstGeom>
-          <a:noFill/>
-          <a:ln/>
-        </p:spPr>
-        <p:txBody>
-          <a:bodyPr wrap="square" lIns="0" tIns="0" rIns="0" bIns="0" rtlCol="0" anchor="ctr"/>
-          <a:lstStyle/>
-          <a:p>
-            <a:pPr algn="ctr" indent="0" marL="0">
-              <a:buNone/>
-            </a:pPr>
-            <a:r>
-              <a:rPr lang="en-US" sz="1000" dirty="0">
-                <a:solidFill>
-                  <a:srgbClr val="A32D2D"/>
-                </a:solidFill>
-              </a:rPr>
-              <a:t>❌ Test worse</a:t>
-            </a:r>
-            <a:endParaRPr lang="en-US" sz="1000" dirty="0"/>
-          </a:p>
-        </p:txBody>
-      </p:sp>
-      <p:sp>
-        <p:nvSpPr>
-          <p:cNvPr id="40" name="Shape 38"/>
-          <p:cNvSpPr/>
-          <p:nvPr/>
-        </p:nvSpPr>
-        <p:spPr>
-          <a:xfrm>
-            <a:off x="365760" y="3072384"/>
-            <a:ext cx="2103120" cy="347472"/>
-          </a:xfrm>
-          <a:prstGeom prst="rect">
-            <a:avLst/>
-          </a:prstGeom>
-          <a:solidFill>
-            <a:srgbClr val="FFFFFF"/>
-          </a:solidFill>
-          <a:ln w="6350">
-            <a:solidFill>
-              <a:srgbClr val="E8E5DE"/>
-            </a:solidFill>
-            <a:prstDash val="solid"/>
-          </a:ln>
-        </p:spPr>
-      </p:sp>
-      <p:sp>
-        <p:nvSpPr>
-          <p:cNvPr id="41" name="Text 39"/>
-          <p:cNvSpPr/>
-          <p:nvPr/>
-        </p:nvSpPr>
-        <p:spPr>
-          <a:xfrm>
-            <a:off x="365760" y="3072384"/>
-            <a:ext cx="2103120" cy="347472"/>
-          </a:xfrm>
-          <a:prstGeom prst="rect">
-            <a:avLst/>
-          </a:prstGeom>
-          <a:noFill/>
-          <a:ln/>
-        </p:spPr>
-        <p:txBody>
-          <a:bodyPr wrap="square" lIns="0" tIns="0" rIns="0" bIns="0" rtlCol="0" anchor="ctr"/>
-          <a:lstStyle/>
-          <a:p>
-            <a:pPr algn="ctr" indent="0" marL="0">
-              <a:buNone/>
-            </a:pPr>
-            <a:r>
-              <a:rPr lang="en-US" sz="1000" b="1" dirty="0">
-                <a:solidFill>
-                  <a:srgbClr val="1A1A2E"/>
-                </a:solidFill>
-              </a:rPr>
-              <a:t>Step 2</a:t>
-            </a:r>
-            <a:endParaRPr lang="en-US" sz="1000" dirty="0"/>
-          </a:p>
-        </p:txBody>
-      </p:sp>
-      <p:sp>
-        <p:nvSpPr>
-          <p:cNvPr id="42" name="Shape 40"/>
-          <p:cNvSpPr/>
-          <p:nvPr/>
-        </p:nvSpPr>
-        <p:spPr>
-          <a:xfrm>
-            <a:off x="2560320" y="3072384"/>
-            <a:ext cx="1920240" cy="347472"/>
-          </a:xfrm>
-          <a:prstGeom prst="rect">
-            <a:avLst/>
-          </a:prstGeom>
-          <a:solidFill>
-            <a:srgbClr val="FFFFFF"/>
-          </a:solidFill>
-          <a:ln w="6350">
-            <a:solidFill>
-              <a:srgbClr val="E8E5DE"/>
-            </a:solidFill>
-            <a:prstDash val="solid"/>
-          </a:ln>
-        </p:spPr>
-      </p:sp>
-      <p:sp>
-        <p:nvSpPr>
-          <p:cNvPr id="43" name="Text 41"/>
-          <p:cNvSpPr/>
-          <p:nvPr/>
-        </p:nvSpPr>
-        <p:spPr>
-          <a:xfrm>
-            <a:off x="2560320" y="3072384"/>
-            <a:ext cx="1920240" cy="347472"/>
-          </a:xfrm>
-          <a:prstGeom prst="rect">
-            <a:avLst/>
-          </a:prstGeom>
-          <a:noFill/>
-          <a:ln/>
-        </p:spPr>
-        <p:txBody>
-          <a:bodyPr wrap="square" lIns="0" tIns="0" rIns="0" bIns="0" rtlCol="0" anchor="ctr"/>
-          <a:lstStyle/>
-          <a:p>
-            <a:pPr algn="ctr" indent="0" marL="0">
-              <a:buNone/>
-            </a:pPr>
-            <a:r>
-              <a:rPr lang="en-US" sz="1000" dirty="0">
-                <a:solidFill>
-                  <a:srgbClr val="1A1A2E"/>
-                </a:solidFill>
-              </a:rPr>
-              <a:t>8.91%</a:t>
-            </a:r>
-            <a:endParaRPr lang="en-US" sz="1000" dirty="0"/>
-          </a:p>
-        </p:txBody>
-      </p:sp>
-      <p:sp>
-        <p:nvSpPr>
-          <p:cNvPr id="44" name="Shape 42"/>
-          <p:cNvSpPr/>
-          <p:nvPr/>
-        </p:nvSpPr>
-        <p:spPr>
-          <a:xfrm>
-            <a:off x="4572000" y="3072384"/>
-            <a:ext cx="1920240" cy="347472"/>
-          </a:xfrm>
-          <a:prstGeom prst="rect">
-            <a:avLst/>
-          </a:prstGeom>
-          <a:solidFill>
-            <a:srgbClr val="FFFFFF"/>
-          </a:solidFill>
-          <a:ln w="6350">
-            <a:solidFill>
-              <a:srgbClr val="E8E5DE"/>
-            </a:solidFill>
-            <a:prstDash val="solid"/>
-          </a:ln>
-        </p:spPr>
-      </p:sp>
-      <p:sp>
-        <p:nvSpPr>
-          <p:cNvPr id="45" name="Text 43"/>
-          <p:cNvSpPr/>
-          <p:nvPr/>
-        </p:nvSpPr>
-        <p:spPr>
-          <a:xfrm>
-            <a:off x="4572000" y="3072384"/>
-            <a:ext cx="1920240" cy="347472"/>
-          </a:xfrm>
-          <a:prstGeom prst="rect">
-            <a:avLst/>
-          </a:prstGeom>
-          <a:noFill/>
-          <a:ln/>
-        </p:spPr>
-        <p:txBody>
-          <a:bodyPr wrap="square" lIns="0" tIns="0" rIns="0" bIns="0" rtlCol="0" anchor="ctr"/>
-          <a:lstStyle/>
-          <a:p>
-            <a:pPr algn="ctr" indent="0" marL="0">
-              <a:buNone/>
-            </a:pPr>
-            <a:r>
-              <a:rPr lang="en-US" sz="1000" dirty="0">
-                <a:solidFill>
-                  <a:srgbClr val="9A0718"/>
-                </a:solidFill>
-              </a:rPr>
-              <a:t>16.17%</a:t>
-            </a:r>
-            <a:endParaRPr lang="en-US" sz="1000" dirty="0"/>
-          </a:p>
-        </p:txBody>
-      </p:sp>
-      <p:sp>
-        <p:nvSpPr>
-          <p:cNvPr id="46" name="Shape 44"/>
-          <p:cNvSpPr/>
-          <p:nvPr/>
-        </p:nvSpPr>
-        <p:spPr>
-          <a:xfrm>
-            <a:off x="6583680" y="3072384"/>
-            <a:ext cx="1097280" cy="347472"/>
-          </a:xfrm>
-          <a:prstGeom prst="rect">
-            <a:avLst/>
-          </a:prstGeom>
-          <a:solidFill>
-            <a:srgbClr val="FFFFFF"/>
-          </a:solidFill>
-          <a:ln w="6350">
-            <a:solidFill>
-              <a:srgbClr val="E8E5DE"/>
-            </a:solidFill>
-            <a:prstDash val="solid"/>
-          </a:ln>
-        </p:spPr>
-      </p:sp>
-      <p:sp>
-        <p:nvSpPr>
-          <p:cNvPr id="47" name="Text 45"/>
-          <p:cNvSpPr/>
-          <p:nvPr/>
-        </p:nvSpPr>
-        <p:spPr>
-          <a:xfrm>
-            <a:off x="6583680" y="3072384"/>
-            <a:ext cx="1097280" cy="347472"/>
-          </a:xfrm>
-          <a:prstGeom prst="rect">
-            <a:avLst/>
-          </a:prstGeom>
-          <a:noFill/>
-          <a:ln/>
-        </p:spPr>
-        <p:txBody>
-          <a:bodyPr wrap="square" lIns="0" tIns="0" rIns="0" bIns="0" rtlCol="0" anchor="ctr"/>
-          <a:lstStyle/>
-          <a:p>
-            <a:pPr algn="ctr" indent="0" marL="0">
-              <a:buNone/>
-            </a:pPr>
-            <a:r>
-              <a:rPr lang="en-US" sz="1000" dirty="0">
-                <a:solidFill>
-                  <a:srgbClr val="A32D2D"/>
-                </a:solidFill>
-              </a:rPr>
-              <a:t>+7.26%</a:t>
-            </a:r>
-            <a:endParaRPr lang="en-US" sz="1000" dirty="0"/>
-          </a:p>
-        </p:txBody>
-      </p:sp>
-      <p:sp>
-        <p:nvSpPr>
-          <p:cNvPr id="48" name="Shape 46"/>
-          <p:cNvSpPr/>
-          <p:nvPr/>
-        </p:nvSpPr>
-        <p:spPr>
-          <a:xfrm>
-            <a:off x="7772400" y="3072384"/>
-            <a:ext cx="1097280" cy="347472"/>
-          </a:xfrm>
-          <a:prstGeom prst="rect">
-            <a:avLst/>
-          </a:prstGeom>
-          <a:solidFill>
-            <a:srgbClr val="FFFFFF"/>
-          </a:solidFill>
-          <a:ln w="6350">
-            <a:solidFill>
-              <a:srgbClr val="E8E5DE"/>
-            </a:solidFill>
-            <a:prstDash val="solid"/>
-          </a:ln>
-        </p:spPr>
-      </p:sp>
-      <p:sp>
-        <p:nvSpPr>
-          <p:cNvPr id="49" name="Text 47"/>
-          <p:cNvSpPr/>
-          <p:nvPr/>
-        </p:nvSpPr>
-        <p:spPr>
-          <a:xfrm>
-            <a:off x="7772400" y="3072384"/>
-            <a:ext cx="1097280" cy="347472"/>
-          </a:xfrm>
-          <a:prstGeom prst="rect">
-            <a:avLst/>
-          </a:prstGeom>
-          <a:noFill/>
-          <a:ln/>
-        </p:spPr>
-        <p:txBody>
-          <a:bodyPr wrap="square" lIns="0" tIns="0" rIns="0" bIns="0" rtlCol="0" anchor="ctr"/>
-          <a:lstStyle/>
-          <a:p>
-            <a:pPr algn="ctr" indent="0" marL="0">
-              <a:buNone/>
-            </a:pPr>
-            <a:r>
-              <a:rPr lang="en-US" sz="1000" dirty="0">
-                <a:solidFill>
-                  <a:srgbClr val="A32D2D"/>
-                </a:solidFill>
-              </a:rPr>
-              <a:t>❌ Test worse</a:t>
-            </a:r>
-            <a:endParaRPr lang="en-US" sz="1000" dirty="0"/>
-          </a:p>
-        </p:txBody>
-      </p:sp>
-      <p:sp>
-        <p:nvSpPr>
-          <p:cNvPr id="50" name="Shape 48"/>
-          <p:cNvSpPr/>
-          <p:nvPr/>
-        </p:nvSpPr>
-        <p:spPr>
-          <a:xfrm>
-            <a:off x="365760" y="3456432"/>
-            <a:ext cx="2103120" cy="347472"/>
-          </a:xfrm>
-          <a:prstGeom prst="rect">
-            <a:avLst/>
-          </a:prstGeom>
-          <a:solidFill>
-            <a:srgbClr val="F1EFE8"/>
-          </a:solidFill>
-          <a:ln w="6350">
-            <a:solidFill>
-              <a:srgbClr val="E8E5DE"/>
-            </a:solidFill>
-            <a:prstDash val="solid"/>
-          </a:ln>
-        </p:spPr>
-      </p:sp>
-      <p:sp>
-        <p:nvSpPr>
-          <p:cNvPr id="51" name="Text 49"/>
-          <p:cNvSpPr/>
-          <p:nvPr/>
-        </p:nvSpPr>
-        <p:spPr>
-          <a:xfrm>
-            <a:off x="365760" y="3456432"/>
-            <a:ext cx="2103120" cy="347472"/>
-          </a:xfrm>
-          <a:prstGeom prst="rect">
-            <a:avLst/>
-          </a:prstGeom>
-          <a:noFill/>
-          <a:ln/>
-        </p:spPr>
-        <p:txBody>
-          <a:bodyPr wrap="square" lIns="0" tIns="0" rIns="0" bIns="0" rtlCol="0" anchor="ctr"/>
-          <a:lstStyle/>
-          <a:p>
-            <a:pPr algn="ctr" indent="0" marL="0">
-              <a:buNone/>
-            </a:pPr>
-            <a:r>
-              <a:rPr lang="en-US" sz="1000" b="1" dirty="0">
-                <a:solidFill>
-                  <a:srgbClr val="1A1A2E"/>
-                </a:solidFill>
-              </a:rPr>
-              <a:t>Step 3</a:t>
-            </a:r>
-            <a:endParaRPr lang="en-US" sz="1000" dirty="0"/>
-          </a:p>
-        </p:txBody>
-      </p:sp>
-      <p:sp>
-        <p:nvSpPr>
-          <p:cNvPr id="52" name="Shape 50"/>
-          <p:cNvSpPr/>
-          <p:nvPr/>
-        </p:nvSpPr>
-        <p:spPr>
-          <a:xfrm>
-            <a:off x="2560320" y="3456432"/>
-            <a:ext cx="1920240" cy="347472"/>
-          </a:xfrm>
-          <a:prstGeom prst="rect">
-            <a:avLst/>
-          </a:prstGeom>
-          <a:solidFill>
-            <a:srgbClr val="F1EFE8"/>
-          </a:solidFill>
-          <a:ln w="6350">
-            <a:solidFill>
-              <a:srgbClr val="E8E5DE"/>
-            </a:solidFill>
-            <a:prstDash val="solid"/>
-          </a:ln>
-        </p:spPr>
-      </p:sp>
-      <p:sp>
-        <p:nvSpPr>
-          <p:cNvPr id="53" name="Text 51"/>
-          <p:cNvSpPr/>
-          <p:nvPr/>
-        </p:nvSpPr>
-        <p:spPr>
-          <a:xfrm>
-            <a:off x="2560320" y="3456432"/>
-            <a:ext cx="1920240" cy="347472"/>
-          </a:xfrm>
-          <a:prstGeom prst="rect">
-            <a:avLst/>
-          </a:prstGeom>
-          <a:noFill/>
-          <a:ln/>
-        </p:spPr>
-        <p:txBody>
-          <a:bodyPr wrap="square" lIns="0" tIns="0" rIns="0" bIns="0" rtlCol="0" anchor="ctr"/>
-          <a:lstStyle/>
-          <a:p>
-            <a:pPr algn="ctr" indent="0" marL="0">
-              <a:buNone/>
-            </a:pPr>
-            <a:r>
-              <a:rPr lang="en-US" sz="1000" dirty="0">
-                <a:solidFill>
-                  <a:srgbClr val="1A1A2E"/>
-                </a:solidFill>
-              </a:rPr>
-              <a:t>20.94%</a:t>
-            </a:r>
-            <a:endParaRPr lang="en-US" sz="1000" dirty="0"/>
-          </a:p>
-        </p:txBody>
-      </p:sp>
-      <p:sp>
-        <p:nvSpPr>
-          <p:cNvPr id="54" name="Shape 52"/>
-          <p:cNvSpPr/>
-          <p:nvPr/>
-        </p:nvSpPr>
-        <p:spPr>
-          <a:xfrm>
-            <a:off x="4572000" y="3456432"/>
-            <a:ext cx="1920240" cy="347472"/>
-          </a:xfrm>
-          <a:prstGeom prst="rect">
-            <a:avLst/>
-          </a:prstGeom>
-          <a:solidFill>
-            <a:srgbClr val="F1EFE8"/>
-          </a:solidFill>
-          <a:ln w="6350">
-            <a:solidFill>
-              <a:srgbClr val="E8E5DE"/>
-            </a:solidFill>
-            <a:prstDash val="solid"/>
-          </a:ln>
-        </p:spPr>
-      </p:sp>
-      <p:sp>
-        <p:nvSpPr>
-          <p:cNvPr id="55" name="Text 53"/>
-          <p:cNvSpPr/>
-          <p:nvPr/>
-        </p:nvSpPr>
-        <p:spPr>
-          <a:xfrm>
-            <a:off x="4572000" y="3456432"/>
-            <a:ext cx="1920240" cy="347472"/>
-          </a:xfrm>
-          <a:prstGeom prst="rect">
-            <a:avLst/>
-          </a:prstGeom>
-          <a:noFill/>
-          <a:ln/>
-        </p:spPr>
-        <p:txBody>
-          <a:bodyPr wrap="square" lIns="0" tIns="0" rIns="0" bIns="0" rtlCol="0" anchor="ctr"/>
-          <a:lstStyle/>
-          <a:p>
-            <a:pPr algn="ctr" indent="0" marL="0">
-              <a:buNone/>
-            </a:pPr>
-            <a:r>
-              <a:rPr lang="en-US" sz="1000" dirty="0">
-                <a:solidFill>
-                  <a:srgbClr val="9A0718"/>
-                </a:solidFill>
-              </a:rPr>
-              <a:t>19.78%</a:t>
-            </a:r>
-            <a:endParaRPr lang="en-US" sz="1000" dirty="0"/>
-          </a:p>
-        </p:txBody>
-      </p:sp>
-      <p:sp>
-        <p:nvSpPr>
-          <p:cNvPr id="56" name="Shape 54"/>
-          <p:cNvSpPr/>
-          <p:nvPr/>
-        </p:nvSpPr>
-        <p:spPr>
-          <a:xfrm>
-            <a:off x="6583680" y="3456432"/>
-            <a:ext cx="1097280" cy="347472"/>
-          </a:xfrm>
-          <a:prstGeom prst="rect">
-            <a:avLst/>
-          </a:prstGeom>
-          <a:solidFill>
-            <a:srgbClr val="F1EFE8"/>
-          </a:solidFill>
-          <a:ln w="6350">
-            <a:solidFill>
-              <a:srgbClr val="E8E5DE"/>
-            </a:solidFill>
-            <a:prstDash val="solid"/>
-          </a:ln>
-        </p:spPr>
-      </p:sp>
-      <p:sp>
-        <p:nvSpPr>
-          <p:cNvPr id="57" name="Text 55"/>
-          <p:cNvSpPr/>
-          <p:nvPr/>
-        </p:nvSpPr>
-        <p:spPr>
-          <a:xfrm>
-            <a:off x="6583680" y="3456432"/>
-            <a:ext cx="1097280" cy="347472"/>
-          </a:xfrm>
-          <a:prstGeom prst="rect">
-            <a:avLst/>
-          </a:prstGeom>
-          <a:noFill/>
-          <a:ln/>
-        </p:spPr>
-        <p:txBody>
-          <a:bodyPr wrap="square" lIns="0" tIns="0" rIns="0" bIns="0" rtlCol="0" anchor="ctr"/>
-          <a:lstStyle/>
-          <a:p>
-            <a:pPr algn="ctr" indent="0" marL="0">
-              <a:buNone/>
-            </a:pPr>
-            <a:r>
-              <a:rPr lang="en-US" sz="1000" dirty="0">
-                <a:solidFill>
-                  <a:srgbClr val="3B6D11"/>
-                </a:solidFill>
-              </a:rPr>
-              <a:t>-1.16%</a:t>
-            </a:r>
-            <a:endParaRPr lang="en-US" sz="1000" dirty="0"/>
-          </a:p>
-        </p:txBody>
-      </p:sp>
-      <p:sp>
-        <p:nvSpPr>
-          <p:cNvPr id="58" name="Shape 56"/>
-          <p:cNvSpPr/>
-          <p:nvPr/>
-        </p:nvSpPr>
-        <p:spPr>
-          <a:xfrm>
-            <a:off x="7772400" y="3456432"/>
-            <a:ext cx="1097280" cy="347472"/>
-          </a:xfrm>
-          <a:prstGeom prst="rect">
-            <a:avLst/>
-          </a:prstGeom>
-          <a:solidFill>
-            <a:srgbClr val="F1EFE8"/>
-          </a:solidFill>
-          <a:ln w="6350">
-            <a:solidFill>
-              <a:srgbClr val="E8E5DE"/>
-            </a:solidFill>
-            <a:prstDash val="solid"/>
-          </a:ln>
-        </p:spPr>
-      </p:sp>
-      <p:sp>
-        <p:nvSpPr>
-          <p:cNvPr id="59" name="Text 57"/>
-          <p:cNvSpPr/>
-          <p:nvPr/>
-        </p:nvSpPr>
-        <p:spPr>
-          <a:xfrm>
-            <a:off x="7772400" y="3456432"/>
-            <a:ext cx="1097280" cy="347472"/>
-          </a:xfrm>
-          <a:prstGeom prst="rect">
-            <a:avLst/>
-          </a:prstGeom>
-          <a:noFill/>
-          <a:ln/>
-        </p:spPr>
-        <p:txBody>
-          <a:bodyPr wrap="square" lIns="0" tIns="0" rIns="0" bIns="0" rtlCol="0" anchor="ctr"/>
-          <a:lstStyle/>
-          <a:p>
-            <a:pPr algn="ctr" indent="0" marL="0">
-              <a:buNone/>
-            </a:pPr>
-            <a:r>
-              <a:rPr lang="en-US" sz="1000" dirty="0">
-                <a:solidFill>
-                  <a:srgbClr val="3B6D11"/>
-                </a:solidFill>
-              </a:rPr>
-              <a:t>✅ Test better</a:t>
-            </a:r>
-            <a:endParaRPr lang="en-US" sz="1000" dirty="0"/>
-          </a:p>
-        </p:txBody>
-      </p:sp>
-      <p:sp>
-        <p:nvSpPr>
-          <p:cNvPr id="60" name="Shape 58"/>
-          <p:cNvSpPr/>
-          <p:nvPr/>
-        </p:nvSpPr>
-        <p:spPr>
-          <a:xfrm>
-            <a:off x="365760" y="3840480"/>
-            <a:ext cx="2103120" cy="347472"/>
-          </a:xfrm>
-          <a:prstGeom prst="rect">
-            <a:avLst/>
-          </a:prstGeom>
-          <a:solidFill>
-            <a:srgbClr val="FFFFFF"/>
-          </a:solidFill>
-          <a:ln w="6350">
-            <a:solidFill>
-              <a:srgbClr val="E8E5DE"/>
-            </a:solidFill>
-            <a:prstDash val="solid"/>
-          </a:ln>
-        </p:spPr>
-      </p:sp>
-      <p:sp>
-        <p:nvSpPr>
-          <p:cNvPr id="61" name="Text 59"/>
-          <p:cNvSpPr/>
-          <p:nvPr/>
-        </p:nvSpPr>
-        <p:spPr>
-          <a:xfrm>
-            <a:off x="365760" y="3840480"/>
-            <a:ext cx="2103120" cy="347472"/>
-          </a:xfrm>
-          <a:prstGeom prst="rect">
-            <a:avLst/>
-          </a:prstGeom>
-          <a:noFill/>
-          <a:ln/>
-        </p:spPr>
-        <p:txBody>
-          <a:bodyPr wrap="square" lIns="0" tIns="0" rIns="0" bIns="0" rtlCol="0" anchor="ctr"/>
-          <a:lstStyle/>
-          <a:p>
-            <a:pPr algn="ctr" indent="0" marL="0">
-              <a:buNone/>
-            </a:pPr>
-            <a:r>
-              <a:rPr lang="en-US" sz="1000" b="1" dirty="0">
-                <a:solidFill>
-                  <a:srgbClr val="1A1A2E"/>
-                </a:solidFill>
-              </a:rPr>
-              <a:t>Confirm</a:t>
-            </a:r>
-            <a:endParaRPr lang="en-US" sz="1000" dirty="0"/>
-          </a:p>
-        </p:txBody>
-      </p:sp>
-      <p:sp>
-        <p:nvSpPr>
-          <p:cNvPr id="62" name="Shape 60"/>
-          <p:cNvSpPr/>
-          <p:nvPr/>
-        </p:nvSpPr>
-        <p:spPr>
-          <a:xfrm>
-            <a:off x="2560320" y="3840480"/>
-            <a:ext cx="1920240" cy="347472"/>
-          </a:xfrm>
-          <a:prstGeom prst="rect">
-            <a:avLst/>
-          </a:prstGeom>
-          <a:solidFill>
-            <a:srgbClr val="FFFFFF"/>
-          </a:solidFill>
-          <a:ln w="6350">
-            <a:solidFill>
-              <a:srgbClr val="E8E5DE"/>
-            </a:solidFill>
-            <a:prstDash val="solid"/>
-          </a:ln>
-        </p:spPr>
-      </p:sp>
-      <p:sp>
-        <p:nvSpPr>
-          <p:cNvPr id="63" name="Text 61"/>
-          <p:cNvSpPr/>
-          <p:nvPr/>
-        </p:nvSpPr>
-        <p:spPr>
-          <a:xfrm>
-            <a:off x="2560320" y="3840480"/>
-            <a:ext cx="1920240" cy="347472"/>
-          </a:xfrm>
-          <a:prstGeom prst="rect">
-            <a:avLst/>
-          </a:prstGeom>
-          <a:noFill/>
-          <a:ln/>
-        </p:spPr>
-        <p:txBody>
-          <a:bodyPr wrap="square" lIns="0" tIns="0" rIns="0" bIns="0" rtlCol="0" anchor="ctr"/>
-          <a:lstStyle/>
-          <a:p>
-            <a:pPr algn="ctr" indent="0" marL="0">
-              <a:buNone/>
-            </a:pPr>
-            <a:r>
-              <a:rPr lang="en-US" sz="1000" dirty="0">
-                <a:solidFill>
-                  <a:srgbClr val="1A1A2E"/>
-                </a:solidFill>
-              </a:rPr>
-              <a:t>39.03%</a:t>
-            </a:r>
-            <a:endParaRPr lang="en-US" sz="1000" dirty="0"/>
-          </a:p>
-        </p:txBody>
-      </p:sp>
-      <p:sp>
-        <p:nvSpPr>
-          <p:cNvPr id="64" name="Shape 62"/>
-          <p:cNvSpPr/>
-          <p:nvPr/>
-        </p:nvSpPr>
-        <p:spPr>
-          <a:xfrm>
-            <a:off x="4572000" y="3840480"/>
-            <a:ext cx="1920240" cy="347472"/>
-          </a:xfrm>
-          <a:prstGeom prst="rect">
-            <a:avLst/>
-          </a:prstGeom>
-          <a:solidFill>
-            <a:srgbClr val="FFFFFF"/>
-          </a:solidFill>
-          <a:ln w="6350">
-            <a:solidFill>
-              <a:srgbClr val="E8E5DE"/>
-            </a:solidFill>
-            <a:prstDash val="solid"/>
-          </a:ln>
-        </p:spPr>
-      </p:sp>
-      <p:sp>
-        <p:nvSpPr>
-          <p:cNvPr id="65" name="Text 63"/>
-          <p:cNvSpPr/>
-          <p:nvPr/>
-        </p:nvSpPr>
-        <p:spPr>
-          <a:xfrm>
-            <a:off x="4572000" y="3840480"/>
-            <a:ext cx="1920240" cy="347472"/>
-          </a:xfrm>
-          <a:prstGeom prst="rect">
-            <a:avLst/>
-          </a:prstGeom>
-          <a:noFill/>
-          <a:ln/>
-        </p:spPr>
-        <p:txBody>
-          <a:bodyPr wrap="square" lIns="0" tIns="0" rIns="0" bIns="0" rtlCol="0" anchor="ctr"/>
-          <a:lstStyle/>
-          <a:p>
-            <a:pPr algn="ctr" indent="0" marL="0">
-              <a:buNone/>
-            </a:pPr>
-            <a:r>
-              <a:rPr lang="en-US" sz="1000" dirty="0">
-                <a:solidFill>
-                  <a:srgbClr val="9A0718"/>
-                </a:solidFill>
-              </a:rPr>
-              <a:t>9.61%</a:t>
-            </a:r>
-            <a:endParaRPr lang="en-US" sz="1000" dirty="0"/>
-          </a:p>
-        </p:txBody>
-      </p:sp>
-      <p:sp>
-        <p:nvSpPr>
-          <p:cNvPr id="66" name="Shape 64"/>
-          <p:cNvSpPr/>
-          <p:nvPr/>
-        </p:nvSpPr>
-        <p:spPr>
-          <a:xfrm>
-            <a:off x="6583680" y="3840480"/>
-            <a:ext cx="1097280" cy="347472"/>
-          </a:xfrm>
-          <a:prstGeom prst="rect">
-            <a:avLst/>
-          </a:prstGeom>
-          <a:solidFill>
-            <a:srgbClr val="FFFFFF"/>
-          </a:solidFill>
-          <a:ln w="6350">
-            <a:solidFill>
-              <a:srgbClr val="E8E5DE"/>
-            </a:solidFill>
-            <a:prstDash val="solid"/>
-          </a:ln>
-        </p:spPr>
-      </p:sp>
-      <p:sp>
-        <p:nvSpPr>
-          <p:cNvPr id="67" name="Text 65"/>
-          <p:cNvSpPr/>
-          <p:nvPr/>
-        </p:nvSpPr>
-        <p:spPr>
-          <a:xfrm>
-            <a:off x="6583680" y="3840480"/>
-            <a:ext cx="1097280" cy="347472"/>
-          </a:xfrm>
-          <a:prstGeom prst="rect">
-            <a:avLst/>
-          </a:prstGeom>
-          <a:noFill/>
-          <a:ln/>
-        </p:spPr>
-        <p:txBody>
-          <a:bodyPr wrap="square" lIns="0" tIns="0" rIns="0" bIns="0" rtlCol="0" anchor="ctr"/>
-          <a:lstStyle/>
-          <a:p>
-            <a:pPr algn="ctr" indent="0" marL="0">
-              <a:buNone/>
-            </a:pPr>
-            <a:r>
-              <a:rPr lang="en-US" sz="1000" dirty="0">
-                <a:solidFill>
-                  <a:srgbClr val="3B6D11"/>
-                </a:solidFill>
-              </a:rPr>
-              <a:t>-29.42%</a:t>
-            </a:r>
-            <a:endParaRPr lang="en-US" sz="1000" dirty="0"/>
-          </a:p>
-        </p:txBody>
-      </p:sp>
-      <p:sp>
-        <p:nvSpPr>
-          <p:cNvPr id="68" name="Shape 66"/>
-          <p:cNvSpPr/>
-          <p:nvPr/>
-        </p:nvSpPr>
-        <p:spPr>
-          <a:xfrm>
-            <a:off x="7772400" y="3840480"/>
-            <a:ext cx="1097280" cy="347472"/>
-          </a:xfrm>
-          <a:prstGeom prst="rect">
-            <a:avLst/>
-          </a:prstGeom>
-          <a:solidFill>
-            <a:srgbClr val="FFFFFF"/>
-          </a:solidFill>
-          <a:ln w="6350">
-            <a:solidFill>
-              <a:srgbClr val="E8E5DE"/>
-            </a:solidFill>
-            <a:prstDash val="solid"/>
-          </a:ln>
-        </p:spPr>
-      </p:sp>
-      <p:sp>
-        <p:nvSpPr>
-          <p:cNvPr id="69" name="Text 67"/>
-          <p:cNvSpPr/>
-          <p:nvPr/>
-        </p:nvSpPr>
-        <p:spPr>
-          <a:xfrm>
-            <a:off x="7772400" y="3840480"/>
-            <a:ext cx="1097280" cy="347472"/>
-          </a:xfrm>
-          <a:prstGeom prst="rect">
-            <a:avLst/>
-          </a:prstGeom>
-          <a:noFill/>
-          <a:ln/>
-        </p:spPr>
-        <p:txBody>
-          <a:bodyPr wrap="square" lIns="0" tIns="0" rIns="0" bIns="0" rtlCol="0" anchor="ctr"/>
-          <a:lstStyle/>
-          <a:p>
-            <a:pPr algn="ctr" indent="0" marL="0">
-              <a:buNone/>
-            </a:pPr>
-            <a:r>
-              <a:rPr lang="en-US" sz="1000" dirty="0">
-                <a:solidFill>
-                  <a:srgbClr val="3B6D11"/>
-                </a:solidFill>
-              </a:rPr>
-              <a:t>✅ Test better</a:t>
             </a:r>
             <a:endParaRPr lang="en-US" sz="1000" dirty="0"/>
           </a:p>
@@ -12480,7 +10673,7 @@
           <a:bodyPr wrap="square" lIns="0" tIns="0" rIns="0" bIns="0" rtlCol="0" anchor="ctr"/>
           <a:lstStyle/>
           <a:p>
-            <a:pPr indent="0" marL="0">
+            <a:pPr marL="0" indent="0">
               <a:buNone/>
             </a:pPr>
             <a:r>
@@ -12490,6 +10683,2196 @@
                 </a:solidFill>
               </a:rPr>
               <a:t>Interesting finding: test group had higher error rates at Steps 1–2, but a dramatically lower rate at Confirm (9.61% vs 39.03%). The new UI did not reduce overall friction.</a:t>
+            </a:r>
+            <a:endParaRPr lang="en-US" sz="1000" dirty="0"/>
+          </a:p>
+        </p:txBody>
+      </p:sp>
+      <p:sp>
+        <p:nvSpPr>
+          <p:cNvPr id="243" name="Shape 8">
+            <a:extLst>
+              <a:ext uri="{FF2B5EF4-FFF2-40B4-BE49-F238E27FC236}">
+                <a16:creationId xmlns:a16="http://schemas.microsoft.com/office/drawing/2014/main" id="{0B2F84EC-B3B5-3196-8B19-8A61174CBB10}"/>
+              </a:ext>
+            </a:extLst>
+          </p:cNvPr>
+          <p:cNvSpPr/>
+          <p:nvPr/>
+        </p:nvSpPr>
+        <p:spPr>
+          <a:xfrm>
+            <a:off x="365760" y="1920240"/>
+            <a:ext cx="2084832" cy="347472"/>
+          </a:xfrm>
+          <a:prstGeom prst="rect">
+            <a:avLst/>
+          </a:prstGeom>
+          <a:solidFill>
+            <a:srgbClr val="1A1A2E"/>
+          </a:solidFill>
+          <a:ln w="12700">
+            <a:solidFill>
+              <a:srgbClr val="1A1A2E"/>
+            </a:solidFill>
+            <a:prstDash val="solid"/>
+          </a:ln>
+        </p:spPr>
+      </p:sp>
+      <p:sp>
+        <p:nvSpPr>
+          <p:cNvPr id="244" name="Text 9">
+            <a:extLst>
+              <a:ext uri="{FF2B5EF4-FFF2-40B4-BE49-F238E27FC236}">
+                <a16:creationId xmlns:a16="http://schemas.microsoft.com/office/drawing/2014/main" id="{E6793B76-63C6-EAF6-BC7B-2767F16F9E33}"/>
+              </a:ext>
+            </a:extLst>
+          </p:cNvPr>
+          <p:cNvSpPr/>
+          <p:nvPr/>
+        </p:nvSpPr>
+        <p:spPr>
+          <a:xfrm>
+            <a:off x="365760" y="1920240"/>
+            <a:ext cx="2084832" cy="347472"/>
+          </a:xfrm>
+          <a:prstGeom prst="rect">
+            <a:avLst/>
+          </a:prstGeom>
+          <a:noFill/>
+          <a:ln/>
+        </p:spPr>
+        <p:txBody>
+          <a:bodyPr wrap="square" lIns="0" tIns="0" rIns="0" bIns="0" rtlCol="0" anchor="ctr"/>
+          <a:lstStyle/>
+          <a:p>
+            <a:pPr marL="0" indent="0" algn="ctr">
+              <a:buNone/>
+            </a:pPr>
+            <a:r>
+              <a:rPr lang="en-US" sz="1000" b="1" dirty="0">
+                <a:solidFill>
+                  <a:srgbClr val="FFFFFF"/>
+                </a:solidFill>
+              </a:rPr>
+              <a:t>Step</a:t>
+            </a:r>
+            <a:endParaRPr lang="en-US" sz="1000" dirty="0"/>
+          </a:p>
+        </p:txBody>
+      </p:sp>
+      <p:sp>
+        <p:nvSpPr>
+          <p:cNvPr id="245" name="Shape 10">
+            <a:extLst>
+              <a:ext uri="{FF2B5EF4-FFF2-40B4-BE49-F238E27FC236}">
+                <a16:creationId xmlns:a16="http://schemas.microsoft.com/office/drawing/2014/main" id="{8CA4725C-DCD6-F228-8C2B-EEB30E7FFC9D}"/>
+              </a:ext>
+            </a:extLst>
+          </p:cNvPr>
+          <p:cNvSpPr/>
+          <p:nvPr/>
+        </p:nvSpPr>
+        <p:spPr>
+          <a:xfrm>
+            <a:off x="2505456" y="1920240"/>
+            <a:ext cx="1993392" cy="347472"/>
+          </a:xfrm>
+          <a:prstGeom prst="rect">
+            <a:avLst/>
+          </a:prstGeom>
+          <a:solidFill>
+            <a:srgbClr val="1A1A2E"/>
+          </a:solidFill>
+          <a:ln w="12700">
+            <a:solidFill>
+              <a:srgbClr val="1A1A2E"/>
+            </a:solidFill>
+            <a:prstDash val="solid"/>
+          </a:ln>
+        </p:spPr>
+      </p:sp>
+      <p:sp>
+        <p:nvSpPr>
+          <p:cNvPr id="246" name="Text 11">
+            <a:extLst>
+              <a:ext uri="{FF2B5EF4-FFF2-40B4-BE49-F238E27FC236}">
+                <a16:creationId xmlns:a16="http://schemas.microsoft.com/office/drawing/2014/main" id="{962F2F2B-ABF0-8237-B57B-4B3004794E3C}"/>
+              </a:ext>
+            </a:extLst>
+          </p:cNvPr>
+          <p:cNvSpPr/>
+          <p:nvPr/>
+        </p:nvSpPr>
+        <p:spPr>
+          <a:xfrm>
+            <a:off x="2505456" y="1920240"/>
+            <a:ext cx="1993392" cy="347472"/>
+          </a:xfrm>
+          <a:prstGeom prst="rect">
+            <a:avLst/>
+          </a:prstGeom>
+          <a:noFill/>
+          <a:ln/>
+        </p:spPr>
+        <p:txBody>
+          <a:bodyPr wrap="square" lIns="0" tIns="0" rIns="0" bIns="0" rtlCol="0" anchor="ctr"/>
+          <a:lstStyle/>
+          <a:p>
+            <a:pPr marL="0" indent="0" algn="ctr">
+              <a:buNone/>
+            </a:pPr>
+            <a:r>
+              <a:rPr lang="en-US" sz="1000" b="1" dirty="0">
+                <a:solidFill>
+                  <a:srgbClr val="FFFFFF"/>
+                </a:solidFill>
+              </a:rPr>
+              <a:t>Control error %</a:t>
+            </a:r>
+            <a:endParaRPr lang="en-US" sz="1000" dirty="0"/>
+          </a:p>
+        </p:txBody>
+      </p:sp>
+      <p:sp>
+        <p:nvSpPr>
+          <p:cNvPr id="247" name="Shape 12">
+            <a:extLst>
+              <a:ext uri="{FF2B5EF4-FFF2-40B4-BE49-F238E27FC236}">
+                <a16:creationId xmlns:a16="http://schemas.microsoft.com/office/drawing/2014/main" id="{2FF66299-DB3A-4F2A-18B7-E684DFC023DF}"/>
+              </a:ext>
+            </a:extLst>
+          </p:cNvPr>
+          <p:cNvSpPr/>
+          <p:nvPr/>
+        </p:nvSpPr>
+        <p:spPr>
+          <a:xfrm>
+            <a:off x="4553712" y="1920240"/>
+            <a:ext cx="1901952" cy="347472"/>
+          </a:xfrm>
+          <a:prstGeom prst="rect">
+            <a:avLst/>
+          </a:prstGeom>
+          <a:solidFill>
+            <a:srgbClr val="9A0718"/>
+          </a:solidFill>
+          <a:ln w="12700">
+            <a:solidFill>
+              <a:srgbClr val="9A0718"/>
+            </a:solidFill>
+            <a:prstDash val="solid"/>
+          </a:ln>
+        </p:spPr>
+      </p:sp>
+      <p:sp>
+        <p:nvSpPr>
+          <p:cNvPr id="248" name="Text 13">
+            <a:extLst>
+              <a:ext uri="{FF2B5EF4-FFF2-40B4-BE49-F238E27FC236}">
+                <a16:creationId xmlns:a16="http://schemas.microsoft.com/office/drawing/2014/main" id="{39D626CA-49D9-C0E4-C022-1E3B963577B4}"/>
+              </a:ext>
+            </a:extLst>
+          </p:cNvPr>
+          <p:cNvSpPr/>
+          <p:nvPr/>
+        </p:nvSpPr>
+        <p:spPr>
+          <a:xfrm>
+            <a:off x="4553712" y="1920240"/>
+            <a:ext cx="1901952" cy="347472"/>
+          </a:xfrm>
+          <a:prstGeom prst="rect">
+            <a:avLst/>
+          </a:prstGeom>
+          <a:noFill/>
+          <a:ln/>
+        </p:spPr>
+        <p:txBody>
+          <a:bodyPr wrap="square" lIns="0" tIns="0" rIns="0" bIns="0" rtlCol="0" anchor="ctr"/>
+          <a:lstStyle/>
+          <a:p>
+            <a:pPr marL="0" indent="0" algn="ctr">
+              <a:buNone/>
+            </a:pPr>
+            <a:r>
+              <a:rPr lang="en-US" sz="1000" b="1" dirty="0">
+                <a:solidFill>
+                  <a:srgbClr val="FFFFFF"/>
+                </a:solidFill>
+              </a:rPr>
+              <a:t>Test error %</a:t>
+            </a:r>
+            <a:endParaRPr lang="en-US" sz="1000" dirty="0"/>
+          </a:p>
+        </p:txBody>
+      </p:sp>
+      <p:sp>
+        <p:nvSpPr>
+          <p:cNvPr id="249" name="Shape 14">
+            <a:extLst>
+              <a:ext uri="{FF2B5EF4-FFF2-40B4-BE49-F238E27FC236}">
+                <a16:creationId xmlns:a16="http://schemas.microsoft.com/office/drawing/2014/main" id="{3217D16E-46C3-1CC6-AC56-C670E49E4134}"/>
+              </a:ext>
+            </a:extLst>
+          </p:cNvPr>
+          <p:cNvSpPr/>
+          <p:nvPr/>
+        </p:nvSpPr>
+        <p:spPr>
+          <a:xfrm>
+            <a:off x="6510528" y="1920240"/>
+            <a:ext cx="1078992" cy="347472"/>
+          </a:xfrm>
+          <a:prstGeom prst="rect">
+            <a:avLst/>
+          </a:prstGeom>
+          <a:solidFill>
+            <a:srgbClr val="888780"/>
+          </a:solidFill>
+          <a:ln w="12700">
+            <a:solidFill>
+              <a:srgbClr val="888780"/>
+            </a:solidFill>
+            <a:prstDash val="solid"/>
+          </a:ln>
+        </p:spPr>
+      </p:sp>
+      <p:sp>
+        <p:nvSpPr>
+          <p:cNvPr id="250" name="Text 15">
+            <a:extLst>
+              <a:ext uri="{FF2B5EF4-FFF2-40B4-BE49-F238E27FC236}">
+                <a16:creationId xmlns:a16="http://schemas.microsoft.com/office/drawing/2014/main" id="{F8E40211-17B7-3F35-7458-0A59136B5C19}"/>
+              </a:ext>
+            </a:extLst>
+          </p:cNvPr>
+          <p:cNvSpPr/>
+          <p:nvPr/>
+        </p:nvSpPr>
+        <p:spPr>
+          <a:xfrm>
+            <a:off x="6510528" y="1920240"/>
+            <a:ext cx="1078992" cy="347472"/>
+          </a:xfrm>
+          <a:prstGeom prst="rect">
+            <a:avLst/>
+          </a:prstGeom>
+          <a:noFill/>
+          <a:ln/>
+        </p:spPr>
+        <p:txBody>
+          <a:bodyPr wrap="square" lIns="0" tIns="0" rIns="0" bIns="0" rtlCol="0" anchor="ctr"/>
+          <a:lstStyle/>
+          <a:p>
+            <a:pPr marL="0" indent="0" algn="ctr">
+              <a:buNone/>
+            </a:pPr>
+            <a:r>
+              <a:rPr lang="en-US" sz="1000" b="1" dirty="0">
+                <a:solidFill>
+                  <a:srgbClr val="FFFFFF"/>
+                </a:solidFill>
+              </a:rPr>
+              <a:t>Diff</a:t>
+            </a:r>
+            <a:endParaRPr lang="en-US" sz="1000" dirty="0"/>
+          </a:p>
+        </p:txBody>
+      </p:sp>
+      <p:sp>
+        <p:nvSpPr>
+          <p:cNvPr id="251" name="Shape 16">
+            <a:extLst>
+              <a:ext uri="{FF2B5EF4-FFF2-40B4-BE49-F238E27FC236}">
+                <a16:creationId xmlns:a16="http://schemas.microsoft.com/office/drawing/2014/main" id="{F2F34D5F-78EE-A1B0-A4F0-247D7652E987}"/>
+              </a:ext>
+            </a:extLst>
+          </p:cNvPr>
+          <p:cNvSpPr/>
+          <p:nvPr/>
+        </p:nvSpPr>
+        <p:spPr>
+          <a:xfrm>
+            <a:off x="7644384" y="1920240"/>
+            <a:ext cx="1133856" cy="347472"/>
+          </a:xfrm>
+          <a:prstGeom prst="rect">
+            <a:avLst/>
+          </a:prstGeom>
+          <a:solidFill>
+            <a:srgbClr val="888780"/>
+          </a:solidFill>
+          <a:ln w="12700">
+            <a:solidFill>
+              <a:srgbClr val="888780"/>
+            </a:solidFill>
+            <a:prstDash val="solid"/>
+          </a:ln>
+        </p:spPr>
+      </p:sp>
+      <p:sp>
+        <p:nvSpPr>
+          <p:cNvPr id="252" name="Text 17">
+            <a:extLst>
+              <a:ext uri="{FF2B5EF4-FFF2-40B4-BE49-F238E27FC236}">
+                <a16:creationId xmlns:a16="http://schemas.microsoft.com/office/drawing/2014/main" id="{35651317-4020-B366-5A0F-BDA83CBD1FB2}"/>
+              </a:ext>
+            </a:extLst>
+          </p:cNvPr>
+          <p:cNvSpPr/>
+          <p:nvPr/>
+        </p:nvSpPr>
+        <p:spPr>
+          <a:xfrm>
+            <a:off x="7644384" y="1920240"/>
+            <a:ext cx="1133856" cy="347472"/>
+          </a:xfrm>
+          <a:prstGeom prst="rect">
+            <a:avLst/>
+          </a:prstGeom>
+          <a:noFill/>
+          <a:ln/>
+        </p:spPr>
+        <p:txBody>
+          <a:bodyPr wrap="square" lIns="0" tIns="0" rIns="0" bIns="0" rtlCol="0" anchor="ctr"/>
+          <a:lstStyle/>
+          <a:p>
+            <a:pPr marL="0" indent="0" algn="ctr">
+              <a:buNone/>
+            </a:pPr>
+            <a:r>
+              <a:rPr lang="en-US" sz="1000" b="1" dirty="0">
+                <a:solidFill>
+                  <a:srgbClr val="FFFFFF"/>
+                </a:solidFill>
+              </a:rPr>
+              <a:t>Result</a:t>
+            </a:r>
+            <a:endParaRPr lang="en-US" sz="1000" dirty="0"/>
+          </a:p>
+        </p:txBody>
+      </p:sp>
+      <p:sp>
+        <p:nvSpPr>
+          <p:cNvPr id="253" name="Shape 18">
+            <a:extLst>
+              <a:ext uri="{FF2B5EF4-FFF2-40B4-BE49-F238E27FC236}">
+                <a16:creationId xmlns:a16="http://schemas.microsoft.com/office/drawing/2014/main" id="{560C15B4-A729-64B7-FF0D-EAE82C223DA4}"/>
+              </a:ext>
+            </a:extLst>
+          </p:cNvPr>
+          <p:cNvSpPr/>
+          <p:nvPr/>
+        </p:nvSpPr>
+        <p:spPr>
+          <a:xfrm>
+            <a:off x="365760" y="2304288"/>
+            <a:ext cx="2084832" cy="347472"/>
+          </a:xfrm>
+          <a:prstGeom prst="rect">
+            <a:avLst/>
+          </a:prstGeom>
+          <a:solidFill>
+            <a:srgbClr val="FFFFFF"/>
+          </a:solidFill>
+          <a:ln w="6350">
+            <a:solidFill>
+              <a:srgbClr val="E8E5DE"/>
+            </a:solidFill>
+            <a:prstDash val="solid"/>
+          </a:ln>
+        </p:spPr>
+      </p:sp>
+      <p:sp>
+        <p:nvSpPr>
+          <p:cNvPr id="254" name="Text 19">
+            <a:extLst>
+              <a:ext uri="{FF2B5EF4-FFF2-40B4-BE49-F238E27FC236}">
+                <a16:creationId xmlns:a16="http://schemas.microsoft.com/office/drawing/2014/main" id="{271E8C3A-DB32-5B9A-87FB-F19606ADFB85}"/>
+              </a:ext>
+            </a:extLst>
+          </p:cNvPr>
+          <p:cNvSpPr/>
+          <p:nvPr/>
+        </p:nvSpPr>
+        <p:spPr>
+          <a:xfrm>
+            <a:off x="365760" y="2304288"/>
+            <a:ext cx="2084832" cy="347472"/>
+          </a:xfrm>
+          <a:prstGeom prst="rect">
+            <a:avLst/>
+          </a:prstGeom>
+          <a:noFill/>
+          <a:ln/>
+        </p:spPr>
+        <p:txBody>
+          <a:bodyPr wrap="square" lIns="0" tIns="0" rIns="0" bIns="0" rtlCol="0" anchor="ctr"/>
+          <a:lstStyle/>
+          <a:p>
+            <a:pPr marL="0" indent="0" algn="ctr">
+              <a:buNone/>
+            </a:pPr>
+            <a:r>
+              <a:rPr lang="en-US" sz="1000" b="1" dirty="0">
+                <a:solidFill>
+                  <a:srgbClr val="1A1A2E"/>
+                </a:solidFill>
+              </a:rPr>
+              <a:t>Start</a:t>
+            </a:r>
+            <a:endParaRPr lang="en-US" sz="1000" dirty="0"/>
+          </a:p>
+        </p:txBody>
+      </p:sp>
+      <p:sp>
+        <p:nvSpPr>
+          <p:cNvPr id="255" name="Shape 20">
+            <a:extLst>
+              <a:ext uri="{FF2B5EF4-FFF2-40B4-BE49-F238E27FC236}">
+                <a16:creationId xmlns:a16="http://schemas.microsoft.com/office/drawing/2014/main" id="{016B1043-C943-CAFC-71C0-E21774EE21E7}"/>
+              </a:ext>
+            </a:extLst>
+          </p:cNvPr>
+          <p:cNvSpPr/>
+          <p:nvPr/>
+        </p:nvSpPr>
+        <p:spPr>
+          <a:xfrm>
+            <a:off x="2505456" y="2304288"/>
+            <a:ext cx="1993392" cy="347472"/>
+          </a:xfrm>
+          <a:prstGeom prst="rect">
+            <a:avLst/>
+          </a:prstGeom>
+          <a:solidFill>
+            <a:srgbClr val="FFFFFF"/>
+          </a:solidFill>
+          <a:ln w="6350">
+            <a:solidFill>
+              <a:srgbClr val="E8E5DE"/>
+            </a:solidFill>
+            <a:prstDash val="solid"/>
+          </a:ln>
+        </p:spPr>
+      </p:sp>
+      <p:sp>
+        <p:nvSpPr>
+          <p:cNvPr id="256" name="Text 21">
+            <a:extLst>
+              <a:ext uri="{FF2B5EF4-FFF2-40B4-BE49-F238E27FC236}">
+                <a16:creationId xmlns:a16="http://schemas.microsoft.com/office/drawing/2014/main" id="{D32A0814-38A6-113D-295E-A3D2EF1C4CAA}"/>
+              </a:ext>
+            </a:extLst>
+          </p:cNvPr>
+          <p:cNvSpPr/>
+          <p:nvPr/>
+        </p:nvSpPr>
+        <p:spPr>
+          <a:xfrm>
+            <a:off x="2505456" y="2304288"/>
+            <a:ext cx="1993392" cy="347472"/>
+          </a:xfrm>
+          <a:prstGeom prst="rect">
+            <a:avLst/>
+          </a:prstGeom>
+          <a:noFill/>
+          <a:ln/>
+        </p:spPr>
+        <p:txBody>
+          <a:bodyPr wrap="square" lIns="0" tIns="0" rIns="0" bIns="0" rtlCol="0" anchor="ctr"/>
+          <a:lstStyle/>
+          <a:p>
+            <a:pPr marL="0" indent="0" algn="ctr">
+              <a:buNone/>
+            </a:pPr>
+            <a:r>
+              <a:rPr lang="en-US" sz="1000" dirty="0">
+                <a:solidFill>
+                  <a:srgbClr val="1A1A2E"/>
+                </a:solidFill>
+              </a:rPr>
+              <a:t>0.00%</a:t>
+            </a:r>
+            <a:endParaRPr lang="en-US" sz="1000" dirty="0"/>
+          </a:p>
+        </p:txBody>
+      </p:sp>
+      <p:sp>
+        <p:nvSpPr>
+          <p:cNvPr id="257" name="Shape 22">
+            <a:extLst>
+              <a:ext uri="{FF2B5EF4-FFF2-40B4-BE49-F238E27FC236}">
+                <a16:creationId xmlns:a16="http://schemas.microsoft.com/office/drawing/2014/main" id="{35FCEA54-53E5-DEF3-5A26-1AFC47EC085C}"/>
+              </a:ext>
+            </a:extLst>
+          </p:cNvPr>
+          <p:cNvSpPr/>
+          <p:nvPr/>
+        </p:nvSpPr>
+        <p:spPr>
+          <a:xfrm>
+            <a:off x="4553712" y="2304288"/>
+            <a:ext cx="1901952" cy="347472"/>
+          </a:xfrm>
+          <a:prstGeom prst="rect">
+            <a:avLst/>
+          </a:prstGeom>
+          <a:solidFill>
+            <a:srgbClr val="FFFFFF"/>
+          </a:solidFill>
+          <a:ln w="6350">
+            <a:solidFill>
+              <a:srgbClr val="E8E5DE"/>
+            </a:solidFill>
+            <a:prstDash val="solid"/>
+          </a:ln>
+        </p:spPr>
+      </p:sp>
+      <p:sp>
+        <p:nvSpPr>
+          <p:cNvPr id="258" name="Text 23">
+            <a:extLst>
+              <a:ext uri="{FF2B5EF4-FFF2-40B4-BE49-F238E27FC236}">
+                <a16:creationId xmlns:a16="http://schemas.microsoft.com/office/drawing/2014/main" id="{624D692F-DD6A-2E53-5ED1-D513842FF0C7}"/>
+              </a:ext>
+            </a:extLst>
+          </p:cNvPr>
+          <p:cNvSpPr/>
+          <p:nvPr/>
+        </p:nvSpPr>
+        <p:spPr>
+          <a:xfrm>
+            <a:off x="4553712" y="2304288"/>
+            <a:ext cx="1901952" cy="347472"/>
+          </a:xfrm>
+          <a:prstGeom prst="rect">
+            <a:avLst/>
+          </a:prstGeom>
+          <a:noFill/>
+          <a:ln/>
+        </p:spPr>
+        <p:txBody>
+          <a:bodyPr wrap="square" lIns="0" tIns="0" rIns="0" bIns="0" rtlCol="0" anchor="ctr"/>
+          <a:lstStyle/>
+          <a:p>
+            <a:pPr marL="0" indent="0" algn="ctr">
+              <a:buNone/>
+            </a:pPr>
+            <a:r>
+              <a:rPr lang="en-US" sz="1000" dirty="0">
+                <a:solidFill>
+                  <a:srgbClr val="9A0718"/>
+                </a:solidFill>
+              </a:rPr>
+              <a:t>0.00%</a:t>
+            </a:r>
+            <a:endParaRPr lang="en-US" sz="1000" dirty="0"/>
+          </a:p>
+        </p:txBody>
+      </p:sp>
+      <p:sp>
+        <p:nvSpPr>
+          <p:cNvPr id="259" name="Shape 24">
+            <a:extLst>
+              <a:ext uri="{FF2B5EF4-FFF2-40B4-BE49-F238E27FC236}">
+                <a16:creationId xmlns:a16="http://schemas.microsoft.com/office/drawing/2014/main" id="{DD9D5945-9965-BA83-73AA-6B0CF668969C}"/>
+              </a:ext>
+            </a:extLst>
+          </p:cNvPr>
+          <p:cNvSpPr/>
+          <p:nvPr/>
+        </p:nvSpPr>
+        <p:spPr>
+          <a:xfrm>
+            <a:off x="6510528" y="2304288"/>
+            <a:ext cx="1078992" cy="347472"/>
+          </a:xfrm>
+          <a:prstGeom prst="rect">
+            <a:avLst/>
+          </a:prstGeom>
+          <a:solidFill>
+            <a:srgbClr val="FFFFFF"/>
+          </a:solidFill>
+          <a:ln w="6350">
+            <a:solidFill>
+              <a:srgbClr val="E8E5DE"/>
+            </a:solidFill>
+            <a:prstDash val="solid"/>
+          </a:ln>
+        </p:spPr>
+      </p:sp>
+      <p:sp>
+        <p:nvSpPr>
+          <p:cNvPr id="260" name="Text 25">
+            <a:extLst>
+              <a:ext uri="{FF2B5EF4-FFF2-40B4-BE49-F238E27FC236}">
+                <a16:creationId xmlns:a16="http://schemas.microsoft.com/office/drawing/2014/main" id="{DD66255D-E3D6-63FB-910F-D8A73822128F}"/>
+              </a:ext>
+            </a:extLst>
+          </p:cNvPr>
+          <p:cNvSpPr/>
+          <p:nvPr/>
+        </p:nvSpPr>
+        <p:spPr>
+          <a:xfrm>
+            <a:off x="6510528" y="2304288"/>
+            <a:ext cx="1078992" cy="347472"/>
+          </a:xfrm>
+          <a:prstGeom prst="rect">
+            <a:avLst/>
+          </a:prstGeom>
+          <a:noFill/>
+          <a:ln/>
+        </p:spPr>
+        <p:txBody>
+          <a:bodyPr wrap="square" lIns="0" tIns="0" rIns="0" bIns="0" rtlCol="0" anchor="ctr"/>
+          <a:lstStyle/>
+          <a:p>
+            <a:pPr marL="0" indent="0" algn="ctr">
+              <a:buNone/>
+            </a:pPr>
+            <a:r>
+              <a:rPr lang="en-US" sz="1000" dirty="0">
+                <a:solidFill>
+                  <a:srgbClr val="888780"/>
+                </a:solidFill>
+              </a:rPr>
+              <a:t>0.00%</a:t>
+            </a:r>
+            <a:endParaRPr lang="en-US" sz="1000" dirty="0"/>
+          </a:p>
+        </p:txBody>
+      </p:sp>
+      <p:sp>
+        <p:nvSpPr>
+          <p:cNvPr id="261" name="Shape 26">
+            <a:extLst>
+              <a:ext uri="{FF2B5EF4-FFF2-40B4-BE49-F238E27FC236}">
+                <a16:creationId xmlns:a16="http://schemas.microsoft.com/office/drawing/2014/main" id="{A58C1656-E44B-1110-0D9F-F879E07BD8F4}"/>
+              </a:ext>
+            </a:extLst>
+          </p:cNvPr>
+          <p:cNvSpPr/>
+          <p:nvPr/>
+        </p:nvSpPr>
+        <p:spPr>
+          <a:xfrm>
+            <a:off x="7644384" y="2304288"/>
+            <a:ext cx="1133856" cy="347472"/>
+          </a:xfrm>
+          <a:prstGeom prst="rect">
+            <a:avLst/>
+          </a:prstGeom>
+          <a:solidFill>
+            <a:srgbClr val="FFFFFF"/>
+          </a:solidFill>
+          <a:ln w="6350">
+            <a:solidFill>
+              <a:srgbClr val="E8E5DE"/>
+            </a:solidFill>
+            <a:prstDash val="solid"/>
+          </a:ln>
+        </p:spPr>
+      </p:sp>
+      <p:sp>
+        <p:nvSpPr>
+          <p:cNvPr id="262" name="Text 27">
+            <a:extLst>
+              <a:ext uri="{FF2B5EF4-FFF2-40B4-BE49-F238E27FC236}">
+                <a16:creationId xmlns:a16="http://schemas.microsoft.com/office/drawing/2014/main" id="{EA8AB18D-A182-0DCB-6AC8-F5D1D80516B4}"/>
+              </a:ext>
+            </a:extLst>
+          </p:cNvPr>
+          <p:cNvSpPr/>
+          <p:nvPr/>
+        </p:nvSpPr>
+        <p:spPr>
+          <a:xfrm>
+            <a:off x="7644384" y="2304288"/>
+            <a:ext cx="1133856" cy="347472"/>
+          </a:xfrm>
+          <a:prstGeom prst="rect">
+            <a:avLst/>
+          </a:prstGeom>
+          <a:noFill/>
+          <a:ln/>
+        </p:spPr>
+        <p:txBody>
+          <a:bodyPr wrap="square" lIns="0" tIns="0" rIns="0" bIns="0" rtlCol="0" anchor="ctr"/>
+          <a:lstStyle/>
+          <a:p>
+            <a:pPr marL="0" indent="0" algn="ctr">
+              <a:buNone/>
+            </a:pPr>
+            <a:r>
+              <a:rPr lang="en-US" sz="1000" dirty="0">
+                <a:solidFill>
+                  <a:srgbClr val="3B6D11"/>
+                </a:solidFill>
+              </a:rPr>
+              <a:t>—</a:t>
+            </a:r>
+            <a:endParaRPr lang="en-US" sz="1000" dirty="0"/>
+          </a:p>
+        </p:txBody>
+      </p:sp>
+      <p:sp>
+        <p:nvSpPr>
+          <p:cNvPr id="263" name="Shape 28">
+            <a:extLst>
+              <a:ext uri="{FF2B5EF4-FFF2-40B4-BE49-F238E27FC236}">
+                <a16:creationId xmlns:a16="http://schemas.microsoft.com/office/drawing/2014/main" id="{97016A11-F37A-FE68-76AB-D9EFC6F537AD}"/>
+              </a:ext>
+            </a:extLst>
+          </p:cNvPr>
+          <p:cNvSpPr/>
+          <p:nvPr/>
+        </p:nvSpPr>
+        <p:spPr>
+          <a:xfrm>
+            <a:off x="365760" y="2688336"/>
+            <a:ext cx="2084832" cy="347472"/>
+          </a:xfrm>
+          <a:prstGeom prst="rect">
+            <a:avLst/>
+          </a:prstGeom>
+          <a:solidFill>
+            <a:srgbClr val="F1EFE8"/>
+          </a:solidFill>
+          <a:ln w="6350">
+            <a:solidFill>
+              <a:srgbClr val="E8E5DE"/>
+            </a:solidFill>
+            <a:prstDash val="solid"/>
+          </a:ln>
+        </p:spPr>
+      </p:sp>
+      <p:sp>
+        <p:nvSpPr>
+          <p:cNvPr id="264" name="Text 29">
+            <a:extLst>
+              <a:ext uri="{FF2B5EF4-FFF2-40B4-BE49-F238E27FC236}">
+                <a16:creationId xmlns:a16="http://schemas.microsoft.com/office/drawing/2014/main" id="{7BAD4C6C-D49C-5C40-EC62-762ECC6F0BA4}"/>
+              </a:ext>
+            </a:extLst>
+          </p:cNvPr>
+          <p:cNvSpPr/>
+          <p:nvPr/>
+        </p:nvSpPr>
+        <p:spPr>
+          <a:xfrm>
+            <a:off x="365760" y="2688336"/>
+            <a:ext cx="2084832" cy="347472"/>
+          </a:xfrm>
+          <a:prstGeom prst="rect">
+            <a:avLst/>
+          </a:prstGeom>
+          <a:noFill/>
+          <a:ln/>
+        </p:spPr>
+        <p:txBody>
+          <a:bodyPr wrap="square" lIns="0" tIns="0" rIns="0" bIns="0" rtlCol="0" anchor="ctr"/>
+          <a:lstStyle/>
+          <a:p>
+            <a:pPr marL="0" indent="0" algn="ctr">
+              <a:buNone/>
+            </a:pPr>
+            <a:r>
+              <a:rPr lang="en-US" sz="1000" b="1" dirty="0">
+                <a:solidFill>
+                  <a:srgbClr val="1A1A2E"/>
+                </a:solidFill>
+              </a:rPr>
+              <a:t>Step 1</a:t>
+            </a:r>
+            <a:endParaRPr lang="en-US" sz="1000" dirty="0"/>
+          </a:p>
+        </p:txBody>
+      </p:sp>
+      <p:sp>
+        <p:nvSpPr>
+          <p:cNvPr id="265" name="Shape 30">
+            <a:extLst>
+              <a:ext uri="{FF2B5EF4-FFF2-40B4-BE49-F238E27FC236}">
+                <a16:creationId xmlns:a16="http://schemas.microsoft.com/office/drawing/2014/main" id="{75AC70D4-CF9D-52AE-82A1-DEC2208C8934}"/>
+              </a:ext>
+            </a:extLst>
+          </p:cNvPr>
+          <p:cNvSpPr/>
+          <p:nvPr/>
+        </p:nvSpPr>
+        <p:spPr>
+          <a:xfrm>
+            <a:off x="2505456" y="2688336"/>
+            <a:ext cx="1993392" cy="347472"/>
+          </a:xfrm>
+          <a:prstGeom prst="rect">
+            <a:avLst/>
+          </a:prstGeom>
+          <a:solidFill>
+            <a:srgbClr val="F1EFE8"/>
+          </a:solidFill>
+          <a:ln w="6350">
+            <a:solidFill>
+              <a:srgbClr val="E8E5DE"/>
+            </a:solidFill>
+            <a:prstDash val="solid"/>
+          </a:ln>
+        </p:spPr>
+      </p:sp>
+      <p:sp>
+        <p:nvSpPr>
+          <p:cNvPr id="266" name="Text 31">
+            <a:extLst>
+              <a:ext uri="{FF2B5EF4-FFF2-40B4-BE49-F238E27FC236}">
+                <a16:creationId xmlns:a16="http://schemas.microsoft.com/office/drawing/2014/main" id="{C467A5ED-8531-142A-DC86-E7C8A76BAED5}"/>
+              </a:ext>
+            </a:extLst>
+          </p:cNvPr>
+          <p:cNvSpPr/>
+          <p:nvPr/>
+        </p:nvSpPr>
+        <p:spPr>
+          <a:xfrm>
+            <a:off x="2505456" y="2688336"/>
+            <a:ext cx="1993392" cy="347472"/>
+          </a:xfrm>
+          <a:prstGeom prst="rect">
+            <a:avLst/>
+          </a:prstGeom>
+          <a:noFill/>
+          <a:ln/>
+        </p:spPr>
+        <p:txBody>
+          <a:bodyPr wrap="square" lIns="0" tIns="0" rIns="0" bIns="0" rtlCol="0" anchor="ctr"/>
+          <a:lstStyle/>
+          <a:p>
+            <a:pPr marL="0" indent="0" algn="ctr">
+              <a:buNone/>
+            </a:pPr>
+            <a:r>
+              <a:rPr lang="en-US" sz="1000" dirty="0">
+                <a:solidFill>
+                  <a:srgbClr val="1A1A2E"/>
+                </a:solidFill>
+              </a:rPr>
+              <a:t>9.57%</a:t>
+            </a:r>
+            <a:endParaRPr lang="en-US" sz="1000" dirty="0"/>
+          </a:p>
+        </p:txBody>
+      </p:sp>
+      <p:sp>
+        <p:nvSpPr>
+          <p:cNvPr id="267" name="Shape 32">
+            <a:extLst>
+              <a:ext uri="{FF2B5EF4-FFF2-40B4-BE49-F238E27FC236}">
+                <a16:creationId xmlns:a16="http://schemas.microsoft.com/office/drawing/2014/main" id="{2D4A6570-3B24-F0FE-0952-9A007D9B2B45}"/>
+              </a:ext>
+            </a:extLst>
+          </p:cNvPr>
+          <p:cNvSpPr/>
+          <p:nvPr/>
+        </p:nvSpPr>
+        <p:spPr>
+          <a:xfrm>
+            <a:off x="4553712" y="2688336"/>
+            <a:ext cx="1901952" cy="347472"/>
+          </a:xfrm>
+          <a:prstGeom prst="rect">
+            <a:avLst/>
+          </a:prstGeom>
+          <a:solidFill>
+            <a:srgbClr val="F1EFE8"/>
+          </a:solidFill>
+          <a:ln w="6350">
+            <a:solidFill>
+              <a:srgbClr val="E8E5DE"/>
+            </a:solidFill>
+            <a:prstDash val="solid"/>
+          </a:ln>
+        </p:spPr>
+      </p:sp>
+      <p:sp>
+        <p:nvSpPr>
+          <p:cNvPr id="268" name="Text 33">
+            <a:extLst>
+              <a:ext uri="{FF2B5EF4-FFF2-40B4-BE49-F238E27FC236}">
+                <a16:creationId xmlns:a16="http://schemas.microsoft.com/office/drawing/2014/main" id="{BCB2F797-0724-4752-A251-16DD7181E02D}"/>
+              </a:ext>
+            </a:extLst>
+          </p:cNvPr>
+          <p:cNvSpPr/>
+          <p:nvPr/>
+        </p:nvSpPr>
+        <p:spPr>
+          <a:xfrm>
+            <a:off x="4553712" y="2688336"/>
+            <a:ext cx="1901952" cy="347472"/>
+          </a:xfrm>
+          <a:prstGeom prst="rect">
+            <a:avLst/>
+          </a:prstGeom>
+          <a:noFill/>
+          <a:ln/>
+        </p:spPr>
+        <p:txBody>
+          <a:bodyPr wrap="square" lIns="0" tIns="0" rIns="0" bIns="0" rtlCol="0" anchor="ctr"/>
+          <a:lstStyle/>
+          <a:p>
+            <a:pPr marL="0" indent="0" algn="ctr">
+              <a:buNone/>
+            </a:pPr>
+            <a:r>
+              <a:rPr lang="en-US" sz="1000" dirty="0">
+                <a:solidFill>
+                  <a:srgbClr val="9A0718"/>
+                </a:solidFill>
+              </a:rPr>
+              <a:t>18.04%</a:t>
+            </a:r>
+            <a:endParaRPr lang="en-US" sz="1000" dirty="0"/>
+          </a:p>
+        </p:txBody>
+      </p:sp>
+      <p:sp>
+        <p:nvSpPr>
+          <p:cNvPr id="269" name="Shape 34">
+            <a:extLst>
+              <a:ext uri="{FF2B5EF4-FFF2-40B4-BE49-F238E27FC236}">
+                <a16:creationId xmlns:a16="http://schemas.microsoft.com/office/drawing/2014/main" id="{E6B94330-045A-1F2B-A3D7-24ADAE2FB53A}"/>
+              </a:ext>
+            </a:extLst>
+          </p:cNvPr>
+          <p:cNvSpPr/>
+          <p:nvPr/>
+        </p:nvSpPr>
+        <p:spPr>
+          <a:xfrm>
+            <a:off x="6510528" y="2688336"/>
+            <a:ext cx="1078992" cy="347472"/>
+          </a:xfrm>
+          <a:prstGeom prst="rect">
+            <a:avLst/>
+          </a:prstGeom>
+          <a:solidFill>
+            <a:srgbClr val="F1EFE8"/>
+          </a:solidFill>
+          <a:ln w="6350">
+            <a:solidFill>
+              <a:srgbClr val="E8E5DE"/>
+            </a:solidFill>
+            <a:prstDash val="solid"/>
+          </a:ln>
+        </p:spPr>
+      </p:sp>
+      <p:sp>
+        <p:nvSpPr>
+          <p:cNvPr id="270" name="Text 35">
+            <a:extLst>
+              <a:ext uri="{FF2B5EF4-FFF2-40B4-BE49-F238E27FC236}">
+                <a16:creationId xmlns:a16="http://schemas.microsoft.com/office/drawing/2014/main" id="{240B2249-4CD9-C5C5-0CEE-743A053F7F89}"/>
+              </a:ext>
+            </a:extLst>
+          </p:cNvPr>
+          <p:cNvSpPr/>
+          <p:nvPr/>
+        </p:nvSpPr>
+        <p:spPr>
+          <a:xfrm>
+            <a:off x="6510528" y="2688336"/>
+            <a:ext cx="1078992" cy="347472"/>
+          </a:xfrm>
+          <a:prstGeom prst="rect">
+            <a:avLst/>
+          </a:prstGeom>
+          <a:noFill/>
+          <a:ln/>
+        </p:spPr>
+        <p:txBody>
+          <a:bodyPr wrap="square" lIns="0" tIns="0" rIns="0" bIns="0" rtlCol="0" anchor="ctr"/>
+          <a:lstStyle/>
+          <a:p>
+            <a:pPr marL="0" indent="0" algn="ctr">
+              <a:buNone/>
+            </a:pPr>
+            <a:r>
+              <a:rPr lang="en-US" sz="1000" dirty="0">
+                <a:solidFill>
+                  <a:srgbClr val="A32D2D"/>
+                </a:solidFill>
+              </a:rPr>
+              <a:t>+8.47%</a:t>
+            </a:r>
+            <a:endParaRPr lang="en-US" sz="1000" dirty="0"/>
+          </a:p>
+        </p:txBody>
+      </p:sp>
+      <p:sp>
+        <p:nvSpPr>
+          <p:cNvPr id="271" name="Shape 36">
+            <a:extLst>
+              <a:ext uri="{FF2B5EF4-FFF2-40B4-BE49-F238E27FC236}">
+                <a16:creationId xmlns:a16="http://schemas.microsoft.com/office/drawing/2014/main" id="{7AF865E6-33EC-5572-2A7D-EA6E8126D954}"/>
+              </a:ext>
+            </a:extLst>
+          </p:cNvPr>
+          <p:cNvSpPr/>
+          <p:nvPr/>
+        </p:nvSpPr>
+        <p:spPr>
+          <a:xfrm>
+            <a:off x="7644384" y="2688336"/>
+            <a:ext cx="1133856" cy="347472"/>
+          </a:xfrm>
+          <a:prstGeom prst="rect">
+            <a:avLst/>
+          </a:prstGeom>
+          <a:solidFill>
+            <a:srgbClr val="F1EFE8"/>
+          </a:solidFill>
+          <a:ln w="6350">
+            <a:solidFill>
+              <a:srgbClr val="E8E5DE"/>
+            </a:solidFill>
+            <a:prstDash val="solid"/>
+          </a:ln>
+        </p:spPr>
+      </p:sp>
+      <p:sp>
+        <p:nvSpPr>
+          <p:cNvPr id="272" name="Text 37">
+            <a:extLst>
+              <a:ext uri="{FF2B5EF4-FFF2-40B4-BE49-F238E27FC236}">
+                <a16:creationId xmlns:a16="http://schemas.microsoft.com/office/drawing/2014/main" id="{466764D4-4771-CFEF-2696-4F19F45F7A74}"/>
+              </a:ext>
+            </a:extLst>
+          </p:cNvPr>
+          <p:cNvSpPr/>
+          <p:nvPr/>
+        </p:nvSpPr>
+        <p:spPr>
+          <a:xfrm>
+            <a:off x="7644384" y="2688336"/>
+            <a:ext cx="1133856" cy="347472"/>
+          </a:xfrm>
+          <a:prstGeom prst="rect">
+            <a:avLst/>
+          </a:prstGeom>
+          <a:noFill/>
+          <a:ln/>
+        </p:spPr>
+        <p:txBody>
+          <a:bodyPr wrap="square" lIns="0" tIns="0" rIns="0" bIns="0" rtlCol="0" anchor="ctr"/>
+          <a:lstStyle/>
+          <a:p>
+            <a:pPr marL="0" indent="0" algn="ctr">
+              <a:buNone/>
+            </a:pPr>
+            <a:r>
+              <a:rPr lang="en-US" sz="1000" dirty="0">
+                <a:solidFill>
+                  <a:srgbClr val="A32D2D"/>
+                </a:solidFill>
+              </a:rPr>
+              <a:t>❌ Test worse</a:t>
+            </a:r>
+            <a:endParaRPr lang="en-US" sz="1000" dirty="0"/>
+          </a:p>
+        </p:txBody>
+      </p:sp>
+      <p:sp>
+        <p:nvSpPr>
+          <p:cNvPr id="273" name="Shape 38">
+            <a:extLst>
+              <a:ext uri="{FF2B5EF4-FFF2-40B4-BE49-F238E27FC236}">
+                <a16:creationId xmlns:a16="http://schemas.microsoft.com/office/drawing/2014/main" id="{39BB7BBD-2017-0C0D-9044-5EED1416E65F}"/>
+              </a:ext>
+            </a:extLst>
+          </p:cNvPr>
+          <p:cNvSpPr/>
+          <p:nvPr/>
+        </p:nvSpPr>
+        <p:spPr>
+          <a:xfrm>
+            <a:off x="365760" y="3072384"/>
+            <a:ext cx="2084832" cy="347472"/>
+          </a:xfrm>
+          <a:prstGeom prst="rect">
+            <a:avLst/>
+          </a:prstGeom>
+          <a:solidFill>
+            <a:srgbClr val="FFFFFF"/>
+          </a:solidFill>
+          <a:ln w="6350">
+            <a:solidFill>
+              <a:srgbClr val="E8E5DE"/>
+            </a:solidFill>
+            <a:prstDash val="solid"/>
+          </a:ln>
+        </p:spPr>
+      </p:sp>
+      <p:sp>
+        <p:nvSpPr>
+          <p:cNvPr id="274" name="Text 39">
+            <a:extLst>
+              <a:ext uri="{FF2B5EF4-FFF2-40B4-BE49-F238E27FC236}">
+                <a16:creationId xmlns:a16="http://schemas.microsoft.com/office/drawing/2014/main" id="{012E632F-8738-C31A-75AC-740C6BBC9946}"/>
+              </a:ext>
+            </a:extLst>
+          </p:cNvPr>
+          <p:cNvSpPr/>
+          <p:nvPr/>
+        </p:nvSpPr>
+        <p:spPr>
+          <a:xfrm>
+            <a:off x="365760" y="3072384"/>
+            <a:ext cx="2084832" cy="347472"/>
+          </a:xfrm>
+          <a:prstGeom prst="rect">
+            <a:avLst/>
+          </a:prstGeom>
+          <a:noFill/>
+          <a:ln/>
+        </p:spPr>
+        <p:txBody>
+          <a:bodyPr wrap="square" lIns="0" tIns="0" rIns="0" bIns="0" rtlCol="0" anchor="ctr"/>
+          <a:lstStyle/>
+          <a:p>
+            <a:pPr marL="0" indent="0" algn="ctr">
+              <a:buNone/>
+            </a:pPr>
+            <a:r>
+              <a:rPr lang="en-US" sz="1000" b="1" dirty="0">
+                <a:solidFill>
+                  <a:srgbClr val="1A1A2E"/>
+                </a:solidFill>
+              </a:rPr>
+              <a:t>Step 2</a:t>
+            </a:r>
+            <a:endParaRPr lang="en-US" sz="1000" dirty="0"/>
+          </a:p>
+        </p:txBody>
+      </p:sp>
+      <p:sp>
+        <p:nvSpPr>
+          <p:cNvPr id="275" name="Shape 40">
+            <a:extLst>
+              <a:ext uri="{FF2B5EF4-FFF2-40B4-BE49-F238E27FC236}">
+                <a16:creationId xmlns:a16="http://schemas.microsoft.com/office/drawing/2014/main" id="{839396F0-1271-736A-E0B8-B9E01122B6CA}"/>
+              </a:ext>
+            </a:extLst>
+          </p:cNvPr>
+          <p:cNvSpPr/>
+          <p:nvPr/>
+        </p:nvSpPr>
+        <p:spPr>
+          <a:xfrm>
+            <a:off x="2505456" y="3072384"/>
+            <a:ext cx="1993392" cy="347472"/>
+          </a:xfrm>
+          <a:prstGeom prst="rect">
+            <a:avLst/>
+          </a:prstGeom>
+          <a:solidFill>
+            <a:srgbClr val="FFFFFF"/>
+          </a:solidFill>
+          <a:ln w="6350">
+            <a:solidFill>
+              <a:srgbClr val="E8E5DE"/>
+            </a:solidFill>
+            <a:prstDash val="solid"/>
+          </a:ln>
+        </p:spPr>
+      </p:sp>
+      <p:sp>
+        <p:nvSpPr>
+          <p:cNvPr id="276" name="Text 41">
+            <a:extLst>
+              <a:ext uri="{FF2B5EF4-FFF2-40B4-BE49-F238E27FC236}">
+                <a16:creationId xmlns:a16="http://schemas.microsoft.com/office/drawing/2014/main" id="{B0763DBF-AD0D-31CC-5AE5-A99B442316A0}"/>
+              </a:ext>
+            </a:extLst>
+          </p:cNvPr>
+          <p:cNvSpPr/>
+          <p:nvPr/>
+        </p:nvSpPr>
+        <p:spPr>
+          <a:xfrm>
+            <a:off x="2505456" y="3072384"/>
+            <a:ext cx="1993392" cy="347472"/>
+          </a:xfrm>
+          <a:prstGeom prst="rect">
+            <a:avLst/>
+          </a:prstGeom>
+          <a:noFill/>
+          <a:ln/>
+        </p:spPr>
+        <p:txBody>
+          <a:bodyPr wrap="square" lIns="0" tIns="0" rIns="0" bIns="0" rtlCol="0" anchor="ctr"/>
+          <a:lstStyle/>
+          <a:p>
+            <a:pPr marL="0" indent="0" algn="ctr">
+              <a:buNone/>
+            </a:pPr>
+            <a:r>
+              <a:rPr lang="en-US" sz="1000" dirty="0">
+                <a:solidFill>
+                  <a:srgbClr val="1A1A2E"/>
+                </a:solidFill>
+              </a:rPr>
+              <a:t>8.91%</a:t>
+            </a:r>
+            <a:endParaRPr lang="en-US" sz="1000" dirty="0"/>
+          </a:p>
+        </p:txBody>
+      </p:sp>
+      <p:sp>
+        <p:nvSpPr>
+          <p:cNvPr id="277" name="Shape 42">
+            <a:extLst>
+              <a:ext uri="{FF2B5EF4-FFF2-40B4-BE49-F238E27FC236}">
+                <a16:creationId xmlns:a16="http://schemas.microsoft.com/office/drawing/2014/main" id="{36472D78-DC77-5DBC-D933-95E4FB8DFCD8}"/>
+              </a:ext>
+            </a:extLst>
+          </p:cNvPr>
+          <p:cNvSpPr/>
+          <p:nvPr/>
+        </p:nvSpPr>
+        <p:spPr>
+          <a:xfrm>
+            <a:off x="4553712" y="3072384"/>
+            <a:ext cx="1901952" cy="347472"/>
+          </a:xfrm>
+          <a:prstGeom prst="rect">
+            <a:avLst/>
+          </a:prstGeom>
+          <a:solidFill>
+            <a:srgbClr val="FFFFFF"/>
+          </a:solidFill>
+          <a:ln w="6350">
+            <a:solidFill>
+              <a:srgbClr val="E8E5DE"/>
+            </a:solidFill>
+            <a:prstDash val="solid"/>
+          </a:ln>
+        </p:spPr>
+      </p:sp>
+      <p:sp>
+        <p:nvSpPr>
+          <p:cNvPr id="278" name="Text 43">
+            <a:extLst>
+              <a:ext uri="{FF2B5EF4-FFF2-40B4-BE49-F238E27FC236}">
+                <a16:creationId xmlns:a16="http://schemas.microsoft.com/office/drawing/2014/main" id="{D7E491DA-F88E-88E1-4799-3917B08F4162}"/>
+              </a:ext>
+            </a:extLst>
+          </p:cNvPr>
+          <p:cNvSpPr/>
+          <p:nvPr/>
+        </p:nvSpPr>
+        <p:spPr>
+          <a:xfrm>
+            <a:off x="4553712" y="3072384"/>
+            <a:ext cx="1901952" cy="347472"/>
+          </a:xfrm>
+          <a:prstGeom prst="rect">
+            <a:avLst/>
+          </a:prstGeom>
+          <a:noFill/>
+          <a:ln/>
+        </p:spPr>
+        <p:txBody>
+          <a:bodyPr wrap="square" lIns="0" tIns="0" rIns="0" bIns="0" rtlCol="0" anchor="ctr"/>
+          <a:lstStyle/>
+          <a:p>
+            <a:pPr marL="0" indent="0" algn="ctr">
+              <a:buNone/>
+            </a:pPr>
+            <a:r>
+              <a:rPr lang="en-US" sz="1000" dirty="0">
+                <a:solidFill>
+                  <a:srgbClr val="9A0718"/>
+                </a:solidFill>
+              </a:rPr>
+              <a:t>16.17%</a:t>
+            </a:r>
+            <a:endParaRPr lang="en-US" sz="1000" dirty="0"/>
+          </a:p>
+        </p:txBody>
+      </p:sp>
+      <p:sp>
+        <p:nvSpPr>
+          <p:cNvPr id="279" name="Shape 44">
+            <a:extLst>
+              <a:ext uri="{FF2B5EF4-FFF2-40B4-BE49-F238E27FC236}">
+                <a16:creationId xmlns:a16="http://schemas.microsoft.com/office/drawing/2014/main" id="{592D52A9-883C-3284-EF98-7E35FF8CD19D}"/>
+              </a:ext>
+            </a:extLst>
+          </p:cNvPr>
+          <p:cNvSpPr/>
+          <p:nvPr/>
+        </p:nvSpPr>
+        <p:spPr>
+          <a:xfrm>
+            <a:off x="6510528" y="3072384"/>
+            <a:ext cx="1078992" cy="347472"/>
+          </a:xfrm>
+          <a:prstGeom prst="rect">
+            <a:avLst/>
+          </a:prstGeom>
+          <a:solidFill>
+            <a:srgbClr val="FFFFFF"/>
+          </a:solidFill>
+          <a:ln w="6350">
+            <a:solidFill>
+              <a:srgbClr val="E8E5DE"/>
+            </a:solidFill>
+            <a:prstDash val="solid"/>
+          </a:ln>
+        </p:spPr>
+      </p:sp>
+      <p:sp>
+        <p:nvSpPr>
+          <p:cNvPr id="280" name="Text 45">
+            <a:extLst>
+              <a:ext uri="{FF2B5EF4-FFF2-40B4-BE49-F238E27FC236}">
+                <a16:creationId xmlns:a16="http://schemas.microsoft.com/office/drawing/2014/main" id="{B5FB6055-2E20-5EA8-0EC4-68916234FCAE}"/>
+              </a:ext>
+            </a:extLst>
+          </p:cNvPr>
+          <p:cNvSpPr/>
+          <p:nvPr/>
+        </p:nvSpPr>
+        <p:spPr>
+          <a:xfrm>
+            <a:off x="6510528" y="3072384"/>
+            <a:ext cx="1078992" cy="347472"/>
+          </a:xfrm>
+          <a:prstGeom prst="rect">
+            <a:avLst/>
+          </a:prstGeom>
+          <a:noFill/>
+          <a:ln/>
+        </p:spPr>
+        <p:txBody>
+          <a:bodyPr wrap="square" lIns="0" tIns="0" rIns="0" bIns="0" rtlCol="0" anchor="ctr"/>
+          <a:lstStyle/>
+          <a:p>
+            <a:pPr marL="0" indent="0" algn="ctr">
+              <a:buNone/>
+            </a:pPr>
+            <a:r>
+              <a:rPr lang="en-US" sz="1000" dirty="0">
+                <a:solidFill>
+                  <a:srgbClr val="A32D2D"/>
+                </a:solidFill>
+              </a:rPr>
+              <a:t>+7.26%</a:t>
+            </a:r>
+            <a:endParaRPr lang="en-US" sz="1000" dirty="0"/>
+          </a:p>
+        </p:txBody>
+      </p:sp>
+      <p:sp>
+        <p:nvSpPr>
+          <p:cNvPr id="281" name="Shape 46">
+            <a:extLst>
+              <a:ext uri="{FF2B5EF4-FFF2-40B4-BE49-F238E27FC236}">
+                <a16:creationId xmlns:a16="http://schemas.microsoft.com/office/drawing/2014/main" id="{D4323439-314E-096B-2ECD-D0B95EF699C6}"/>
+              </a:ext>
+            </a:extLst>
+          </p:cNvPr>
+          <p:cNvSpPr/>
+          <p:nvPr/>
+        </p:nvSpPr>
+        <p:spPr>
+          <a:xfrm>
+            <a:off x="7644384" y="3072384"/>
+            <a:ext cx="1133856" cy="347472"/>
+          </a:xfrm>
+          <a:prstGeom prst="rect">
+            <a:avLst/>
+          </a:prstGeom>
+          <a:solidFill>
+            <a:srgbClr val="FFFFFF"/>
+          </a:solidFill>
+          <a:ln w="6350">
+            <a:solidFill>
+              <a:srgbClr val="E8E5DE"/>
+            </a:solidFill>
+            <a:prstDash val="solid"/>
+          </a:ln>
+        </p:spPr>
+      </p:sp>
+      <p:sp>
+        <p:nvSpPr>
+          <p:cNvPr id="282" name="Text 47">
+            <a:extLst>
+              <a:ext uri="{FF2B5EF4-FFF2-40B4-BE49-F238E27FC236}">
+                <a16:creationId xmlns:a16="http://schemas.microsoft.com/office/drawing/2014/main" id="{641A7572-8464-6F53-E893-35196D9BF2CA}"/>
+              </a:ext>
+            </a:extLst>
+          </p:cNvPr>
+          <p:cNvSpPr/>
+          <p:nvPr/>
+        </p:nvSpPr>
+        <p:spPr>
+          <a:xfrm>
+            <a:off x="7644384" y="3072384"/>
+            <a:ext cx="1133856" cy="347472"/>
+          </a:xfrm>
+          <a:prstGeom prst="rect">
+            <a:avLst/>
+          </a:prstGeom>
+          <a:noFill/>
+          <a:ln/>
+        </p:spPr>
+        <p:txBody>
+          <a:bodyPr wrap="square" lIns="0" tIns="0" rIns="0" bIns="0" rtlCol="0" anchor="ctr"/>
+          <a:lstStyle/>
+          <a:p>
+            <a:pPr marL="0" indent="0" algn="ctr">
+              <a:buNone/>
+            </a:pPr>
+            <a:r>
+              <a:rPr lang="en-US" sz="1000" dirty="0">
+                <a:solidFill>
+                  <a:srgbClr val="A32D2D"/>
+                </a:solidFill>
+              </a:rPr>
+              <a:t>❌ Test worse</a:t>
+            </a:r>
+            <a:endParaRPr lang="en-US" sz="1000" dirty="0"/>
+          </a:p>
+        </p:txBody>
+      </p:sp>
+      <p:sp>
+        <p:nvSpPr>
+          <p:cNvPr id="283" name="Shape 48">
+            <a:extLst>
+              <a:ext uri="{FF2B5EF4-FFF2-40B4-BE49-F238E27FC236}">
+                <a16:creationId xmlns:a16="http://schemas.microsoft.com/office/drawing/2014/main" id="{170C2CCD-0D8E-423F-5ECD-53223D9654E9}"/>
+              </a:ext>
+            </a:extLst>
+          </p:cNvPr>
+          <p:cNvSpPr/>
+          <p:nvPr/>
+        </p:nvSpPr>
+        <p:spPr>
+          <a:xfrm>
+            <a:off x="365760" y="3456432"/>
+            <a:ext cx="2084832" cy="347472"/>
+          </a:xfrm>
+          <a:prstGeom prst="rect">
+            <a:avLst/>
+          </a:prstGeom>
+          <a:solidFill>
+            <a:srgbClr val="F1EFE8"/>
+          </a:solidFill>
+          <a:ln w="6350">
+            <a:solidFill>
+              <a:srgbClr val="E8E5DE"/>
+            </a:solidFill>
+            <a:prstDash val="solid"/>
+          </a:ln>
+        </p:spPr>
+      </p:sp>
+      <p:sp>
+        <p:nvSpPr>
+          <p:cNvPr id="284" name="Text 49">
+            <a:extLst>
+              <a:ext uri="{FF2B5EF4-FFF2-40B4-BE49-F238E27FC236}">
+                <a16:creationId xmlns:a16="http://schemas.microsoft.com/office/drawing/2014/main" id="{3E329D74-7B6A-435E-A7DE-E1D5D84D6BB9}"/>
+              </a:ext>
+            </a:extLst>
+          </p:cNvPr>
+          <p:cNvSpPr/>
+          <p:nvPr/>
+        </p:nvSpPr>
+        <p:spPr>
+          <a:xfrm>
+            <a:off x="365760" y="3456432"/>
+            <a:ext cx="2084832" cy="347472"/>
+          </a:xfrm>
+          <a:prstGeom prst="rect">
+            <a:avLst/>
+          </a:prstGeom>
+          <a:noFill/>
+          <a:ln/>
+        </p:spPr>
+        <p:txBody>
+          <a:bodyPr wrap="square" lIns="0" tIns="0" rIns="0" bIns="0" rtlCol="0" anchor="ctr"/>
+          <a:lstStyle/>
+          <a:p>
+            <a:pPr marL="0" indent="0" algn="ctr">
+              <a:buNone/>
+            </a:pPr>
+            <a:r>
+              <a:rPr lang="en-US" sz="1000" b="1" dirty="0">
+                <a:solidFill>
+                  <a:srgbClr val="1A1A2E"/>
+                </a:solidFill>
+              </a:rPr>
+              <a:t>Step 3</a:t>
+            </a:r>
+            <a:endParaRPr lang="en-US" sz="1000" dirty="0"/>
+          </a:p>
+        </p:txBody>
+      </p:sp>
+      <p:sp>
+        <p:nvSpPr>
+          <p:cNvPr id="285" name="Shape 50">
+            <a:extLst>
+              <a:ext uri="{FF2B5EF4-FFF2-40B4-BE49-F238E27FC236}">
+                <a16:creationId xmlns:a16="http://schemas.microsoft.com/office/drawing/2014/main" id="{3754F179-B0C4-350D-4333-E537C33B63B4}"/>
+              </a:ext>
+            </a:extLst>
+          </p:cNvPr>
+          <p:cNvSpPr/>
+          <p:nvPr/>
+        </p:nvSpPr>
+        <p:spPr>
+          <a:xfrm>
+            <a:off x="2505456" y="3456432"/>
+            <a:ext cx="1993392" cy="347472"/>
+          </a:xfrm>
+          <a:prstGeom prst="rect">
+            <a:avLst/>
+          </a:prstGeom>
+          <a:solidFill>
+            <a:srgbClr val="F1EFE8"/>
+          </a:solidFill>
+          <a:ln w="6350">
+            <a:solidFill>
+              <a:srgbClr val="E8E5DE"/>
+            </a:solidFill>
+            <a:prstDash val="solid"/>
+          </a:ln>
+        </p:spPr>
+      </p:sp>
+      <p:sp>
+        <p:nvSpPr>
+          <p:cNvPr id="286" name="Text 51">
+            <a:extLst>
+              <a:ext uri="{FF2B5EF4-FFF2-40B4-BE49-F238E27FC236}">
+                <a16:creationId xmlns:a16="http://schemas.microsoft.com/office/drawing/2014/main" id="{4FDDD388-F145-985D-4B8E-22FE3269001C}"/>
+              </a:ext>
+            </a:extLst>
+          </p:cNvPr>
+          <p:cNvSpPr/>
+          <p:nvPr/>
+        </p:nvSpPr>
+        <p:spPr>
+          <a:xfrm>
+            <a:off x="2505456" y="3456432"/>
+            <a:ext cx="1993392" cy="347472"/>
+          </a:xfrm>
+          <a:prstGeom prst="rect">
+            <a:avLst/>
+          </a:prstGeom>
+          <a:noFill/>
+          <a:ln/>
+        </p:spPr>
+        <p:txBody>
+          <a:bodyPr wrap="square" lIns="0" tIns="0" rIns="0" bIns="0" rtlCol="0" anchor="ctr"/>
+          <a:lstStyle/>
+          <a:p>
+            <a:pPr marL="0" indent="0" algn="ctr">
+              <a:buNone/>
+            </a:pPr>
+            <a:r>
+              <a:rPr lang="en-US" sz="1000" dirty="0">
+                <a:solidFill>
+                  <a:srgbClr val="1A1A2E"/>
+                </a:solidFill>
+              </a:rPr>
+              <a:t>20.94%</a:t>
+            </a:r>
+            <a:endParaRPr lang="en-US" sz="1000" dirty="0"/>
+          </a:p>
+        </p:txBody>
+      </p:sp>
+      <p:sp>
+        <p:nvSpPr>
+          <p:cNvPr id="287" name="Shape 52">
+            <a:extLst>
+              <a:ext uri="{FF2B5EF4-FFF2-40B4-BE49-F238E27FC236}">
+                <a16:creationId xmlns:a16="http://schemas.microsoft.com/office/drawing/2014/main" id="{1E5E5C93-9E1D-B8F6-077E-C16B80D7EA83}"/>
+              </a:ext>
+            </a:extLst>
+          </p:cNvPr>
+          <p:cNvSpPr/>
+          <p:nvPr/>
+        </p:nvSpPr>
+        <p:spPr>
+          <a:xfrm>
+            <a:off x="4553712" y="3456432"/>
+            <a:ext cx="1901952" cy="347472"/>
+          </a:xfrm>
+          <a:prstGeom prst="rect">
+            <a:avLst/>
+          </a:prstGeom>
+          <a:solidFill>
+            <a:srgbClr val="F1EFE8"/>
+          </a:solidFill>
+          <a:ln w="6350">
+            <a:solidFill>
+              <a:srgbClr val="E8E5DE"/>
+            </a:solidFill>
+            <a:prstDash val="solid"/>
+          </a:ln>
+        </p:spPr>
+      </p:sp>
+      <p:sp>
+        <p:nvSpPr>
+          <p:cNvPr id="288" name="Text 53">
+            <a:extLst>
+              <a:ext uri="{FF2B5EF4-FFF2-40B4-BE49-F238E27FC236}">
+                <a16:creationId xmlns:a16="http://schemas.microsoft.com/office/drawing/2014/main" id="{5F0B1655-E46A-3AA3-9B73-E4D3365A0E96}"/>
+              </a:ext>
+            </a:extLst>
+          </p:cNvPr>
+          <p:cNvSpPr/>
+          <p:nvPr/>
+        </p:nvSpPr>
+        <p:spPr>
+          <a:xfrm>
+            <a:off x="4553712" y="3456432"/>
+            <a:ext cx="1901952" cy="347472"/>
+          </a:xfrm>
+          <a:prstGeom prst="rect">
+            <a:avLst/>
+          </a:prstGeom>
+          <a:noFill/>
+          <a:ln/>
+        </p:spPr>
+        <p:txBody>
+          <a:bodyPr wrap="square" lIns="0" tIns="0" rIns="0" bIns="0" rtlCol="0" anchor="ctr"/>
+          <a:lstStyle/>
+          <a:p>
+            <a:pPr marL="0" indent="0" algn="ctr">
+              <a:buNone/>
+            </a:pPr>
+            <a:r>
+              <a:rPr lang="en-US" sz="1000" dirty="0">
+                <a:solidFill>
+                  <a:srgbClr val="9A0718"/>
+                </a:solidFill>
+              </a:rPr>
+              <a:t>19.78%</a:t>
+            </a:r>
+            <a:endParaRPr lang="en-US" sz="1000" dirty="0"/>
+          </a:p>
+        </p:txBody>
+      </p:sp>
+      <p:sp>
+        <p:nvSpPr>
+          <p:cNvPr id="289" name="Shape 54">
+            <a:extLst>
+              <a:ext uri="{FF2B5EF4-FFF2-40B4-BE49-F238E27FC236}">
+                <a16:creationId xmlns:a16="http://schemas.microsoft.com/office/drawing/2014/main" id="{9DCA0530-0327-56DE-A002-E5FC2B441BE9}"/>
+              </a:ext>
+            </a:extLst>
+          </p:cNvPr>
+          <p:cNvSpPr/>
+          <p:nvPr/>
+        </p:nvSpPr>
+        <p:spPr>
+          <a:xfrm>
+            <a:off x="6510528" y="3456432"/>
+            <a:ext cx="1078992" cy="347472"/>
+          </a:xfrm>
+          <a:prstGeom prst="rect">
+            <a:avLst/>
+          </a:prstGeom>
+          <a:solidFill>
+            <a:srgbClr val="F1EFE8"/>
+          </a:solidFill>
+          <a:ln w="6350">
+            <a:solidFill>
+              <a:srgbClr val="E8E5DE"/>
+            </a:solidFill>
+            <a:prstDash val="solid"/>
+          </a:ln>
+        </p:spPr>
+      </p:sp>
+      <p:sp>
+        <p:nvSpPr>
+          <p:cNvPr id="290" name="Text 55">
+            <a:extLst>
+              <a:ext uri="{FF2B5EF4-FFF2-40B4-BE49-F238E27FC236}">
+                <a16:creationId xmlns:a16="http://schemas.microsoft.com/office/drawing/2014/main" id="{3AAED0F0-7ED9-5FE2-A304-122E98B53876}"/>
+              </a:ext>
+            </a:extLst>
+          </p:cNvPr>
+          <p:cNvSpPr/>
+          <p:nvPr/>
+        </p:nvSpPr>
+        <p:spPr>
+          <a:xfrm>
+            <a:off x="6510528" y="3456432"/>
+            <a:ext cx="1078992" cy="347472"/>
+          </a:xfrm>
+          <a:prstGeom prst="rect">
+            <a:avLst/>
+          </a:prstGeom>
+          <a:noFill/>
+          <a:ln/>
+        </p:spPr>
+        <p:txBody>
+          <a:bodyPr wrap="square" lIns="0" tIns="0" rIns="0" bIns="0" rtlCol="0" anchor="ctr"/>
+          <a:lstStyle/>
+          <a:p>
+            <a:pPr marL="0" indent="0" algn="ctr">
+              <a:buNone/>
+            </a:pPr>
+            <a:r>
+              <a:rPr lang="en-US" sz="1000" dirty="0">
+                <a:solidFill>
+                  <a:srgbClr val="3B6D11"/>
+                </a:solidFill>
+              </a:rPr>
+              <a:t>-1.16%</a:t>
+            </a:r>
+            <a:endParaRPr lang="en-US" sz="1000" dirty="0"/>
+          </a:p>
+        </p:txBody>
+      </p:sp>
+      <p:sp>
+        <p:nvSpPr>
+          <p:cNvPr id="291" name="Shape 56">
+            <a:extLst>
+              <a:ext uri="{FF2B5EF4-FFF2-40B4-BE49-F238E27FC236}">
+                <a16:creationId xmlns:a16="http://schemas.microsoft.com/office/drawing/2014/main" id="{F1631DF9-117E-7F07-568A-628EF1AB53D3}"/>
+              </a:ext>
+            </a:extLst>
+          </p:cNvPr>
+          <p:cNvSpPr/>
+          <p:nvPr/>
+        </p:nvSpPr>
+        <p:spPr>
+          <a:xfrm>
+            <a:off x="7644384" y="3456432"/>
+            <a:ext cx="1133856" cy="347472"/>
+          </a:xfrm>
+          <a:prstGeom prst="rect">
+            <a:avLst/>
+          </a:prstGeom>
+          <a:solidFill>
+            <a:srgbClr val="F1EFE8"/>
+          </a:solidFill>
+          <a:ln w="6350">
+            <a:solidFill>
+              <a:srgbClr val="E8E5DE"/>
+            </a:solidFill>
+            <a:prstDash val="solid"/>
+          </a:ln>
+        </p:spPr>
+      </p:sp>
+      <p:sp>
+        <p:nvSpPr>
+          <p:cNvPr id="292" name="Text 57">
+            <a:extLst>
+              <a:ext uri="{FF2B5EF4-FFF2-40B4-BE49-F238E27FC236}">
+                <a16:creationId xmlns:a16="http://schemas.microsoft.com/office/drawing/2014/main" id="{C41F4010-4021-EE17-8B31-E4F15C416B10}"/>
+              </a:ext>
+            </a:extLst>
+          </p:cNvPr>
+          <p:cNvSpPr/>
+          <p:nvPr/>
+        </p:nvSpPr>
+        <p:spPr>
+          <a:xfrm>
+            <a:off x="7644384" y="3456432"/>
+            <a:ext cx="1133856" cy="347472"/>
+          </a:xfrm>
+          <a:prstGeom prst="rect">
+            <a:avLst/>
+          </a:prstGeom>
+          <a:noFill/>
+          <a:ln/>
+        </p:spPr>
+        <p:txBody>
+          <a:bodyPr wrap="square" lIns="0" tIns="0" rIns="0" bIns="0" rtlCol="0" anchor="ctr"/>
+          <a:lstStyle/>
+          <a:p>
+            <a:pPr marL="0" indent="0" algn="ctr">
+              <a:buNone/>
+            </a:pPr>
+            <a:r>
+              <a:rPr lang="en-US" sz="1000" dirty="0">
+                <a:solidFill>
+                  <a:srgbClr val="3B6D11"/>
+                </a:solidFill>
+              </a:rPr>
+              <a:t>✅ Test better</a:t>
+            </a:r>
+            <a:endParaRPr lang="en-US" sz="1000" dirty="0"/>
+          </a:p>
+        </p:txBody>
+      </p:sp>
+      <p:sp>
+        <p:nvSpPr>
+          <p:cNvPr id="293" name="Shape 58">
+            <a:extLst>
+              <a:ext uri="{FF2B5EF4-FFF2-40B4-BE49-F238E27FC236}">
+                <a16:creationId xmlns:a16="http://schemas.microsoft.com/office/drawing/2014/main" id="{E7AB50C5-651C-4D00-A887-8BCF27793428}"/>
+              </a:ext>
+            </a:extLst>
+          </p:cNvPr>
+          <p:cNvSpPr/>
+          <p:nvPr/>
+        </p:nvSpPr>
+        <p:spPr>
+          <a:xfrm>
+            <a:off x="365760" y="3840480"/>
+            <a:ext cx="2084832" cy="347472"/>
+          </a:xfrm>
+          <a:prstGeom prst="rect">
+            <a:avLst/>
+          </a:prstGeom>
+          <a:solidFill>
+            <a:srgbClr val="FFFFFF"/>
+          </a:solidFill>
+          <a:ln w="6350">
+            <a:solidFill>
+              <a:srgbClr val="E8E5DE"/>
+            </a:solidFill>
+            <a:prstDash val="solid"/>
+          </a:ln>
+        </p:spPr>
+      </p:sp>
+      <p:sp>
+        <p:nvSpPr>
+          <p:cNvPr id="294" name="Text 59">
+            <a:extLst>
+              <a:ext uri="{FF2B5EF4-FFF2-40B4-BE49-F238E27FC236}">
+                <a16:creationId xmlns:a16="http://schemas.microsoft.com/office/drawing/2014/main" id="{D8E15ED5-9134-9F88-296C-06ED63FFFFB1}"/>
+              </a:ext>
+            </a:extLst>
+          </p:cNvPr>
+          <p:cNvSpPr/>
+          <p:nvPr/>
+        </p:nvSpPr>
+        <p:spPr>
+          <a:xfrm>
+            <a:off x="365760" y="3840480"/>
+            <a:ext cx="2084832" cy="347472"/>
+          </a:xfrm>
+          <a:prstGeom prst="rect">
+            <a:avLst/>
+          </a:prstGeom>
+          <a:noFill/>
+          <a:ln/>
+        </p:spPr>
+        <p:txBody>
+          <a:bodyPr wrap="square" lIns="0" tIns="0" rIns="0" bIns="0" rtlCol="0" anchor="ctr"/>
+          <a:lstStyle/>
+          <a:p>
+            <a:pPr marL="0" indent="0" algn="ctr">
+              <a:buNone/>
+            </a:pPr>
+            <a:r>
+              <a:rPr lang="en-US" sz="1000" b="1" dirty="0">
+                <a:solidFill>
+                  <a:srgbClr val="1A1A2E"/>
+                </a:solidFill>
+              </a:rPr>
+              <a:t>Confirm</a:t>
+            </a:r>
+            <a:endParaRPr lang="en-US" sz="1000" dirty="0"/>
+          </a:p>
+        </p:txBody>
+      </p:sp>
+      <p:sp>
+        <p:nvSpPr>
+          <p:cNvPr id="295" name="Shape 60">
+            <a:extLst>
+              <a:ext uri="{FF2B5EF4-FFF2-40B4-BE49-F238E27FC236}">
+                <a16:creationId xmlns:a16="http://schemas.microsoft.com/office/drawing/2014/main" id="{72A6080B-26B1-8EC3-5D50-6F0207B683EE}"/>
+              </a:ext>
+            </a:extLst>
+          </p:cNvPr>
+          <p:cNvSpPr/>
+          <p:nvPr/>
+        </p:nvSpPr>
+        <p:spPr>
+          <a:xfrm>
+            <a:off x="2505456" y="3840480"/>
+            <a:ext cx="1993392" cy="347472"/>
+          </a:xfrm>
+          <a:prstGeom prst="rect">
+            <a:avLst/>
+          </a:prstGeom>
+          <a:solidFill>
+            <a:srgbClr val="FFFFFF"/>
+          </a:solidFill>
+          <a:ln w="6350">
+            <a:solidFill>
+              <a:srgbClr val="E8E5DE"/>
+            </a:solidFill>
+            <a:prstDash val="solid"/>
+          </a:ln>
+        </p:spPr>
+      </p:sp>
+      <p:sp>
+        <p:nvSpPr>
+          <p:cNvPr id="296" name="Text 61">
+            <a:extLst>
+              <a:ext uri="{FF2B5EF4-FFF2-40B4-BE49-F238E27FC236}">
+                <a16:creationId xmlns:a16="http://schemas.microsoft.com/office/drawing/2014/main" id="{C96B3263-B98F-1411-0677-25A346FFA7EA}"/>
+              </a:ext>
+            </a:extLst>
+          </p:cNvPr>
+          <p:cNvSpPr/>
+          <p:nvPr/>
+        </p:nvSpPr>
+        <p:spPr>
+          <a:xfrm>
+            <a:off x="2505456" y="3840480"/>
+            <a:ext cx="1993392" cy="347472"/>
+          </a:xfrm>
+          <a:prstGeom prst="rect">
+            <a:avLst/>
+          </a:prstGeom>
+          <a:noFill/>
+          <a:ln/>
+        </p:spPr>
+        <p:txBody>
+          <a:bodyPr wrap="square" lIns="0" tIns="0" rIns="0" bIns="0" rtlCol="0" anchor="ctr"/>
+          <a:lstStyle/>
+          <a:p>
+            <a:pPr marL="0" indent="0" algn="ctr">
+              <a:buNone/>
+            </a:pPr>
+            <a:r>
+              <a:rPr lang="en-US" sz="1000" dirty="0">
+                <a:solidFill>
+                  <a:srgbClr val="1A1A2E"/>
+                </a:solidFill>
+              </a:rPr>
+              <a:t>39.03%</a:t>
+            </a:r>
+            <a:endParaRPr lang="en-US" sz="1000" dirty="0"/>
+          </a:p>
+        </p:txBody>
+      </p:sp>
+      <p:sp>
+        <p:nvSpPr>
+          <p:cNvPr id="297" name="Shape 62">
+            <a:extLst>
+              <a:ext uri="{FF2B5EF4-FFF2-40B4-BE49-F238E27FC236}">
+                <a16:creationId xmlns:a16="http://schemas.microsoft.com/office/drawing/2014/main" id="{4F1F2725-817E-20CB-D8B5-A2532C82F5B6}"/>
+              </a:ext>
+            </a:extLst>
+          </p:cNvPr>
+          <p:cNvSpPr/>
+          <p:nvPr/>
+        </p:nvSpPr>
+        <p:spPr>
+          <a:xfrm>
+            <a:off x="4553712" y="3840480"/>
+            <a:ext cx="1901952" cy="347472"/>
+          </a:xfrm>
+          <a:prstGeom prst="rect">
+            <a:avLst/>
+          </a:prstGeom>
+          <a:solidFill>
+            <a:srgbClr val="FFFFFF"/>
+          </a:solidFill>
+          <a:ln w="6350">
+            <a:solidFill>
+              <a:srgbClr val="E8E5DE"/>
+            </a:solidFill>
+            <a:prstDash val="solid"/>
+          </a:ln>
+        </p:spPr>
+      </p:sp>
+      <p:sp>
+        <p:nvSpPr>
+          <p:cNvPr id="298" name="Text 63">
+            <a:extLst>
+              <a:ext uri="{FF2B5EF4-FFF2-40B4-BE49-F238E27FC236}">
+                <a16:creationId xmlns:a16="http://schemas.microsoft.com/office/drawing/2014/main" id="{31DB52C6-7DC0-C385-8047-B000FECDF40B}"/>
+              </a:ext>
+            </a:extLst>
+          </p:cNvPr>
+          <p:cNvSpPr/>
+          <p:nvPr/>
+        </p:nvSpPr>
+        <p:spPr>
+          <a:xfrm>
+            <a:off x="4553712" y="3840480"/>
+            <a:ext cx="1901952" cy="347472"/>
+          </a:xfrm>
+          <a:prstGeom prst="rect">
+            <a:avLst/>
+          </a:prstGeom>
+          <a:noFill/>
+          <a:ln/>
+        </p:spPr>
+        <p:txBody>
+          <a:bodyPr wrap="square" lIns="0" tIns="0" rIns="0" bIns="0" rtlCol="0" anchor="ctr"/>
+          <a:lstStyle/>
+          <a:p>
+            <a:pPr marL="0" indent="0" algn="ctr">
+              <a:buNone/>
+            </a:pPr>
+            <a:r>
+              <a:rPr lang="en-US" sz="1000" dirty="0">
+                <a:solidFill>
+                  <a:srgbClr val="9A0718"/>
+                </a:solidFill>
+              </a:rPr>
+              <a:t>9.61%</a:t>
+            </a:r>
+            <a:endParaRPr lang="en-US" sz="1000" dirty="0"/>
+          </a:p>
+        </p:txBody>
+      </p:sp>
+      <p:sp>
+        <p:nvSpPr>
+          <p:cNvPr id="299" name="Shape 64">
+            <a:extLst>
+              <a:ext uri="{FF2B5EF4-FFF2-40B4-BE49-F238E27FC236}">
+                <a16:creationId xmlns:a16="http://schemas.microsoft.com/office/drawing/2014/main" id="{87B76F72-0904-A626-2B7C-227A9DD3E670}"/>
+              </a:ext>
+            </a:extLst>
+          </p:cNvPr>
+          <p:cNvSpPr/>
+          <p:nvPr/>
+        </p:nvSpPr>
+        <p:spPr>
+          <a:xfrm>
+            <a:off x="6510528" y="3840480"/>
+            <a:ext cx="1078992" cy="347472"/>
+          </a:xfrm>
+          <a:prstGeom prst="rect">
+            <a:avLst/>
+          </a:prstGeom>
+          <a:solidFill>
+            <a:srgbClr val="FFFFFF"/>
+          </a:solidFill>
+          <a:ln w="6350">
+            <a:solidFill>
+              <a:srgbClr val="E8E5DE"/>
+            </a:solidFill>
+            <a:prstDash val="solid"/>
+          </a:ln>
+        </p:spPr>
+      </p:sp>
+      <p:sp>
+        <p:nvSpPr>
+          <p:cNvPr id="300" name="Text 65">
+            <a:extLst>
+              <a:ext uri="{FF2B5EF4-FFF2-40B4-BE49-F238E27FC236}">
+                <a16:creationId xmlns:a16="http://schemas.microsoft.com/office/drawing/2014/main" id="{0A7F4DC2-A667-4EB1-2180-461144D4144F}"/>
+              </a:ext>
+            </a:extLst>
+          </p:cNvPr>
+          <p:cNvSpPr/>
+          <p:nvPr/>
+        </p:nvSpPr>
+        <p:spPr>
+          <a:xfrm>
+            <a:off x="6510528" y="3840480"/>
+            <a:ext cx="1078992" cy="347472"/>
+          </a:xfrm>
+          <a:prstGeom prst="rect">
+            <a:avLst/>
+          </a:prstGeom>
+          <a:noFill/>
+          <a:ln/>
+        </p:spPr>
+        <p:txBody>
+          <a:bodyPr wrap="square" lIns="0" tIns="0" rIns="0" bIns="0" rtlCol="0" anchor="ctr"/>
+          <a:lstStyle/>
+          <a:p>
+            <a:pPr marL="0" indent="0" algn="ctr">
+              <a:buNone/>
+            </a:pPr>
+            <a:r>
+              <a:rPr lang="en-US" sz="1000" dirty="0">
+                <a:solidFill>
+                  <a:srgbClr val="3B6D11"/>
+                </a:solidFill>
+              </a:rPr>
+              <a:t>-29.42%</a:t>
+            </a:r>
+            <a:endParaRPr lang="en-US" sz="1000" dirty="0"/>
+          </a:p>
+        </p:txBody>
+      </p:sp>
+      <p:sp>
+        <p:nvSpPr>
+          <p:cNvPr id="301" name="Shape 66">
+            <a:extLst>
+              <a:ext uri="{FF2B5EF4-FFF2-40B4-BE49-F238E27FC236}">
+                <a16:creationId xmlns:a16="http://schemas.microsoft.com/office/drawing/2014/main" id="{6B833D79-5FBF-9333-981D-EF8B970E6F8A}"/>
+              </a:ext>
+            </a:extLst>
+          </p:cNvPr>
+          <p:cNvSpPr/>
+          <p:nvPr/>
+        </p:nvSpPr>
+        <p:spPr>
+          <a:xfrm>
+            <a:off x="7644384" y="3840480"/>
+            <a:ext cx="1133856" cy="347472"/>
+          </a:xfrm>
+          <a:prstGeom prst="rect">
+            <a:avLst/>
+          </a:prstGeom>
+          <a:solidFill>
+            <a:srgbClr val="FFFFFF"/>
+          </a:solidFill>
+          <a:ln w="6350">
+            <a:solidFill>
+              <a:srgbClr val="E8E5DE"/>
+            </a:solidFill>
+            <a:prstDash val="solid"/>
+          </a:ln>
+        </p:spPr>
+      </p:sp>
+      <p:sp>
+        <p:nvSpPr>
+          <p:cNvPr id="302" name="Text 67">
+            <a:extLst>
+              <a:ext uri="{FF2B5EF4-FFF2-40B4-BE49-F238E27FC236}">
+                <a16:creationId xmlns:a16="http://schemas.microsoft.com/office/drawing/2014/main" id="{B6816CB1-3002-7C87-924D-37A272AE607F}"/>
+              </a:ext>
+            </a:extLst>
+          </p:cNvPr>
+          <p:cNvSpPr/>
+          <p:nvPr/>
+        </p:nvSpPr>
+        <p:spPr>
+          <a:xfrm>
+            <a:off x="7644384" y="3840480"/>
+            <a:ext cx="1133856" cy="347472"/>
+          </a:xfrm>
+          <a:prstGeom prst="rect">
+            <a:avLst/>
+          </a:prstGeom>
+          <a:noFill/>
+          <a:ln/>
+        </p:spPr>
+        <p:txBody>
+          <a:bodyPr wrap="square" lIns="0" tIns="0" rIns="0" bIns="0" rtlCol="0" anchor="ctr"/>
+          <a:lstStyle/>
+          <a:p>
+            <a:pPr marL="0" indent="0" algn="ctr">
+              <a:buNone/>
+            </a:pPr>
+            <a:r>
+              <a:rPr lang="en-US" sz="1000" dirty="0">
+                <a:solidFill>
+                  <a:srgbClr val="3B6D11"/>
+                </a:solidFill>
+              </a:rPr>
+              <a:t>✅ Test better</a:t>
             </a:r>
             <a:endParaRPr lang="en-US" sz="1000" dirty="0"/>
           </a:p>
@@ -12511,6 +12894,7 @@
         <a:solidFill>
           <a:srgbClr val="F8F6F1"/>
         </a:solidFill>
+        <a:effectLst/>
       </p:bgPr>
     </p:bg>
     <p:spTree>
@@ -12598,11 +12982,11 @@
           <a:bodyPr wrap="square" lIns="0" tIns="0" rIns="0" bIns="0" rtlCol="0" anchor="ctr"/>
           <a:lstStyle/>
           <a:p>
-            <a:pPr indent="0" marL="0">
-              <a:buNone/>
-            </a:pPr>
-            <a:r>
-              <a:rPr lang="en-US" sz="1300" b="1" spc="200" kern="0" dirty="0">
+            <a:pPr marL="0" indent="0">
+              <a:buNone/>
+            </a:pPr>
+            <a:r>
+              <a:rPr lang="en-US" sz="1300" b="1" kern="0" spc="200" dirty="0">
                 <a:solidFill>
                   <a:srgbClr val="9A0718"/>
                 </a:solidFill>
@@ -12637,7 +13021,7 @@
           <a:bodyPr wrap="square" lIns="0" tIns="0" rIns="0" bIns="0" rtlCol="0" anchor="ctr"/>
           <a:lstStyle/>
           <a:p>
-            <a:pPr indent="0" marL="0">
+            <a:pPr marL="0" indent="0">
               <a:buNone/>
             </a:pPr>
             <a:r>
@@ -12699,7 +13083,7 @@
           <a:bodyPr wrap="square" lIns="0" tIns="0" rIns="0" bIns="0" rtlCol="0" anchor="ctr"/>
           <a:lstStyle/>
           <a:p>
-            <a:pPr algn="r" indent="0" marL="0">
+            <a:pPr marL="0" indent="0" algn="r">
               <a:buNone/>
             </a:pPr>
             <a:r>
@@ -12708,7 +13092,7 @@
                   <a:srgbClr val="888780"/>
                 </a:solidFill>
               </a:rPr>
-              <a:t>8 / 13</a:t>
+              <a:t>8</a:t>
             </a:r>
             <a:endParaRPr lang="en-US" sz="900" dirty="0"/>
           </a:p>
@@ -12785,7 +13169,7 @@
           <a:bodyPr wrap="square" lIns="0" tIns="0" rIns="0" bIns="0" rtlCol="0" anchor="ctr"/>
           <a:lstStyle/>
           <a:p>
-            <a:pPr indent="0" marL="0">
+            <a:pPr marL="0" indent="0">
               <a:buNone/>
             </a:pPr>
             <a:r>
@@ -12824,7 +13208,7 @@
           <a:bodyPr wrap="square" lIns="0" tIns="0" rIns="0" bIns="0" rtlCol="0" anchor="ctr"/>
           <a:lstStyle/>
           <a:p>
-            <a:pPr indent="0" marL="0">
+            <a:pPr marL="0" indent="0">
               <a:buNone/>
             </a:pPr>
             <a:r>
@@ -12860,7 +13244,7 @@
           <a:bodyPr wrap="square" lIns="0" tIns="0" rIns="0" bIns="0" rtlCol="0" anchor="ctr"/>
           <a:lstStyle/>
           <a:p>
-            <a:pPr indent="0" marL="0">
+            <a:pPr marL="0" indent="0">
               <a:buNone/>
             </a:pPr>
             <a:r>
@@ -12896,7 +13280,7 @@
           <a:bodyPr wrap="square" rtlCol="0" anchor="t"/>
           <a:lstStyle/>
           <a:p>
-            <a:pPr indent="0" marL="0">
+            <a:pPr marL="0" indent="0">
               <a:buNone/>
             </a:pPr>
             <a:r>
@@ -12932,7 +13316,7 @@
           <a:bodyPr wrap="square" lIns="0" tIns="0" rIns="0" bIns="0" rtlCol="0" anchor="ctr"/>
           <a:lstStyle/>
           <a:p>
-            <a:pPr indent="0" marL="0">
+            <a:pPr marL="0" indent="0">
               <a:buNone/>
             </a:pPr>
             <a:r>
@@ -12968,7 +13352,7 @@
           <a:bodyPr wrap="square" rtlCol="0" anchor="t"/>
           <a:lstStyle/>
           <a:p>
-            <a:pPr indent="0" marL="0">
+            <a:pPr marL="0" indent="0">
               <a:buNone/>
             </a:pPr>
             <a:r>
@@ -13027,7 +13411,7 @@
           <a:bodyPr wrap="square" rtlCol="0" anchor="t"/>
           <a:lstStyle/>
           <a:p>
-            <a:pPr indent="0" marL="0">
+            <a:pPr marL="0" indent="0">
               <a:buNone/>
             </a:pPr>
             <a:r>
@@ -13041,7 +13425,7 @@
             <a:endParaRPr lang="en-US" sz="900" dirty="0"/>
           </a:p>
           <a:p>
-            <a:pPr indent="0" marL="0">
+            <a:pPr marL="0" indent="0">
               <a:buNone/>
             </a:pPr>
             <a:r>
@@ -13055,13 +13439,13 @@
             <a:endParaRPr lang="en-US" sz="900" dirty="0"/>
           </a:p>
           <a:p>
-            <a:pPr indent="0" marL="0">
+            <a:pPr marL="0" indent="0">
               <a:buNone/>
             </a:pPr>
             <a:endParaRPr lang="en-US" sz="900" dirty="0"/>
           </a:p>
           <a:p>
-            <a:pPr indent="0" marL="0">
+            <a:pPr marL="0" indent="0">
               <a:buNone/>
             </a:pPr>
             <a:r>
@@ -13075,7 +13459,7 @@
             <a:endParaRPr lang="en-US" sz="900" dirty="0"/>
           </a:p>
           <a:p>
-            <a:pPr indent="0" marL="0">
+            <a:pPr marL="0" indent="0">
               <a:buNone/>
             </a:pPr>
             <a:r>
@@ -13161,7 +13545,7 @@
           <a:bodyPr wrap="square" lIns="0" tIns="0" rIns="0" bIns="0" rtlCol="0" anchor="ctr"/>
           <a:lstStyle/>
           <a:p>
-            <a:pPr indent="0" marL="0">
+            <a:pPr marL="0" indent="0">
               <a:buNone/>
             </a:pPr>
             <a:r>
@@ -13200,7 +13584,7 @@
           <a:bodyPr wrap="square" lIns="0" tIns="0" rIns="0" bIns="0" rtlCol="0" anchor="ctr"/>
           <a:lstStyle/>
           <a:p>
-            <a:pPr indent="0" marL="0">
+            <a:pPr marL="0" indent="0">
               <a:buNone/>
             </a:pPr>
             <a:r>
@@ -13236,7 +13620,7 @@
           <a:bodyPr wrap="square" lIns="0" tIns="0" rIns="0" bIns="0" rtlCol="0" anchor="ctr"/>
           <a:lstStyle/>
           <a:p>
-            <a:pPr indent="0" marL="0">
+            <a:pPr marL="0" indent="0">
               <a:buNone/>
             </a:pPr>
             <a:r>
@@ -13272,7 +13656,7 @@
           <a:bodyPr wrap="square" rtlCol="0" anchor="t"/>
           <a:lstStyle/>
           <a:p>
-            <a:pPr indent="0" marL="0">
+            <a:pPr marL="0" indent="0">
               <a:buNone/>
             </a:pPr>
             <a:r>
@@ -13308,7 +13692,7 @@
           <a:bodyPr wrap="square" lIns="0" tIns="0" rIns="0" bIns="0" rtlCol="0" anchor="ctr"/>
           <a:lstStyle/>
           <a:p>
-            <a:pPr indent="0" marL="0">
+            <a:pPr marL="0" indent="0">
               <a:buNone/>
             </a:pPr>
             <a:r>
@@ -13344,7 +13728,7 @@
           <a:bodyPr wrap="square" rtlCol="0" anchor="t"/>
           <a:lstStyle/>
           <a:p>
-            <a:pPr indent="0" marL="0">
+            <a:pPr marL="0" indent="0">
               <a:buNone/>
             </a:pPr>
             <a:r>
@@ -13403,7 +13787,7 @@
           <a:bodyPr wrap="square" rtlCol="0" anchor="t"/>
           <a:lstStyle/>
           <a:p>
-            <a:pPr indent="0" marL="0">
+            <a:pPr marL="0" indent="0">
               <a:buNone/>
             </a:pPr>
             <a:r>
@@ -13417,7 +13801,7 @@
             <a:endParaRPr lang="en-US" sz="900" dirty="0"/>
           </a:p>
           <a:p>
-            <a:pPr indent="0" marL="0">
+            <a:pPr marL="0" indent="0">
               <a:buNone/>
             </a:pPr>
             <a:r>
@@ -13431,13 +13815,13 @@
             <a:endParaRPr lang="en-US" sz="900" dirty="0"/>
           </a:p>
           <a:p>
-            <a:pPr indent="0" marL="0">
+            <a:pPr marL="0" indent="0">
               <a:buNone/>
             </a:pPr>
             <a:endParaRPr lang="en-US" sz="900" dirty="0"/>
           </a:p>
           <a:p>
-            <a:pPr indent="0" marL="0">
+            <a:pPr marL="0" indent="0">
               <a:buNone/>
             </a:pPr>
             <a:r>
@@ -13451,13 +13835,13 @@
             <a:endParaRPr lang="en-US" sz="900" dirty="0"/>
           </a:p>
           <a:p>
-            <a:pPr indent="0" marL="0">
+            <a:pPr marL="0" indent="0">
               <a:buNone/>
             </a:pPr>
             <a:endParaRPr lang="en-US" sz="900" dirty="0"/>
           </a:p>
           <a:p>
-            <a:pPr indent="0" marL="0">
+            <a:pPr marL="0" indent="0">
               <a:buNone/>
             </a:pPr>
             <a:r>
@@ -13471,13 +13855,13 @@
             <a:endParaRPr lang="en-US" sz="900" dirty="0"/>
           </a:p>
           <a:p>
-            <a:pPr indent="0" marL="0">
+            <a:pPr marL="0" indent="0">
               <a:buNone/>
             </a:pPr>
             <a:endParaRPr lang="en-US" sz="900" dirty="0"/>
           </a:p>
           <a:p>
-            <a:pPr indent="0" marL="0">
+            <a:pPr marL="0" indent="0">
               <a:buNone/>
             </a:pPr>
             <a:r>
@@ -13563,7 +13947,7 @@
           <a:bodyPr wrap="square" lIns="0" tIns="0" rIns="0" bIns="0" rtlCol="0" anchor="ctr"/>
           <a:lstStyle/>
           <a:p>
-            <a:pPr indent="0" marL="0">
+            <a:pPr marL="0" indent="0">
               <a:buNone/>
             </a:pPr>
             <a:r>
@@ -13602,7 +13986,7 @@
           <a:bodyPr wrap="square" lIns="0" tIns="0" rIns="0" bIns="0" rtlCol="0" anchor="ctr"/>
           <a:lstStyle/>
           <a:p>
-            <a:pPr indent="0" marL="0">
+            <a:pPr marL="0" indent="0">
               <a:buNone/>
             </a:pPr>
             <a:r>
@@ -13638,7 +14022,7 @@
           <a:bodyPr wrap="square" lIns="0" tIns="0" rIns="0" bIns="0" rtlCol="0" anchor="ctr"/>
           <a:lstStyle/>
           <a:p>
-            <a:pPr indent="0" marL="0">
+            <a:pPr marL="0" indent="0">
               <a:buNone/>
             </a:pPr>
             <a:r>
@@ -13674,7 +14058,7 @@
           <a:bodyPr wrap="square" rtlCol="0" anchor="t"/>
           <a:lstStyle/>
           <a:p>
-            <a:pPr indent="0" marL="0">
+            <a:pPr marL="0" indent="0">
               <a:buNone/>
             </a:pPr>
             <a:r>
@@ -13710,7 +14094,7 @@
           <a:bodyPr wrap="square" lIns="0" tIns="0" rIns="0" bIns="0" rtlCol="0" anchor="ctr"/>
           <a:lstStyle/>
           <a:p>
-            <a:pPr indent="0" marL="0">
+            <a:pPr marL="0" indent="0">
               <a:buNone/>
             </a:pPr>
             <a:r>
@@ -13746,7 +14130,7 @@
           <a:bodyPr wrap="square" rtlCol="0" anchor="t"/>
           <a:lstStyle/>
           <a:p>
-            <a:pPr indent="0" marL="0">
+            <a:pPr marL="0" indent="0">
               <a:buNone/>
             </a:pPr>
             <a:r>
@@ -13805,7 +14189,7 @@
           <a:bodyPr wrap="square" rtlCol="0" anchor="t"/>
           <a:lstStyle/>
           <a:p>
-            <a:pPr indent="0" marL="0">
+            <a:pPr marL="0" indent="0">
               <a:buNone/>
             </a:pPr>
             <a:r>
@@ -13819,7 +14203,7 @@
             <a:endParaRPr lang="en-US" sz="900" dirty="0"/>
           </a:p>
           <a:p>
-            <a:pPr indent="0" marL="0">
+            <a:pPr marL="0" indent="0">
               <a:buNone/>
             </a:pPr>
             <a:r>
@@ -13833,13 +14217,13 @@
             <a:endParaRPr lang="en-US" sz="900" dirty="0"/>
           </a:p>
           <a:p>
-            <a:pPr indent="0" marL="0">
+            <a:pPr marL="0" indent="0">
               <a:buNone/>
             </a:pPr>
             <a:endParaRPr lang="en-US" sz="900" dirty="0"/>
           </a:p>
           <a:p>
-            <a:pPr indent="0" marL="0">
+            <a:pPr marL="0" indent="0">
               <a:buNone/>
             </a:pPr>
             <a:r>
@@ -13870,6 +14254,7 @@
         <a:solidFill>
           <a:srgbClr val="F8F6F1"/>
         </a:solidFill>
+        <a:effectLst/>
       </p:bgPr>
     </p:bg>
     <p:spTree>
@@ -13957,11 +14342,11 @@
           <a:bodyPr wrap="square" lIns="0" tIns="0" rIns="0" bIns="0" rtlCol="0" anchor="ctr"/>
           <a:lstStyle/>
           <a:p>
-            <a:pPr indent="0" marL="0">
-              <a:buNone/>
-            </a:pPr>
-            <a:r>
-              <a:rPr lang="en-US" sz="1300" b="1" spc="200" kern="0" dirty="0">
+            <a:pPr marL="0" indent="0">
+              <a:buNone/>
+            </a:pPr>
+            <a:r>
+              <a:rPr lang="en-US" sz="1300" b="1" kern="0" spc="200" dirty="0">
                 <a:solidFill>
                   <a:srgbClr val="9A0718"/>
                 </a:solidFill>
@@ -13996,7 +14381,7 @@
           <a:bodyPr wrap="square" lIns="0" tIns="0" rIns="0" bIns="0" rtlCol="0" anchor="ctr"/>
           <a:lstStyle/>
           <a:p>
-            <a:pPr indent="0" marL="0">
+            <a:pPr marL="0" indent="0">
               <a:buNone/>
             </a:pPr>
             <a:r>
@@ -14058,7 +14443,7 @@
           <a:bodyPr wrap="square" lIns="0" tIns="0" rIns="0" bIns="0" rtlCol="0" anchor="ctr"/>
           <a:lstStyle/>
           <a:p>
-            <a:pPr algn="r" indent="0" marL="0">
+            <a:pPr marL="0" indent="0" algn="r">
               <a:buNone/>
             </a:pPr>
             <a:r>
@@ -14067,7 +14452,7 @@
                   <a:srgbClr val="888780"/>
                 </a:solidFill>
               </a:rPr>
-              <a:t>9 / 13</a:t>
+              <a:t>9</a:t>
             </a:r>
             <a:endParaRPr lang="en-US" sz="900" dirty="0"/>
           </a:p>
@@ -14119,7 +14504,7 @@
           <a:bodyPr wrap="square" lIns="0" tIns="0" rIns="0" bIns="0" rtlCol="0" anchor="ctr"/>
           <a:lstStyle/>
           <a:p>
-            <a:pPr indent="0" marL="0">
+            <a:pPr marL="0" indent="0">
               <a:buNone/>
             </a:pPr>
             <a:r>
@@ -14180,7 +14565,7 @@
           <a:bodyPr wrap="square" lIns="0" tIns="0" rIns="0" bIns="0" rtlCol="0" anchor="ctr"/>
           <a:lstStyle/>
           <a:p>
-            <a:pPr indent="0" marL="0">
+            <a:pPr marL="0" indent="0">
               <a:buNone/>
             </a:pPr>
             <a:r>
@@ -14241,7 +14626,7 @@
           <a:bodyPr wrap="square" lIns="0" tIns="0" rIns="0" bIns="0" rtlCol="0" anchor="ctr"/>
           <a:lstStyle/>
           <a:p>
-            <a:pPr indent="0" marL="0">
+            <a:pPr marL="0" indent="0">
               <a:buNone/>
             </a:pPr>
             <a:r>
@@ -14302,7 +14687,7 @@
           <a:bodyPr wrap="square" lIns="0" tIns="0" rIns="0" bIns="0" rtlCol="0" anchor="ctr"/>
           <a:lstStyle/>
           <a:p>
-            <a:pPr indent="0" marL="0">
+            <a:pPr marL="0" indent="0">
               <a:buNone/>
             </a:pPr>
             <a:r>
@@ -14363,7 +14748,7 @@
           <a:bodyPr wrap="square" lIns="0" tIns="0" rIns="0" bIns="0" rtlCol="0" anchor="ctr"/>
           <a:lstStyle/>
           <a:p>
-            <a:pPr indent="0" marL="0">
+            <a:pPr marL="0" indent="0">
               <a:buNone/>
             </a:pPr>
             <a:r>
@@ -14424,7 +14809,7 @@
           <a:bodyPr wrap="square" lIns="0" tIns="0" rIns="0" bIns="0" rtlCol="0" anchor="ctr"/>
           <a:lstStyle/>
           <a:p>
-            <a:pPr indent="0" marL="0">
+            <a:pPr marL="0" indent="0">
               <a:buNone/>
             </a:pPr>
             <a:r>
@@ -14485,7 +14870,7 @@
           <a:bodyPr wrap="square" lIns="0" tIns="0" rIns="0" bIns="0" rtlCol="0" anchor="ctr"/>
           <a:lstStyle/>
           <a:p>
-            <a:pPr indent="0" marL="0">
+            <a:pPr marL="0" indent="0">
               <a:buNone/>
             </a:pPr>
             <a:r>
@@ -14546,7 +14931,7 @@
           <a:bodyPr wrap="square" lIns="0" tIns="0" rIns="0" bIns="0" rtlCol="0" anchor="ctr"/>
           <a:lstStyle/>
           <a:p>
-            <a:pPr indent="0" marL="0">
+            <a:pPr marL="0" indent="0">
               <a:buNone/>
             </a:pPr>
             <a:r>
@@ -14607,7 +14992,7 @@
           <a:bodyPr wrap="square" lIns="0" tIns="0" rIns="0" bIns="0" rtlCol="0" anchor="ctr"/>
           <a:lstStyle/>
           <a:p>
-            <a:pPr indent="0" marL="0">
+            <a:pPr marL="0" indent="0">
               <a:buNone/>
             </a:pPr>
             <a:r>
@@ -14668,7 +15053,7 @@
           <a:bodyPr wrap="square" lIns="0" tIns="0" rIns="0" bIns="0" rtlCol="0" anchor="ctr"/>
           <a:lstStyle/>
           <a:p>
-            <a:pPr indent="0" marL="0">
+            <a:pPr marL="0" indent="0">
               <a:buNone/>
             </a:pPr>
             <a:r>
@@ -14984,4 +15369,299 @@
     </a:ext>
   </a:extLst>
 </a:theme>
+</file>
+
+<file path=ppt/theme/theme2.xml><?xml version="1.0" encoding="utf-8"?>
+<a:theme xmlns:a="http://schemas.openxmlformats.org/drawingml/2006/main" name="Tema do Office">
+  <a:themeElements>
+    <a:clrScheme name="Office">
+      <a:dk1>
+        <a:sysClr val="windowText" lastClr="000000"/>
+      </a:dk1>
+      <a:lt1>
+        <a:sysClr val="window" lastClr="FFFFFF"/>
+      </a:lt1>
+      <a:dk2>
+        <a:srgbClr val="44546A"/>
+      </a:dk2>
+      <a:lt2>
+        <a:srgbClr val="E7E6E6"/>
+      </a:lt2>
+      <a:accent1>
+        <a:srgbClr val="4472C4"/>
+      </a:accent1>
+      <a:accent2>
+        <a:srgbClr val="ED7D31"/>
+      </a:accent2>
+      <a:accent3>
+        <a:srgbClr val="A5A5A5"/>
+      </a:accent3>
+      <a:accent4>
+        <a:srgbClr val="FFC000"/>
+      </a:accent4>
+      <a:accent5>
+        <a:srgbClr val="5B9BD5"/>
+      </a:accent5>
+      <a:accent6>
+        <a:srgbClr val="70AD47"/>
+      </a:accent6>
+      <a:hlink>
+        <a:srgbClr val="0563C1"/>
+      </a:hlink>
+      <a:folHlink>
+        <a:srgbClr val="954F72"/>
+      </a:folHlink>
+    </a:clrScheme>
+    <a:fontScheme name="Office">
+      <a:majorFont>
+        <a:latin typeface="Calibri Light" panose="020F0302020204030204"/>
+        <a:ea typeface=""/>
+        <a:cs typeface=""/>
+        <a:font script="Jpan" typeface="游ゴシック Light"/>
+        <a:font script="Hang" typeface="맑은 고딕"/>
+        <a:font script="Hans" typeface="等线 Light"/>
+        <a:font script="Hant" typeface="新細明體"/>
+        <a:font script="Arab" typeface="Times New Roman"/>
+        <a:font script="Hebr" typeface="Times New Roman"/>
+        <a:font script="Thai" typeface="Angsana New"/>
+        <a:font script="Ethi" typeface="Nyala"/>
+        <a:font script="Beng" typeface="Vrinda"/>
+        <a:font script="Gujr" typeface="Shruti"/>
+        <a:font script="Khmr" typeface="MoolBoran"/>
+        <a:font script="Knda" typeface="Tunga"/>
+        <a:font script="Guru" typeface="Raavi"/>
+        <a:font script="Cans" typeface="Euphemia"/>
+        <a:font script="Cher" typeface="Plantagenet Cherokee"/>
+        <a:font script="Yiii" typeface="Microsoft Yi Baiti"/>
+        <a:font script="Tibt" typeface="Microsoft Himalaya"/>
+        <a:font script="Thaa" typeface="MV Boli"/>
+        <a:font script="Deva" typeface="Mangal"/>
+        <a:font script="Telu" typeface="Gautami"/>
+        <a:font script="Taml" typeface="Latha"/>
+        <a:font script="Syrc" typeface="Estrangelo Edessa"/>
+        <a:font script="Orya" typeface="Kalinga"/>
+        <a:font script="Mlym" typeface="Kartika"/>
+        <a:font script="Laoo" typeface="DokChampa"/>
+        <a:font script="Sinh" typeface="Iskoola Pota"/>
+        <a:font script="Mong" typeface="Mongolian Baiti"/>
+        <a:font script="Viet" typeface="Times New Roman"/>
+        <a:font script="Uigh" typeface="Microsoft Uighur"/>
+        <a:font script="Geor" typeface="Sylfaen"/>
+        <a:font script="Armn" typeface="Arial"/>
+        <a:font script="Bugi" typeface="Leelawadee UI"/>
+        <a:font script="Bopo" typeface="Microsoft JhengHei"/>
+        <a:font script="Java" typeface="Javanese Text"/>
+        <a:font script="Lisu" typeface="Segoe UI"/>
+        <a:font script="Mymr" typeface="Myanmar Text"/>
+        <a:font script="Nkoo" typeface="Ebrima"/>
+        <a:font script="Olck" typeface="Nirmala UI"/>
+        <a:font script="Osma" typeface="Ebrima"/>
+        <a:font script="Phag" typeface="Phagspa"/>
+        <a:font script="Syrn" typeface="Estrangelo Edessa"/>
+        <a:font script="Syrj" typeface="Estrangelo Edessa"/>
+        <a:font script="Syre" typeface="Estrangelo Edessa"/>
+        <a:font script="Sora" typeface="Nirmala UI"/>
+        <a:font script="Tale" typeface="Microsoft Tai Le"/>
+        <a:font script="Talu" typeface="Microsoft New Tai Lue"/>
+        <a:font script="Tfng" typeface="Ebrima"/>
+      </a:majorFont>
+      <a:minorFont>
+        <a:latin typeface="Calibri" panose="020F0502020204030204"/>
+        <a:ea typeface=""/>
+        <a:cs typeface=""/>
+        <a:font script="Jpan" typeface="游ゴシック"/>
+        <a:font script="Hang" typeface="맑은 고딕"/>
+        <a:font script="Hans" typeface="等线"/>
+        <a:font script="Hant" typeface="新細明體"/>
+        <a:font script="Arab" typeface="Arial"/>
+        <a:font script="Hebr" typeface="Arial"/>
+        <a:font script="Thai" typeface="Cordia New"/>
+        <a:font script="Ethi" typeface="Nyala"/>
+        <a:font script="Beng" typeface="Vrinda"/>
+        <a:font script="Gujr" typeface="Shruti"/>
+        <a:font script="Khmr" typeface="DaunPenh"/>
+        <a:font script="Knda" typeface="Tunga"/>
+        <a:font script="Guru" typeface="Raavi"/>
+        <a:font script="Cans" typeface="Euphemia"/>
+        <a:font script="Cher" typeface="Plantagenet Cherokee"/>
+        <a:font script="Yiii" typeface="Microsoft Yi Baiti"/>
+        <a:font script="Tibt" typeface="Microsoft Himalaya"/>
+        <a:font script="Thaa" typeface="MV Boli"/>
+        <a:font script="Deva" typeface="Mangal"/>
+        <a:font script="Telu" typeface="Gautami"/>
+        <a:font script="Taml" typeface="Latha"/>
+        <a:font script="Syrc" typeface="Estrangelo Edessa"/>
+        <a:font script="Orya" typeface="Kalinga"/>
+        <a:font script="Mlym" typeface="Kartika"/>
+        <a:font script="Laoo" typeface="DokChampa"/>
+        <a:font script="Sinh" typeface="Iskoola Pota"/>
+        <a:font script="Mong" typeface="Mongolian Baiti"/>
+        <a:font script="Viet" typeface="Arial"/>
+        <a:font script="Uigh" typeface="Microsoft Uighur"/>
+        <a:font script="Geor" typeface="Sylfaen"/>
+        <a:font script="Armn" typeface="Arial"/>
+        <a:font script="Bugi" typeface="Leelawadee UI"/>
+        <a:font script="Bopo" typeface="Microsoft JhengHei"/>
+        <a:font script="Java" typeface="Javanese Text"/>
+        <a:font script="Lisu" typeface="Segoe UI"/>
+        <a:font script="Mymr" typeface="Myanmar Text"/>
+        <a:font script="Nkoo" typeface="Ebrima"/>
+        <a:font script="Olck" typeface="Nirmala UI"/>
+        <a:font script="Osma" typeface="Ebrima"/>
+        <a:font script="Phag" typeface="Phagspa"/>
+        <a:font script="Syrn" typeface="Estrangelo Edessa"/>
+        <a:font script="Syrj" typeface="Estrangelo Edessa"/>
+        <a:font script="Syre" typeface="Estrangelo Edessa"/>
+        <a:font script="Sora" typeface="Nirmala UI"/>
+        <a:font script="Tale" typeface="Microsoft Tai Le"/>
+        <a:font script="Talu" typeface="Microsoft New Tai Lue"/>
+        <a:font script="Tfng" typeface="Ebrima"/>
+      </a:minorFont>
+    </a:fontScheme>
+    <a:fmtScheme name="Office">
+      <a:fillStyleLst>
+        <a:solidFill>
+          <a:schemeClr val="phClr"/>
+        </a:solidFill>
+        <a:gradFill rotWithShape="1">
+          <a:gsLst>
+            <a:gs pos="0">
+              <a:schemeClr val="phClr">
+                <a:lumMod val="110000"/>
+                <a:satMod val="105000"/>
+                <a:tint val="67000"/>
+              </a:schemeClr>
+            </a:gs>
+            <a:gs pos="50000">
+              <a:schemeClr val="phClr">
+                <a:lumMod val="105000"/>
+                <a:satMod val="103000"/>
+                <a:tint val="73000"/>
+              </a:schemeClr>
+            </a:gs>
+            <a:gs pos="100000">
+              <a:schemeClr val="phClr">
+                <a:lumMod val="105000"/>
+                <a:satMod val="109000"/>
+                <a:tint val="81000"/>
+              </a:schemeClr>
+            </a:gs>
+          </a:gsLst>
+          <a:lin ang="5400000" scaled="0"/>
+        </a:gradFill>
+        <a:gradFill rotWithShape="1">
+          <a:gsLst>
+            <a:gs pos="0">
+              <a:schemeClr val="phClr">
+                <a:satMod val="103000"/>
+                <a:lumMod val="102000"/>
+                <a:tint val="94000"/>
+              </a:schemeClr>
+            </a:gs>
+            <a:gs pos="50000">
+              <a:schemeClr val="phClr">
+                <a:satMod val="110000"/>
+                <a:lumMod val="100000"/>
+                <a:shade val="100000"/>
+              </a:schemeClr>
+            </a:gs>
+            <a:gs pos="100000">
+              <a:schemeClr val="phClr">
+                <a:lumMod val="99000"/>
+                <a:satMod val="120000"/>
+                <a:shade val="78000"/>
+              </a:schemeClr>
+            </a:gs>
+          </a:gsLst>
+          <a:lin ang="5400000" scaled="0"/>
+        </a:gradFill>
+      </a:fillStyleLst>
+      <a:lnStyleLst>
+        <a:ln w="6350" cap="flat" cmpd="sng" algn="ctr">
+          <a:solidFill>
+            <a:schemeClr val="phClr"/>
+          </a:solidFill>
+          <a:prstDash val="solid"/>
+          <a:miter lim="800000"/>
+        </a:ln>
+        <a:ln w="12700" cap="flat" cmpd="sng" algn="ctr">
+          <a:solidFill>
+            <a:schemeClr val="phClr"/>
+          </a:solidFill>
+          <a:prstDash val="solid"/>
+          <a:miter lim="800000"/>
+        </a:ln>
+        <a:ln w="19050" cap="flat" cmpd="sng" algn="ctr">
+          <a:solidFill>
+            <a:schemeClr val="phClr"/>
+          </a:solidFill>
+          <a:prstDash val="solid"/>
+          <a:miter lim="800000"/>
+        </a:ln>
+      </a:lnStyleLst>
+      <a:effectStyleLst>
+        <a:effectStyle>
+          <a:effectLst/>
+        </a:effectStyle>
+        <a:effectStyle>
+          <a:effectLst/>
+        </a:effectStyle>
+        <a:effectStyle>
+          <a:effectLst>
+            <a:outerShdw blurRad="57150" dist="19050" dir="5400000" algn="ctr" rotWithShape="0">
+              <a:srgbClr val="000000">
+                <a:alpha val="63000"/>
+              </a:srgbClr>
+            </a:outerShdw>
+          </a:effectLst>
+        </a:effectStyle>
+      </a:effectStyleLst>
+      <a:bgFillStyleLst>
+        <a:solidFill>
+          <a:schemeClr val="phClr"/>
+        </a:solidFill>
+        <a:solidFill>
+          <a:schemeClr val="phClr">
+            <a:tint val="95000"/>
+            <a:satMod val="170000"/>
+          </a:schemeClr>
+        </a:solidFill>
+        <a:gradFill rotWithShape="1">
+          <a:gsLst>
+            <a:gs pos="0">
+              <a:schemeClr val="phClr">
+                <a:tint val="93000"/>
+                <a:satMod val="150000"/>
+                <a:shade val="98000"/>
+                <a:lumMod val="102000"/>
+              </a:schemeClr>
+            </a:gs>
+            <a:gs pos="50000">
+              <a:schemeClr val="phClr">
+                <a:tint val="98000"/>
+                <a:satMod val="130000"/>
+                <a:shade val="90000"/>
+                <a:lumMod val="103000"/>
+              </a:schemeClr>
+            </a:gs>
+            <a:gs pos="100000">
+              <a:schemeClr val="phClr">
+                <a:shade val="63000"/>
+                <a:satMod val="120000"/>
+              </a:schemeClr>
+            </a:gs>
+          </a:gsLst>
+          <a:lin ang="5400000" scaled="0"/>
+        </a:gradFill>
+      </a:bgFillStyleLst>
+    </a:fmtScheme>
+  </a:themeElements>
+  <a:objectDefaults/>
+  <a:extraClrSchemeLst/>
+  <a:extLst>
+    <a:ext uri="{05A4C25C-085E-4340-85A3-A5531E510DB2}">
+      <thm15:themeFamily xmlns:thm15="http://schemas.microsoft.com/office/thememl/2012/main" name="Office Theme" id="{62F939B6-93AF-4DB8-9C6B-D6C7DFDC589F}" vid="{4A3C46E8-61CC-4603-A589-7422A47A8E4A}"/>
+    </a:ext>
+  </a:extLst>
+</a:theme>
 </file>
--- a/Vanguard_ABTest_Presentation.pptx
+++ b/Vanguard_ABTest_Presentation.pptx
@@ -2480,8 +2480,9 @@
                 <a:solidFill>
                   <a:srgbClr val="F1EFE8"/>
                 </a:solidFill>
-              </a:rPr>
-              <a:t>[ Demo ]</a:t>
+                <a:hlinkClick r:id="rId3"/>
+              </a:rPr>
+              <a:t>[ Link ]</a:t>
             </a:r>
             <a:endParaRPr lang="en-US" sz="1400" dirty="0"/>
           </a:p>

--- a/Vanguard_ABTest_Presentation.pptx
+++ b/Vanguard_ABTest_Presentation.pptx
@@ -2863,7 +2863,7 @@
                   <a:srgbClr val="888780"/>
                 </a:solidFill>
               </a:rPr>
-              <a:t>Week 1: KPIs and Hypothesis Testing divided individually — one task per person.</a:t>
+              <a:t>Week 1: KPIs and Hypothesis Testing divided individually (one task per person).</a:t>
             </a:r>
             <a:endParaRPr lang="en-US" sz="1200" dirty="0"/>
           </a:p>
@@ -2883,7 +2883,7 @@
                   <a:srgbClr val="888780"/>
                 </a:solidFill>
               </a:rPr>
-              <a:t>Week 2: One big task per team member — shared ownership of deliverables.</a:t>
+              <a:t>Week 2: One big task per team member, with shared ownership of deliverables.</a:t>
             </a:r>
             <a:endParaRPr lang="en-US" sz="1200" dirty="0"/>
           </a:p>
@@ -3075,38 +3075,62 @@
           <a:bodyPr wrap="square" rtlCol="0" anchor="t"/>
           <a:lstStyle/>
           <a:p>
-            <a:pPr marL="0" indent="0">
-              <a:buNone/>
-            </a:pPr>
             <a:r>
               <a:rPr lang="en-US" sz="1200" i="1" dirty="0">
                 <a:solidFill>
                   <a:srgbClr val="888780"/>
                 </a:solidFill>
               </a:rPr>
-              <a:t>Challenges: Communication — coordinating decisions, naming conventions, code structure and which dataset to use at each stage of the analysis.</a:t>
+              <a:t>Challenges: Communication: coordinating decisions, naming conventions, code structure and which dataset to use at each stage of the analysis.</a:t>
             </a:r>
             <a:endParaRPr lang="en-US" sz="1200" dirty="0"/>
           </a:p>
           <a:p>
-            <a:pPr marL="0" indent="0">
-              <a:buNone/>
-            </a:pPr>
             <a:endParaRPr lang="en-US" sz="1200" dirty="0"/>
           </a:p>
           <a:p>
-            <a:pPr marL="0" indent="0">
-              <a:buNone/>
-            </a:pPr>
             <a:r>
               <a:rPr lang="en-US" sz="1200" i="1" dirty="0">
                 <a:solidFill>
                   <a:srgbClr val="888780"/>
                 </a:solidFill>
               </a:rPr>
-              <a:t>Learnings: Regular review is essential to ensure consistency in grouping methodology. Being precise and strict with the questions we ask — and get asked — is key to avoiding misaligned results.</a:t>
-            </a:r>
-            <a:endParaRPr lang="en-US" sz="1200" dirty="0"/>
+              <a:t>Building one beautiful, consistent, streamlined dashboard that works 100%.</a:t>
+            </a:r>
+          </a:p>
+          <a:p>
+            <a:endParaRPr lang="en-US" sz="1200" i="1" dirty="0">
+              <a:solidFill>
+                <a:srgbClr val="888780"/>
+              </a:solidFill>
+            </a:endParaRPr>
+          </a:p>
+          <a:p>
+            <a:r>
+              <a:rPr lang="en-US" sz="1200" i="1" dirty="0">
+                <a:solidFill>
+                  <a:srgbClr val="888780"/>
+                </a:solidFill>
+              </a:rPr>
+              <a:t>Learnings: Regular review is essential to ensure consistency in grouping methodology. Being precise and strict with the questions we ask, and our answers, is key to avoiding misaligned results.</a:t>
+            </a:r>
+          </a:p>
+          <a:p>
+            <a:endParaRPr lang="en-US" sz="1200" i="1" dirty="0">
+              <a:solidFill>
+                <a:srgbClr val="888780"/>
+              </a:solidFill>
+            </a:endParaRPr>
+          </a:p>
+          <a:p>
+            <a:r>
+              <a:rPr lang="en-US" sz="1200" i="1" dirty="0">
+                <a:solidFill>
+                  <a:srgbClr val="888780"/>
+                </a:solidFill>
+              </a:rPr>
+              <a:t>Different datasets do not allow filtering of visualizations built with them.</a:t>
+            </a:r>
           </a:p>
         </p:txBody>
       </p:sp>
@@ -3485,7 +3509,7 @@
                   <a:srgbClr val="444441"/>
                 </a:solidFill>
               </a:rPr>
-              <a:t>· Large sample size — 317,235 rows, 30k+ unique visits per group</a:t>
+              <a:t>· Large sample size: 317,235 rows, 30k+ unique visits per group</a:t>
             </a:r>
             <a:endParaRPr lang="en-US" sz="900" dirty="0"/>
           </a:p>
@@ -3557,7 +3581,7 @@
                   <a:srgbClr val="444441"/>
                 </a:solidFill>
               </a:rPr>
-              <a:t>· Multiple KPIs analysed across completion, time, errors and funnel drop-off — drop-off was measured but ultimately excluded from the formal analysis</a:t>
+              <a:t>· Multiple KPIs analysed across completion, time, errors and funnel drop-off (drop-off was measured but ultimately excluded from the formal analysis)</a:t>
             </a:r>
             <a:endParaRPr lang="en-US" sz="900" dirty="0"/>
           </a:p>
@@ -3593,7 +3617,7 @@
                   <a:srgbClr val="444441"/>
                 </a:solidFill>
               </a:rPr>
-              <a:t>· No meaningful demographic bias confirmed through Tableau visualisations</a:t>
+              <a:t>· No meaningful demographic bias confirmed through Tableau visualizations</a:t>
             </a:r>
             <a:endParaRPr lang="en-US" sz="900" dirty="0"/>
           </a:p>
@@ -3795,7 +3819,7 @@
                   <a:srgbClr val="444441"/>
                 </a:solidFill>
               </a:rPr>
-              <a:t>· Test period only ~3 months — seasonal effects cannot be ruled out</a:t>
+              <a:t>· Test period only ~3 months (seasonal effects cannot be ruled out)</a:t>
             </a:r>
             <a:endParaRPr lang="en-US" sz="900" dirty="0"/>
           </a:p>
@@ -3831,7 +3855,7 @@
                   <a:srgbClr val="444441"/>
                 </a:solidFill>
               </a:rPr>
-              <a:t>· Assignment method undocumented — minor randomisation risk remains</a:t>
+              <a:t>· Assignment method undocumented (minor randomisation risk remains)</a:t>
             </a:r>
             <a:endParaRPr lang="en-US" sz="900" dirty="0"/>
           </a:p>
@@ -3867,7 +3891,7 @@
                   <a:srgbClr val="444441"/>
                 </a:solidFill>
               </a:rPr>
-              <a:t>· Step-flow logic unclear — uncertain which steps can lead backwards to which</a:t>
+              <a:t>· Step-flow logic unclear: uncertain which steps can lead backwards to which</a:t>
             </a:r>
             <a:endParaRPr lang="en-US" sz="900" dirty="0"/>
           </a:p>
@@ -4462,7 +4486,7 @@
                   <a:srgbClr val="F1EFE8"/>
                 </a:solidFill>
               </a:rPr>
-              <a:t>The new UI significantly boosted completion rates — up 13.63%, well above the 5% target. Users in the test group dropped off less at the beginning and end of the funnel and progressed further through the process.</a:t>
+              <a:t>The new UI significantly boosted completion rates: up 13.63%, well above the 5% target. Users in the test group dropped off less at the beginning and end of the funnel and progressed further through the process.</a:t>
             </a:r>
             <a:endParaRPr lang="en-US" sz="1200" dirty="0"/>
           </a:p>
@@ -4499,7 +4523,7 @@
                   <a:srgbClr val="444441"/>
                 </a:solidFill>
               </a:rPr>
-              <a:t>Completion rate jumped from 51.91% to 65.54% — the new design works.</a:t>
+              <a:t>Completion rate jumped from 51.91% to 65.54%, meaning the new design works.</a:t>
             </a:r>
             <a:endParaRPr lang="en-US" sz="1200" dirty="0"/>
           </a:p>
@@ -4514,7 +4538,7 @@
                   <a:srgbClr val="444441"/>
                 </a:solidFill>
               </a:rPr>
-              <a:t>Time improvements were significant at Start, Step 2 and Step 3 — but test users were actually slower at Confirm.</a:t>
+              <a:t>Time improvements were significant at Start, Step 2 and Step 3; but test users were actually slower at Confirm.</a:t>
             </a:r>
             <a:endParaRPr lang="en-US" sz="1200" dirty="0"/>
           </a:p>
@@ -4529,7 +4553,7 @@
                   <a:srgbClr val="444441"/>
                 </a:solidFill>
               </a:rPr>
-              <a:t>Error rates were higher in the test group — users navigated backwards more, especially early on.</a:t>
+              <a:t>Error rates were higher in the test group; users navigated backwards more, especially early on.</a:t>
             </a:r>
             <a:endParaRPr lang="en-US" sz="1200" dirty="0"/>
           </a:p>
@@ -7642,7 +7666,7 @@
                   <a:srgbClr val="1A1A2E"/>
                 </a:solidFill>
               </a:rPr>
-              <a:t>Key insight: most clients are middle-aged (31–59), with balance increasing with age. Gender is evenly split across Male, Female and Unknown — suggesting incomplete demographic data.</a:t>
+              <a:t>Key insight: most clients are middle-aged (31–59), with balance increasing with age. Gender is evenly split across Male, Female and Unknown, which suggests incomplete demographic data.</a:t>
             </a:r>
             <a:endParaRPr lang="en-US" sz="1000" dirty="0"/>
           </a:p>
@@ -10316,7 +10340,7 @@
                   <a:srgbClr val="1A1A2E"/>
                 </a:solidFill>
               </a:rPr>
-              <a:t>Key insight: test group was significantly faster at Start, Step 2 and Step 3. No significant difference at Step 1. Test users spent considerably more time at Confirm — a negative finding.</a:t>
+              <a:t>Key insight: test group was significantly faster at Start, Step 2 and Step 3. No significant difference at Step 1. Test users spent considerably more time at Confirm (a negative finding)</a:t>
             </a:r>
             <a:endParaRPr lang="en-US" sz="1000" dirty="0"/>
           </a:p>
@@ -10683,7 +10707,7 @@
                   <a:srgbClr val="1A1A2E"/>
                 </a:solidFill>
               </a:rPr>
-              <a:t>Interesting finding: test group had higher error rates at Steps 1–2, but a dramatically lower rate at Confirm (9.61% vs 39.03%). The new UI did not reduce overall friction.</a:t>
+              <a:t>Interesting finding: test group had higher error rates at Steps 1–2, but a dramatically lower rate at Confirm (9.61% vs 39.03%). The new UI did not reduce overall friction</a:t>
             </a:r>
             <a:endParaRPr lang="en-US" sz="1000" dirty="0"/>
           </a:p>
@@ -13469,7 +13493,7 @@
                   <a:srgbClr val="888780"/>
                 </a:solidFill>
               </a:rPr>
-              <a:t>The new design significantly improved process completion.</a:t>
+              <a:t>The new design significantly improved process completion</a:t>
             </a:r>
             <a:endParaRPr lang="en-US" sz="900" dirty="0"/>
           </a:p>
@@ -13831,7 +13855,7 @@
                   <a:srgbClr val="888780"/>
                 </a:solidFill>
               </a:rPr>
-              <a:t>Start (p=0.0011) · Step 2 (p=0.0101) · Step 3 (p=0.0001): test group significantly faster.</a:t>
+              <a:t>Start (p=0.0011) · Step 2 (p=0.0101) · Step 3 (p=0.0001): test group significantly faster</a:t>
             </a:r>
             <a:endParaRPr lang="en-US" sz="900" dirty="0"/>
           </a:p>
@@ -13851,7 +13875,7 @@
                   <a:srgbClr val="888780"/>
                 </a:solidFill>
               </a:rPr>
-              <a:t>Step 1 (p=1.0): no significant difference.</a:t>
+              <a:t>Step 1 (p=1.0): no significant difference</a:t>
             </a:r>
             <a:endParaRPr lang="en-US" sz="900" dirty="0"/>
           </a:p>
@@ -13871,7 +13895,7 @@
                   <a:srgbClr val="888780"/>
                 </a:solidFill>
               </a:rPr>
-              <a:t>Confirm (p=0.9999): test group is actually slower — negative finding.</a:t>
+              <a:t>Confirm (p=0.9999): test group is actually slower (negative finding)</a:t>
             </a:r>
             <a:endParaRPr lang="en-US" sz="900" dirty="0"/>
           </a:p>
@@ -14233,7 +14257,7 @@
                   <a:srgbClr val="888780"/>
                 </a:solidFill>
               </a:rPr>
-              <a:t>The new UI did not reduce errors — test group showed higher error rate than control.</a:t>
+              <a:t>The new UI did not reduce errors: test group showed higher error rate than control</a:t>
             </a:r>
             <a:endParaRPr lang="en-US" sz="900" dirty="0"/>
           </a:p>
@@ -14697,7 +14721,7 @@
                   <a:srgbClr val="444441"/>
                 </a:solidFill>
               </a:rPr>
-              <a:t>Groups unequal (~3k more in test), assignment method undocumented — bias expected but not seen in visualisations.</a:t>
+              <a:t>Groups unequal (~3k more in test), assignment method undocumented; bias expected but not seen in visualisations.</a:t>
             </a:r>
             <a:endParaRPr lang="en-US" sz="1000" dirty="0"/>
           </a:p>

--- a/Vanguard_ABTest_Presentation.pptx
+++ b/Vanguard_ABTest_Presentation.pptx
@@ -7674,37 +7674,6 @@
       </p:sp>
       <p:pic>
         <p:nvPicPr>
-          <p:cNvPr id="25" name="Imagem 24">
-            <a:extLst>
-              <a:ext uri="{FF2B5EF4-FFF2-40B4-BE49-F238E27FC236}">
-                <a16:creationId xmlns:a16="http://schemas.microsoft.com/office/drawing/2014/main" id="{6CBE0DA7-8328-0D67-B8A1-3E9527A7AF63}"/>
-              </a:ext>
-            </a:extLst>
-          </p:cNvPr>
-          <p:cNvPicPr>
-            <a:picLocks noChangeAspect="1"/>
-          </p:cNvPicPr>
-          <p:nvPr/>
-        </p:nvPicPr>
-        <p:blipFill>
-          <a:blip r:embed="rId3"/>
-          <a:srcRect l="37847" t="24864" r="38872" b="18796"/>
-          <a:stretch>
-            <a:fillRect/>
-          </a:stretch>
-        </p:blipFill>
-        <p:spPr>
-          <a:xfrm>
-            <a:off x="420624" y="2006600"/>
-            <a:ext cx="1783539" cy="1738629"/>
-          </a:xfrm>
-          <a:prstGeom prst="rect">
-            <a:avLst/>
-          </a:prstGeom>
-        </p:spPr>
-      </p:pic>
-      <p:pic>
-        <p:nvPicPr>
           <p:cNvPr id="26" name="Imagem 25">
             <a:extLst>
               <a:ext uri="{FF2B5EF4-FFF2-40B4-BE49-F238E27FC236}">
@@ -7718,7 +7687,7 @@
           <p:nvPr/>
         </p:nvPicPr>
         <p:blipFill>
-          <a:blip r:embed="rId4"/>
+          <a:blip r:embed="rId3"/>
           <a:srcRect l="1601" r="21786" b="2862"/>
           <a:stretch>
             <a:fillRect/>
@@ -7749,7 +7718,7 @@
           <p:nvPr/>
         </p:nvPicPr>
         <p:blipFill>
-          <a:blip r:embed="rId4"/>
+          <a:blip r:embed="rId3"/>
           <a:srcRect l="43765" t="95986" r="42167"/>
           <a:stretch>
             <a:fillRect/>
@@ -7780,7 +7749,7 @@
           <p:nvPr/>
         </p:nvPicPr>
         <p:blipFill>
-          <a:blip r:embed="rId4"/>
+          <a:blip r:embed="rId3"/>
           <a:srcRect t="41625" r="98269" b="49791"/>
           <a:stretch>
             <a:fillRect/>
@@ -7811,7 +7780,7 @@
           <p:nvPr/>
         </p:nvPicPr>
         <p:blipFill>
-          <a:blip r:embed="rId5"/>
+          <a:blip r:embed="rId4"/>
           <a:stretch>
             <a:fillRect/>
           </a:stretch>
@@ -7820,6 +7789,37 @@
           <a:xfrm>
             <a:off x="2657475" y="1714754"/>
             <a:ext cx="1331673" cy="2331211"/>
+          </a:xfrm>
+          <a:prstGeom prst="rect">
+            <a:avLst/>
+          </a:prstGeom>
+        </p:spPr>
+      </p:pic>
+      <p:pic>
+        <p:nvPicPr>
+          <p:cNvPr id="21" name="Imagem 20">
+            <a:extLst>
+              <a:ext uri="{FF2B5EF4-FFF2-40B4-BE49-F238E27FC236}">
+                <a16:creationId xmlns:a16="http://schemas.microsoft.com/office/drawing/2014/main" id="{AEF83EF7-EC3E-D970-DBD2-B49D8995F396}"/>
+              </a:ext>
+            </a:extLst>
+          </p:cNvPr>
+          <p:cNvPicPr>
+            <a:picLocks noChangeAspect="1"/>
+          </p:cNvPicPr>
+          <p:nvPr/>
+        </p:nvPicPr>
+        <p:blipFill>
+          <a:blip r:embed="rId5"/>
+          <a:srcRect l="37431" t="24655" r="38386" b="19064"/>
+          <a:stretch>
+            <a:fillRect/>
+          </a:stretch>
+        </p:blipFill>
+        <p:spPr>
+          <a:xfrm>
+            <a:off x="420624" y="1943171"/>
+            <a:ext cx="1773936" cy="1714428"/>
           </a:xfrm>
           <a:prstGeom prst="rect">
             <a:avLst/>
